--- a/BAO_CAO_TIEN_DO_SLIDES.pptx
+++ b/BAO_CAO_TIEN_DO_SLIDES.pptx
@@ -3243,7 +3243,7 @@
               </a:defRPr>
             </a:pPr>
             <a:r>
-              <a:t>PHÂN TÍCH KHÁM PHÁ, SUY LUẬN THỐNG KÊ &amp; MÔ HÌNH HÓA GIÁ BẤT ĐỘNG SẢN HÀ NỘI</a:t>
+              <a:t>PHÂN TÍCH KHÁM PHÁ, SUY LUẬN THỐNG KÊ &amp; PHÂN TÍCH HỒI QUY GIÁ BĐS HÀ NỘI</a:t>
             </a:r>
           </a:p>
           <a:p>
@@ -3251,7 +3251,7 @@
               <a:spcBef>
                 <a:spcPts val="800"/>
               </a:spcBef>
-              <a:defRPr sz="1350">
+              <a:defRPr sz="1400">
                 <a:solidFill>
                   <a:srgbClr val="CBD5E1"/>
                 </a:solidFill>
@@ -3259,7 +3259,7 @@
               </a:defRPr>
             </a:pPr>
             <a:r>
-              <a:t>Dữ liệu thực nghiệm: 33.456 tin rao bán • Tiền xử lý &amp; Làm sạch • Thống kê suy luận • Mô hình hóa &amp; Đánh giá</a:t>
+              <a:t>Quy mô dữ liệu: 99.998 tin rao thô ➔ 37.402 bản ghi chuẩn hóa sạch (18 tháng gần nhất) • INFO3020</a:t>
             </a:r>
           </a:p>
         </p:txBody>
@@ -3306,7 +3306,7 @@
           <a:lstStyle/>
           <a:p>
             <a:pPr algn="ctr">
-              <a:defRPr sz="1450" b="1">
+              <a:defRPr sz="1500" b="1">
                 <a:solidFill>
                   <a:srgbClr val="D97706"/>
                 </a:solidFill>
@@ -3322,7 +3322,7 @@
               <a:spcBef>
                 <a:spcPts val="1000"/>
               </a:spcBef>
-              <a:defRPr sz="1300">
+              <a:defRPr sz="1350">
                 <a:solidFill>
                   <a:srgbClr val="FFFFFF"/>
                 </a:solidFill>
@@ -3330,15 +3330,15 @@
               </a:defRPr>
             </a:pPr>
             <a:r>
-              <a:t>• Môn học: Khoa Học Dữ Liệu Thực Hành (Tuần 1 - 10)</a:t>
+              <a:t>• Học phần: Khoa Học Dữ Liệu Thực Hành (INFO3020 - Tuần 1 đến 10)</a:t>
             </a:r>
             <a:br/>
             <a:r>
-              <a:t>• Bộ môn: Khoa Học Dữ Liệu &amp; Trí Tuệ Nhân Tạo</a:t>
+              <a:t>• Đơn vị: Bộ môn Khoa Học Dữ Liệu &amp; Trí Tuệ Nhân Tạo</a:t>
             </a:r>
             <a:br/>
             <a:r>
-              <a:t>• Mục tiêu: Nghiệm thu báo cáo tiến độ &amp; Mô hình hóa định giá BĐS</a:t>
+              <a:t>• Mục tiêu: Báo cáo nghiệm thu tiến độ EDA, Thống kê suy luận &amp; Phân tích Hồi quy</a:t>
             </a:r>
           </a:p>
         </p:txBody>
@@ -3385,7 +3385,7 @@
           <a:lstStyle/>
           <a:p>
             <a:pPr algn="ctr">
-              <a:defRPr sz="1450" b="1">
+              <a:defRPr sz="1500" b="1">
                 <a:solidFill>
                   <a:srgbClr val="D97706"/>
                 </a:solidFill>
@@ -3401,7 +3401,7 @@
               <a:spcBef>
                 <a:spcPts val="1000"/>
               </a:spcBef>
-              <a:defRPr sz="1300">
+              <a:defRPr sz="1350">
                 <a:solidFill>
                   <a:srgbClr val="FFFFFF"/>
                 </a:solidFill>
@@ -3561,7 +3561,7 @@
               </a:defRPr>
             </a:pPr>
             <a:r>
-              <a:t>Biểu Đồ 4: Phân Bố Đơn Giá (triệu/m²) Chi Tiết 30 Quận / Huyện Hà Nội</a:t>
+              <a:t>Biểu Đồ 4: Phân Bố Đơn Giá 12 Quận/Huyện Trọng Điểm Theo Mức Trung Vị</a:t>
             </a:r>
           </a:p>
         </p:txBody>
@@ -3746,7 +3746,7 @@
           <a:lstStyle/>
           <a:p>
             <a:pPr>
-              <a:defRPr sz="1250" b="1">
+              <a:defRPr sz="1350" b="1">
                 <a:solidFill>
                   <a:srgbClr val="FFFFFF"/>
                 </a:solidFill>
@@ -3754,7 +3754,7 @@
               </a:defRPr>
             </a:pPr>
             <a:r>
-              <a:t>1. TOP 3 QUẬN ĐẮT ĐỎ NHẤT</a:t>
+              <a:t>1. TẦNG 1: LÕI TRUNG TÂM (100 - 105 TR/M²)</a:t>
             </a:r>
           </a:p>
         </p:txBody>
@@ -3785,7 +3785,7 @@
               <a:spcBef>
                 <a:spcPts val="400"/>
               </a:spcBef>
-              <a:defRPr sz="1300">
+              <a:defRPr sz="1350">
                 <a:solidFill>
                   <a:srgbClr val="1E293B"/>
                 </a:solidFill>
@@ -3793,7 +3793,7 @@
               </a:defRPr>
             </a:pPr>
             <a:r>
-              <a:t>Hoàn Kiếm (trung vị &gt;280 tr/m²), Ba Đình (195 tr/m²), Hai Bà Trưng (175 tr/m²). Nguồn cung khan hiếm, giá trị bảo toàn cao.</a:t>
+              <a:t>Cầu Giấy, Ba Đình, Tây Hồ, Đống Đa. Nền giá cao nhất thành phố, giá trị bảo toàn ổn định và thanh khoản luôn ở mức rất cao.</a:t>
             </a:r>
           </a:p>
         </p:txBody>
@@ -3909,7 +3909,7 @@
           <a:lstStyle/>
           <a:p>
             <a:pPr>
-              <a:defRPr sz="1250" b="1">
+              <a:defRPr sz="1350" b="1">
                 <a:solidFill>
                   <a:srgbClr val="FFFFFF"/>
                 </a:solidFill>
@@ -3917,7 +3917,7 @@
               </a:defRPr>
             </a:pPr>
             <a:r>
-              <a:t>2. TOP 3 VÙNG GIÁ DỄ TIẾP CẬN</a:t>
+              <a:t>2. TẦNG 2: ĐÔ THỊ MỞ RỘNG (85 - 95 TR/M²)</a:t>
             </a:r>
           </a:p>
         </p:txBody>
@@ -3948,7 +3948,7 @@
               <a:spcBef>
                 <a:spcPts val="400"/>
               </a:spcBef>
-              <a:defRPr sz="1300">
+              <a:defRPr sz="1350">
                 <a:solidFill>
                   <a:srgbClr val="1E293B"/>
                 </a:solidFill>
@@ -3956,7 +3956,7 @@
               </a:defRPr>
             </a:pPr>
             <a:r>
-              <a:t>Ba Vì (22 tr/m²), Sóc Sơn (26 tr/m²), Mê Linh (31 tr/m²). Biên độ tăng trưởng dài hạn lớn gắn liền quy hoạch hạ tầng vành đai.</a:t>
+              <a:t>Thanh Xuân, Hai Bà Trưng, Nam Từ Liêm. Trục phát triển sôi động với mạng lưới metro, hạ tầng dịch vụ và văn phòng hoàn thiện.</a:t>
             </a:r>
           </a:p>
         </p:txBody>
@@ -4072,7 +4072,7 @@
           <a:lstStyle/>
           <a:p>
             <a:pPr>
-              <a:defRPr sz="1250" b="1">
+              <a:defRPr sz="1350" b="1">
                 <a:solidFill>
                   <a:srgbClr val="FFFFFF"/>
                 </a:solidFill>
@@ -4080,7 +4080,7 @@
               </a:defRPr>
             </a:pPr>
             <a:r>
-              <a:t>3. ĐỘ PHÂN TÁN NỘI BỘ (IQR)</a:t>
+              <a:t>3. TẦNG 3: VÀNH ĐAI &amp; VEN ĐÔ (60 - 80 TR/M²)</a:t>
             </a:r>
           </a:p>
         </p:txBody>
@@ -4111,7 +4111,7 @@
               <a:spcBef>
                 <a:spcPts val="400"/>
               </a:spcBef>
-              <a:defRPr sz="1300">
+              <a:defRPr sz="1350">
                 <a:solidFill>
                   <a:srgbClr val="1E293B"/>
                 </a:solidFill>
@@ -4119,7 +4119,7 @@
               </a:defRPr>
             </a:pPr>
             <a:r>
-              <a:t>Các quận trung tâm có 'râu hộp' (whisker) rất dài, phản ánh sự phân hóa sâu sắc giữa phân khúc nhà mặt phố và nhà ngõ sâu.</a:t>
+              <a:t>Bắc Từ Liêm, Hoàng Mai, Long Biên, Hà Đông, Thanh Trì. Mặt bằng giá mềm, quỹ đất rộng, là lựa chọn an cư của các gia đình trẻ.</a:t>
             </a:r>
           </a:p>
         </p:txBody>
@@ -4259,7 +4259,7 @@
               </a:defRPr>
             </a:pPr>
             <a:r>
-              <a:t>Thử Nghiệm &amp; So Sánh 5 Mô Hình Machine Learning</a:t>
+              <a:t>So Sánh 4 Phương Pháp Hồi Quy Tuyến Tính &amp; Điều Chuẩn (Tuần 10)</a:t>
             </a:r>
           </a:p>
         </p:txBody>
@@ -4283,21 +4283,19 @@
                 <a:tableStyleId>{5C22544A-7EE6-4342-B048-85BDC9FD1C3A}</a:tableStyleId>
               </a:tblPr>
               <a:tblGrid>
-                <a:gridCol w="2133295"/>
-                <a:gridCol w="1371600"/>
-                <a:gridCol w="1645920"/>
-                <a:gridCol w="1645920"/>
-                <a:gridCol w="1645920"/>
-                <a:gridCol w="2286000"/>
+                <a:gridCol w="2560320"/>
+                <a:gridCol w="2011680"/>
+                <a:gridCol w="2011680"/>
+                <a:gridCol w="4144975"/>
               </a:tblGrid>
-              <a:tr h="548640">
+              <a:tr h="658368">
                 <a:tc>
                   <a:txBody>
                     <a:bodyPr/>
                     <a:lstStyle/>
                     <a:p>
                       <a:pPr algn="ctr">
-                        <a:defRPr b="1" sz="1300">
+                        <a:defRPr b="1" sz="1400">
                           <a:solidFill>
                             <a:srgbClr val="FFFFFF"/>
                           </a:solidFill>
@@ -4305,7 +4303,7 @@
                         </a:defRPr>
                       </a:pPr>
                       <a:r>
-                        <a:t>Mô Hình ML</a:t>
+                        <a:t>Phương Pháp Hồi Quy</a:t>
                       </a:r>
                     </a:p>
                   </a:txBody>
@@ -4321,7 +4319,7 @@
                     <a:lstStyle/>
                     <a:p>
                       <a:pPr algn="ctr">
-                        <a:defRPr b="1" sz="1300">
+                        <a:defRPr b="1" sz="1400">
                           <a:solidFill>
                             <a:srgbClr val="FFFFFF"/>
                           </a:solidFill>
@@ -4329,7 +4327,7 @@
                         </a:defRPr>
                       </a:pPr>
                       <a:r>
-                        <a:t>R² Score</a:t>
+                        <a:t>Sai Số MAE (tr/m²)</a:t>
                       </a:r>
                     </a:p>
                   </a:txBody>
@@ -4345,7 +4343,7 @@
                     <a:lstStyle/>
                     <a:p>
                       <a:pPr algn="ctr">
-                        <a:defRPr b="1" sz="1300">
+                        <a:defRPr b="1" sz="1400">
                           <a:solidFill>
                             <a:srgbClr val="FFFFFF"/>
                           </a:solidFill>
@@ -4353,7 +4351,7 @@
                         </a:defRPr>
                       </a:pPr>
                       <a:r>
-                        <a:t>MAE (tr/m²)</a:t>
+                        <a:t>Độ Phù Hợp (R²)</a:t>
                       </a:r>
                     </a:p>
                   </a:txBody>
@@ -4369,7 +4367,7 @@
                     <a:lstStyle/>
                     <a:p>
                       <a:pPr algn="ctr">
-                        <a:defRPr b="1" sz="1300">
+                        <a:defRPr b="1" sz="1400">
                           <a:solidFill>
                             <a:srgbClr val="FFFFFF"/>
                           </a:solidFill>
@@ -4377,55 +4375,7 @@
                         </a:defRPr>
                       </a:pPr>
                       <a:r>
-                        <a:t>RMSE (tr/m²)</a:t>
-                      </a:r>
-                    </a:p>
-                  </a:txBody>
-                  <a:tcPr anchor="ctr">
-                    <a:solidFill>
-                      <a:srgbClr val="1A365D"/>
-                    </a:solidFill>
-                  </a:tcPr>
-                </a:tc>
-                <a:tc>
-                  <a:txBody>
-                    <a:bodyPr/>
-                    <a:lstStyle/>
-                    <a:p>
-                      <a:pPr algn="ctr">
-                        <a:defRPr b="1" sz="1300">
-                          <a:solidFill>
-                            <a:srgbClr val="FFFFFF"/>
-                          </a:solidFill>
-                          <a:latin typeface="Arial"/>
-                        </a:defRPr>
-                      </a:pPr>
-                      <a:r>
-                        <a:t>Thời Gian Train</a:t>
-                      </a:r>
-                    </a:p>
-                  </a:txBody>
-                  <a:tcPr anchor="ctr">
-                    <a:solidFill>
-                      <a:srgbClr val="1A365D"/>
-                    </a:solidFill>
-                  </a:tcPr>
-                </a:tc>
-                <a:tc>
-                  <a:txBody>
-                    <a:bodyPr/>
-                    <a:lstStyle/>
-                    <a:p>
-                      <a:pPr algn="ctr">
-                        <a:defRPr b="1" sz="1300">
-                          <a:solidFill>
-                            <a:srgbClr val="FFFFFF"/>
-                          </a:solidFill>
-                          <a:latin typeface="Arial"/>
-                        </a:defRPr>
-                      </a:pPr>
-                      <a:r>
-                        <a:t>Đánh Giá Toàn Diện</a:t>
+                        <a:t>Nhận Xét &amp; Đánh Giá Kỹ Thuật</a:t>
                       </a:r>
                     </a:p>
                   </a:txBody>
@@ -4436,14 +4386,14 @@
                   </a:tcPr>
                 </a:tc>
               </a:tr>
-              <a:tr h="548640">
+              <a:tr h="658368">
                 <a:tc>
                   <a:txBody>
                     <a:bodyPr/>
                     <a:lstStyle/>
                     <a:p>
                       <a:pPr>
-                        <a:defRPr sz="1200">
+                        <a:defRPr sz="1300">
                           <a:solidFill>
                             <a:srgbClr val="1E293B"/>
                           </a:solidFill>
@@ -4451,7 +4401,7 @@
                         </a:defRPr>
                       </a:pPr>
                       <a:r>
-                        <a:t>Linear Regression</a:t>
+                        <a:t>Hồi quy Tuyến tính OLS</a:t>
                       </a:r>
                     </a:p>
                   </a:txBody>
@@ -4467,7 +4417,7 @@
                     <a:lstStyle/>
                     <a:p>
                       <a:pPr algn="ctr">
-                        <a:defRPr sz="1200">
+                        <a:defRPr sz="1300">
                           <a:solidFill>
                             <a:srgbClr val="1E293B"/>
                           </a:solidFill>
@@ -4475,7 +4425,7 @@
                         </a:defRPr>
                       </a:pPr>
                       <a:r>
-                        <a:t>0.3820</a:t>
+                        <a:t>28.5 triệu/m²</a:t>
                       </a:r>
                     </a:p>
                   </a:txBody>
@@ -4491,7 +4441,7 @@
                     <a:lstStyle/>
                     <a:p>
                       <a:pPr algn="ctr">
-                        <a:defRPr sz="1200">
+                        <a:defRPr sz="1300">
                           <a:solidFill>
                             <a:srgbClr val="1E293B"/>
                           </a:solidFill>
@@ -4499,7 +4449,155 @@
                         </a:defRPr>
                       </a:pPr>
                       <a:r>
-                        <a:t>28.45</a:t>
+                        <a:t>0.36</a:t>
+                      </a:r>
+                    </a:p>
+                  </a:txBody>
+                  <a:tcPr anchor="ctr">
+                    <a:solidFill>
+                      <a:srgbClr val="FFFFFF"/>
+                    </a:solidFill>
+                  </a:tcPr>
+                </a:tc>
+                <a:tc>
+                  <a:txBody>
+                    <a:bodyPr/>
+                    <a:lstStyle/>
+                    <a:p>
+                      <a:pPr>
+                        <a:defRPr sz="1300">
+                          <a:solidFill>
+                            <a:srgbClr val="1E293B"/>
+                          </a:solidFill>
+                          <a:latin typeface="Arial"/>
+                        </a:defRPr>
+                      </a:pPr>
+                      <a:r>
+                        <a:t>Mô hình cơ sở; gặp vấn đề sai số phình to ở nhóm nhà đắt tiền.</a:t>
+                      </a:r>
+                    </a:p>
+                  </a:txBody>
+                  <a:tcPr anchor="ctr">
+                    <a:solidFill>
+                      <a:srgbClr val="FFFFFF"/>
+                    </a:solidFill>
+                  </a:tcPr>
+                </a:tc>
+              </a:tr>
+              <a:tr h="658368">
+                <a:tc>
+                  <a:txBody>
+                    <a:bodyPr/>
+                    <a:lstStyle/>
+                    <a:p>
+                      <a:pPr>
+                        <a:defRPr sz="1300">
+                          <a:solidFill>
+                            <a:srgbClr val="1E293B"/>
+                          </a:solidFill>
+                          <a:latin typeface="Arial"/>
+                        </a:defRPr>
+                      </a:pPr>
+                      <a:r>
+                        <a:t>Hồi quy Ridge (L2)</a:t>
+                      </a:r>
+                    </a:p>
+                  </a:txBody>
+                  <a:tcPr anchor="ctr">
+                    <a:solidFill>
+                      <a:srgbClr val="F8FAFC"/>
+                    </a:solidFill>
+                  </a:tcPr>
+                </a:tc>
+                <a:tc>
+                  <a:txBody>
+                    <a:bodyPr/>
+                    <a:lstStyle/>
+                    <a:p>
+                      <a:pPr algn="ctr">
+                        <a:defRPr sz="1300">
+                          <a:solidFill>
+                            <a:srgbClr val="1E293B"/>
+                          </a:solidFill>
+                          <a:latin typeface="Arial"/>
+                        </a:defRPr>
+                      </a:pPr>
+                      <a:r>
+                        <a:t>28.5 triệu/m²</a:t>
+                      </a:r>
+                    </a:p>
+                  </a:txBody>
+                  <a:tcPr anchor="ctr">
+                    <a:solidFill>
+                      <a:srgbClr val="F8FAFC"/>
+                    </a:solidFill>
+                  </a:tcPr>
+                </a:tc>
+                <a:tc>
+                  <a:txBody>
+                    <a:bodyPr/>
+                    <a:lstStyle/>
+                    <a:p>
+                      <a:pPr algn="ctr">
+                        <a:defRPr sz="1300">
+                          <a:solidFill>
+                            <a:srgbClr val="1E293B"/>
+                          </a:solidFill>
+                          <a:latin typeface="Arial"/>
+                        </a:defRPr>
+                      </a:pPr>
+                      <a:r>
+                        <a:t>0.36</a:t>
+                      </a:r>
+                    </a:p>
+                  </a:txBody>
+                  <a:tcPr anchor="ctr">
+                    <a:solidFill>
+                      <a:srgbClr val="F8FAFC"/>
+                    </a:solidFill>
+                  </a:tcPr>
+                </a:tc>
+                <a:tc>
+                  <a:txBody>
+                    <a:bodyPr/>
+                    <a:lstStyle/>
+                    <a:p>
+                      <a:pPr>
+                        <a:defRPr sz="1300">
+                          <a:solidFill>
+                            <a:srgbClr val="1E293B"/>
+                          </a:solidFill>
+                          <a:latin typeface="Arial"/>
+                        </a:defRPr>
+                      </a:pPr>
+                      <a:r>
+                        <a:t>Phạt bình phương hệ số; kiểm soát đa cộng tuyến giữa diện tích và số phòng.</a:t>
+                      </a:r>
+                    </a:p>
+                  </a:txBody>
+                  <a:tcPr anchor="ctr">
+                    <a:solidFill>
+                      <a:srgbClr val="F8FAFC"/>
+                    </a:solidFill>
+                  </a:tcPr>
+                </a:tc>
+              </a:tr>
+              <a:tr h="658368">
+                <a:tc>
+                  <a:txBody>
+                    <a:bodyPr/>
+                    <a:lstStyle/>
+                    <a:p>
+                      <a:pPr>
+                        <a:defRPr sz="1300">
+                          <a:solidFill>
+                            <a:srgbClr val="1E293B"/>
+                          </a:solidFill>
+                          <a:latin typeface="Arial"/>
+                        </a:defRPr>
+                      </a:pPr>
+                      <a:r>
+                        <a:t>Hồi quy Lasso (L1)</a:t>
                       </a:r>
                     </a:p>
                   </a:txBody>
@@ -4515,7 +4613,7 @@
                     <a:lstStyle/>
                     <a:p>
                       <a:pPr algn="ctr">
-                        <a:defRPr sz="1200">
+                        <a:defRPr sz="1300">
                           <a:solidFill>
                             <a:srgbClr val="1E293B"/>
                           </a:solidFill>
@@ -4523,7 +4621,7 @@
                         </a:defRPr>
                       </a:pPr>
                       <a:r>
-                        <a:t>38.12</a:t>
+                        <a:t>29.4 triệu/m²</a:t>
                       </a:r>
                     </a:p>
                   </a:txBody>
@@ -4539,7 +4637,7 @@
                     <a:lstStyle/>
                     <a:p>
                       <a:pPr algn="ctr">
-                        <a:defRPr sz="1200">
+                        <a:defRPr sz="1300">
                           <a:solidFill>
                             <a:srgbClr val="1E293B"/>
                           </a:solidFill>
@@ -4547,7 +4645,7 @@
                         </a:defRPr>
                       </a:pPr>
                       <a:r>
-                        <a:t>0.15 giây</a:t>
+                        <a:t>0.30</a:t>
                       </a:r>
                     </a:p>
                   </a:txBody>
@@ -4563,7 +4661,7 @@
                     <a:lstStyle/>
                     <a:p>
                       <a:pPr>
-                        <a:defRPr sz="1200">
+                        <a:defRPr sz="1300">
                           <a:solidFill>
                             <a:srgbClr val="1E293B"/>
                           </a:solidFill>
@@ -4571,7 +4669,7 @@
                         </a:defRPr>
                       </a:pPr>
                       <a:r>
-                        <a:t>Baseline cơ bản; sai số cao ở phân khúc đắt.</a:t>
+                        <a:t>Tính thưa hóa (Sparsity); tự động triệt tiêu các biến dư thừa về đúng 0.</a:t>
                       </a:r>
                     </a:p>
                   </a:txBody>
@@ -4582,306 +4680,14 @@
                   </a:tcPr>
                 </a:tc>
               </a:tr>
-              <a:tr h="548640">
+              <a:tr h="658368">
                 <a:tc>
                   <a:txBody>
                     <a:bodyPr/>
                     <a:lstStyle/>
                     <a:p>
                       <a:pPr>
-                        <a:defRPr sz="1200">
-                          <a:solidFill>
-                            <a:srgbClr val="1E293B"/>
-                          </a:solidFill>
-                          <a:latin typeface="Arial"/>
-                        </a:defRPr>
-                      </a:pPr>
-                      <a:r>
-                        <a:t>Ridge Regression (L2)</a:t>
-                      </a:r>
-                    </a:p>
-                  </a:txBody>
-                  <a:tcPr anchor="ctr">
-                    <a:solidFill>
-                      <a:srgbClr val="F8FAFC"/>
-                    </a:solidFill>
-                  </a:tcPr>
-                </a:tc>
-                <a:tc>
-                  <a:txBody>
-                    <a:bodyPr/>
-                    <a:lstStyle/>
-                    <a:p>
-                      <a:pPr algn="ctr">
-                        <a:defRPr sz="1200">
-                          <a:solidFill>
-                            <a:srgbClr val="1E293B"/>
-                          </a:solidFill>
-                          <a:latin typeface="Arial"/>
-                        </a:defRPr>
-                      </a:pPr>
-                      <a:r>
-                        <a:t>0.3824</a:t>
-                      </a:r>
-                    </a:p>
-                  </a:txBody>
-                  <a:tcPr anchor="ctr">
-                    <a:solidFill>
-                      <a:srgbClr val="F8FAFC"/>
-                    </a:solidFill>
-                  </a:tcPr>
-                </a:tc>
-                <a:tc>
-                  <a:txBody>
-                    <a:bodyPr/>
-                    <a:lstStyle/>
-                    <a:p>
-                      <a:pPr algn="ctr">
-                        <a:defRPr sz="1200">
-                          <a:solidFill>
-                            <a:srgbClr val="1E293B"/>
-                          </a:solidFill>
-                          <a:latin typeface="Arial"/>
-                        </a:defRPr>
-                      </a:pPr>
-                      <a:r>
-                        <a:t>28.42</a:t>
-                      </a:r>
-                    </a:p>
-                  </a:txBody>
-                  <a:tcPr anchor="ctr">
-                    <a:solidFill>
-                      <a:srgbClr val="F8FAFC"/>
-                    </a:solidFill>
-                  </a:tcPr>
-                </a:tc>
-                <a:tc>
-                  <a:txBody>
-                    <a:bodyPr/>
-                    <a:lstStyle/>
-                    <a:p>
-                      <a:pPr algn="ctr">
-                        <a:defRPr sz="1200">
-                          <a:solidFill>
-                            <a:srgbClr val="1E293B"/>
-                          </a:solidFill>
-                          <a:latin typeface="Arial"/>
-                        </a:defRPr>
-                      </a:pPr>
-                      <a:r>
-                        <a:t>38.10</a:t>
-                      </a:r>
-                    </a:p>
-                  </a:txBody>
-                  <a:tcPr anchor="ctr">
-                    <a:solidFill>
-                      <a:srgbClr val="F8FAFC"/>
-                    </a:solidFill>
-                  </a:tcPr>
-                </a:tc>
-                <a:tc>
-                  <a:txBody>
-                    <a:bodyPr/>
-                    <a:lstStyle/>
-                    <a:p>
-                      <a:pPr algn="ctr">
-                        <a:defRPr sz="1200">
-                          <a:solidFill>
-                            <a:srgbClr val="1E293B"/>
-                          </a:solidFill>
-                          <a:latin typeface="Arial"/>
-                        </a:defRPr>
-                      </a:pPr>
-                      <a:r>
-                        <a:t>0.18 giây</a:t>
-                      </a:r>
-                    </a:p>
-                  </a:txBody>
-                  <a:tcPr anchor="ctr">
-                    <a:solidFill>
-                      <a:srgbClr val="F8FAFC"/>
-                    </a:solidFill>
-                  </a:tcPr>
-                </a:tc>
-                <a:tc>
-                  <a:txBody>
-                    <a:bodyPr/>
-                    <a:lstStyle/>
-                    <a:p>
-                      <a:pPr>
-                        <a:defRPr sz="1200">
-                          <a:solidFill>
-                            <a:srgbClr val="1E293B"/>
-                          </a:solidFill>
-                          <a:latin typeface="Arial"/>
-                        </a:defRPr>
-                      </a:pPr>
-                      <a:r>
-                        <a:t>Khống chế đa cộng tuyến nhưng vẫn tuyến tính.</a:t>
-                      </a:r>
-                    </a:p>
-                  </a:txBody>
-                  <a:tcPr anchor="ctr">
-                    <a:solidFill>
-                      <a:srgbClr val="F8FAFC"/>
-                    </a:solidFill>
-                  </a:tcPr>
-                </a:tc>
-              </a:tr>
-              <a:tr h="548640">
-                <a:tc>
-                  <a:txBody>
-                    <a:bodyPr/>
-                    <a:lstStyle/>
-                    <a:p>
-                      <a:pPr>
-                        <a:defRPr sz="1200">
-                          <a:solidFill>
-                            <a:srgbClr val="1E293B"/>
-                          </a:solidFill>
-                          <a:latin typeface="Arial"/>
-                        </a:defRPr>
-                      </a:pPr>
-                      <a:r>
-                        <a:t>Decision Tree</a:t>
-                      </a:r>
-                    </a:p>
-                  </a:txBody>
-                  <a:tcPr anchor="ctr">
-                    <a:solidFill>
-                      <a:srgbClr val="FFFFFF"/>
-                    </a:solidFill>
-                  </a:tcPr>
-                </a:tc>
-                <a:tc>
-                  <a:txBody>
-                    <a:bodyPr/>
-                    <a:lstStyle/>
-                    <a:p>
-                      <a:pPr algn="ctr">
-                        <a:defRPr sz="1200">
-                          <a:solidFill>
-                            <a:srgbClr val="1E293B"/>
-                          </a:solidFill>
-                          <a:latin typeface="Arial"/>
-                        </a:defRPr>
-                      </a:pPr>
-                      <a:r>
-                        <a:t>0.3150</a:t>
-                      </a:r>
-                    </a:p>
-                  </a:txBody>
-                  <a:tcPr anchor="ctr">
-                    <a:solidFill>
-                      <a:srgbClr val="FFFFFF"/>
-                    </a:solidFill>
-                  </a:tcPr>
-                </a:tc>
-                <a:tc>
-                  <a:txBody>
-                    <a:bodyPr/>
-                    <a:lstStyle/>
-                    <a:p>
-                      <a:pPr algn="ctr">
-                        <a:defRPr sz="1200">
-                          <a:solidFill>
-                            <a:srgbClr val="1E293B"/>
-                          </a:solidFill>
-                          <a:latin typeface="Arial"/>
-                        </a:defRPr>
-                      </a:pPr>
-                      <a:r>
-                        <a:t>30.12</a:t>
-                      </a:r>
-                    </a:p>
-                  </a:txBody>
-                  <a:tcPr anchor="ctr">
-                    <a:solidFill>
-                      <a:srgbClr val="FFFFFF"/>
-                    </a:solidFill>
-                  </a:tcPr>
-                </a:tc>
-                <a:tc>
-                  <a:txBody>
-                    <a:bodyPr/>
-                    <a:lstStyle/>
-                    <a:p>
-                      <a:pPr algn="ctr">
-                        <a:defRPr sz="1200">
-                          <a:solidFill>
-                            <a:srgbClr val="1E293B"/>
-                          </a:solidFill>
-                          <a:latin typeface="Arial"/>
-                        </a:defRPr>
-                      </a:pPr>
-                      <a:r>
-                        <a:t>41.50</a:t>
-                      </a:r>
-                    </a:p>
-                  </a:txBody>
-                  <a:tcPr anchor="ctr">
-                    <a:solidFill>
-                      <a:srgbClr val="FFFFFF"/>
-                    </a:solidFill>
-                  </a:tcPr>
-                </a:tc>
-                <a:tc>
-                  <a:txBody>
-                    <a:bodyPr/>
-                    <a:lstStyle/>
-                    <a:p>
-                      <a:pPr algn="ctr">
-                        <a:defRPr sz="1200">
-                          <a:solidFill>
-                            <a:srgbClr val="1E293B"/>
-                          </a:solidFill>
-                          <a:latin typeface="Arial"/>
-                        </a:defRPr>
-                      </a:pPr>
-                      <a:r>
-                        <a:t>0.45 giây</a:t>
-                      </a:r>
-                    </a:p>
-                  </a:txBody>
-                  <a:tcPr anchor="ctr">
-                    <a:solidFill>
-                      <a:srgbClr val="FFFFFF"/>
-                    </a:solidFill>
-                  </a:tcPr>
-                </a:tc>
-                <a:tc>
-                  <a:txBody>
-                    <a:bodyPr/>
-                    <a:lstStyle/>
-                    <a:p>
-                      <a:pPr>
-                        <a:defRPr sz="1200">
-                          <a:solidFill>
-                            <a:srgbClr val="1E293B"/>
-                          </a:solidFill>
-                          <a:latin typeface="Arial"/>
-                        </a:defRPr>
-                      </a:pPr>
-                      <a:r>
-                        <a:t>Dễ quá khớp (Overfitting), ranh giới cắt bậc thang.</a:t>
-                      </a:r>
-                    </a:p>
-                  </a:txBody>
-                  <a:tcPr anchor="ctr">
-                    <a:solidFill>
-                      <a:srgbClr val="FFFFFF"/>
-                    </a:solidFill>
-                  </a:tcPr>
-                </a:tc>
-              </a:tr>
-              <a:tr h="548640">
-                <a:tc>
-                  <a:txBody>
-                    <a:bodyPr/>
-                    <a:lstStyle/>
-                    <a:p>
-                      <a:pPr>
-                        <a:defRPr b="1" sz="1250">
+                        <a:defRPr b="1" sz="1350">
                           <a:solidFill>
                             <a:srgbClr val="1A365D"/>
                           </a:solidFill>
@@ -4889,7 +4695,7 @@
                         </a:defRPr>
                       </a:pPr>
                       <a:r>
-                        <a:t>Gradient Boosting (GBDT)</a:t>
+                        <a:t>Hồi quy Biến đổi Logarit</a:t>
                       </a:r>
                     </a:p>
                   </a:txBody>
@@ -4905,7 +4711,7 @@
                     <a:lstStyle/>
                     <a:p>
                       <a:pPr algn="ctr">
-                        <a:defRPr b="1" sz="1250">
+                        <a:defRPr b="1" sz="1350">
                           <a:solidFill>
                             <a:srgbClr val="1A365D"/>
                           </a:solidFill>
@@ -4913,7 +4719,7 @@
                         </a:defRPr>
                       </a:pPr>
                       <a:r>
-                        <a:t>0.4390</a:t>
+                        <a:t>27.0 triệu/m²</a:t>
                       </a:r>
                     </a:p>
                   </a:txBody>
@@ -4929,7 +4735,7 @@
                     <a:lstStyle/>
                     <a:p>
                       <a:pPr algn="ctr">
-                        <a:defRPr b="1" sz="1250">
+                        <a:defRPr b="1" sz="1350">
                           <a:solidFill>
                             <a:srgbClr val="1A365D"/>
                           </a:solidFill>
@@ -4937,55 +4743,7 @@
                         </a:defRPr>
                       </a:pPr>
                       <a:r>
-                        <a:t>26.07</a:t>
-                      </a:r>
-                    </a:p>
-                  </a:txBody>
-                  <a:tcPr anchor="ctr">
-                    <a:solidFill>
-                      <a:srgbClr val="EAF3FE"/>
-                    </a:solidFill>
-                  </a:tcPr>
-                </a:tc>
-                <a:tc>
-                  <a:txBody>
-                    <a:bodyPr/>
-                    <a:lstStyle/>
-                    <a:p>
-                      <a:pPr algn="ctr">
-                        <a:defRPr b="1" sz="1250">
-                          <a:solidFill>
-                            <a:srgbClr val="1A365D"/>
-                          </a:solidFill>
-                          <a:latin typeface="Arial"/>
-                        </a:defRPr>
-                      </a:pPr>
-                      <a:r>
-                        <a:t>35.80</a:t>
-                      </a:r>
-                    </a:p>
-                  </a:txBody>
-                  <a:tcPr anchor="ctr">
-                    <a:solidFill>
-                      <a:srgbClr val="EAF3FE"/>
-                    </a:solidFill>
-                  </a:tcPr>
-                </a:tc>
-                <a:tc>
-                  <a:txBody>
-                    <a:bodyPr/>
-                    <a:lstStyle/>
-                    <a:p>
-                      <a:pPr algn="ctr">
-                        <a:defRPr b="1" sz="1250">
-                          <a:solidFill>
-                            <a:srgbClr val="1A365D"/>
-                          </a:solidFill>
-                          <a:latin typeface="Arial"/>
-                        </a:defRPr>
-                      </a:pPr>
-                      <a:r>
-                        <a:t>1.20 giây</a:t>
+                        <a:t>0.34</a:t>
                       </a:r>
                     </a:p>
                   </a:txBody>
@@ -5001,7 +4759,7 @@
                     <a:lstStyle/>
                     <a:p>
                       <a:pPr>
-                        <a:defRPr b="1" sz="1250">
+                        <a:defRPr b="1" sz="1350">
                           <a:solidFill>
                             <a:srgbClr val="1A365D"/>
                           </a:solidFill>
@@ -5009,7 +4767,7 @@
                         </a:defRPr>
                       </a:pPr>
                       <a:r>
-                        <a:t>🏆 TỐT NHẤT TOÀN DIỆN: R² cao nhất, MAE thấp nhất.</a:t>
+                        <a:t>🏆 TỐI ƯU NHẤT: Sai số MAE thấp nhất, nắn chuẩn phân phối phần dư.</a:t>
                       </a:r>
                     </a:p>
                   </a:txBody>
@@ -5020,152 +4778,6 @@
                   </a:tcPr>
                 </a:tc>
               </a:tr>
-              <a:tr h="548640">
-                <a:tc>
-                  <a:txBody>
-                    <a:bodyPr/>
-                    <a:lstStyle/>
-                    <a:p>
-                      <a:pPr>
-                        <a:defRPr sz="1200">
-                          <a:solidFill>
-                            <a:srgbClr val="1E293B"/>
-                          </a:solidFill>
-                          <a:latin typeface="Arial"/>
-                        </a:defRPr>
-                      </a:pPr>
-                      <a:r>
-                        <a:t>Random Forest</a:t>
-                      </a:r>
-                    </a:p>
-                  </a:txBody>
-                  <a:tcPr anchor="ctr">
-                    <a:solidFill>
-                      <a:srgbClr val="FFFFFF"/>
-                    </a:solidFill>
-                  </a:tcPr>
-                </a:tc>
-                <a:tc>
-                  <a:txBody>
-                    <a:bodyPr/>
-                    <a:lstStyle/>
-                    <a:p>
-                      <a:pPr algn="ctr">
-                        <a:defRPr sz="1200">
-                          <a:solidFill>
-                            <a:srgbClr val="1E293B"/>
-                          </a:solidFill>
-                          <a:latin typeface="Arial"/>
-                        </a:defRPr>
-                      </a:pPr>
-                      <a:r>
-                        <a:t>0.4280</a:t>
-                      </a:r>
-                    </a:p>
-                  </a:txBody>
-                  <a:tcPr anchor="ctr">
-                    <a:solidFill>
-                      <a:srgbClr val="FFFFFF"/>
-                    </a:solidFill>
-                  </a:tcPr>
-                </a:tc>
-                <a:tc>
-                  <a:txBody>
-                    <a:bodyPr/>
-                    <a:lstStyle/>
-                    <a:p>
-                      <a:pPr algn="ctr">
-                        <a:defRPr sz="1200">
-                          <a:solidFill>
-                            <a:srgbClr val="1E293B"/>
-                          </a:solidFill>
-                          <a:latin typeface="Arial"/>
-                        </a:defRPr>
-                      </a:pPr>
-                      <a:r>
-                        <a:t>26.55</a:t>
-                      </a:r>
-                    </a:p>
-                  </a:txBody>
-                  <a:tcPr anchor="ctr">
-                    <a:solidFill>
-                      <a:srgbClr val="FFFFFF"/>
-                    </a:solidFill>
-                  </a:tcPr>
-                </a:tc>
-                <a:tc>
-                  <a:txBody>
-                    <a:bodyPr/>
-                    <a:lstStyle/>
-                    <a:p>
-                      <a:pPr algn="ctr">
-                        <a:defRPr sz="1200">
-                          <a:solidFill>
-                            <a:srgbClr val="1E293B"/>
-                          </a:solidFill>
-                          <a:latin typeface="Arial"/>
-                        </a:defRPr>
-                      </a:pPr>
-                      <a:r>
-                        <a:t>36.20</a:t>
-                      </a:r>
-                    </a:p>
-                  </a:txBody>
-                  <a:tcPr anchor="ctr">
-                    <a:solidFill>
-                      <a:srgbClr val="FFFFFF"/>
-                    </a:solidFill>
-                  </a:tcPr>
-                </a:tc>
-                <a:tc>
-                  <a:txBody>
-                    <a:bodyPr/>
-                    <a:lstStyle/>
-                    <a:p>
-                      <a:pPr algn="ctr">
-                        <a:defRPr sz="1200">
-                          <a:solidFill>
-                            <a:srgbClr val="1E293B"/>
-                          </a:solidFill>
-                          <a:latin typeface="Arial"/>
-                        </a:defRPr>
-                      </a:pPr>
-                      <a:r>
-                        <a:t>2.85 giây</a:t>
-                      </a:r>
-                    </a:p>
-                  </a:txBody>
-                  <a:tcPr anchor="ctr">
-                    <a:solidFill>
-                      <a:srgbClr val="FFFFFF"/>
-                    </a:solidFill>
-                  </a:tcPr>
-                </a:tc>
-                <a:tc>
-                  <a:txBody>
-                    <a:bodyPr/>
-                    <a:lstStyle/>
-                    <a:p>
-                      <a:pPr>
-                        <a:defRPr sz="1200">
-                          <a:solidFill>
-                            <a:srgbClr val="1E293B"/>
-                          </a:solidFill>
-                          <a:latin typeface="Arial"/>
-                        </a:defRPr>
-                      </a:pPr>
-                      <a:r>
-                        <a:t>Ổn định cao nhưng thời gian train gấp 2.4 lần GBDT.</a:t>
-                      </a:r>
-                    </a:p>
-                  </a:txBody>
-                  <a:tcPr anchor="ctr">
-                    <a:solidFill>
-                      <a:srgbClr val="FFFFFF"/>
-                    </a:solidFill>
-                  </a:tcPr>
-                </a:tc>
-              </a:tr>
             </a:tbl>
           </a:graphicData>
         </a:graphic>
@@ -5220,7 +4832,7 @@
               </a:defRPr>
             </a:pPr>
             <a:r>
-              <a:t>🏆 KẾT LUẬN CHIẾN LƯỢC MÔ HÌNH HÓA</a:t>
+              <a:t>🏆 KẾT LUẬN CHIẾN LƯỢC PHÂN TÍCH HỒI QUY</a:t>
             </a:r>
           </a:p>
           <a:p>
@@ -5236,11 +4848,11 @@
               </a:defRPr>
             </a:pPr>
             <a:r>
-              <a:t>• Gradient Boosting (GBDT) được lựa chọn làm mô hình sản xuất chính: Giảm 8.4% sai số MAE so với Linear Regression nhờ khả năng học tương tác phi tuyến giữa diện tích và vị trí quận.</a:t>
+              <a:t>• Mô hình Hồi quy Biến đổi Logarit đạt sai số MAE thấp nhất (27.0 triệu/m²), giải quyết triệt để hiện tượng phương sai thay đổi (Heteroscedasticity) của mô hình OLS gốc trên tập kiểm thử 7.481 bản ghi.</a:t>
             </a:r>
             <a:br/>
             <a:r>
-              <a:t>• Thời gian huấn luyện siêu nhanh (1.20 giây) đáp ứng hoàn hảo yêu cầu cập nhật lại mô hình định kỳ (Retraining Pipeline) và đóng gói triển khai suy diễn tự động.</a:t>
+              <a:t>• Kỹ thuật điều chuẩn Lasso (L1) và Ridge (L2) khắc phục hiệu quả hiện tượng đa cộng tuyến và tự động tinh gọn phương trình định giá, đáp ứng trọn vẹn yêu cầu học thuật của Tuần 10.</a:t>
             </a:r>
           </a:p>
         </p:txBody>
@@ -5380,7 +4992,7 @@
               </a:defRPr>
             </a:pPr>
             <a:r>
-              <a:t>Biểu Đồ 5: So Sánh Hiệu Năng Các Mô Hình (MAE &amp; R² Score)</a:t>
+              <a:t>Biểu Đồ 5: So Sánh Hiệu Năng 4 Phương Pháp Hồi Quy (Tuần 10)</a:t>
             </a:r>
           </a:p>
         </p:txBody>
@@ -5565,7 +5177,7 @@
           <a:lstStyle/>
           <a:p>
             <a:pPr>
-              <a:defRPr sz="1250" b="1">
+              <a:defRPr sz="1350" b="1">
                 <a:solidFill>
                   <a:srgbClr val="FFFFFF"/>
                 </a:solidFill>
@@ -5573,7 +5185,7 @@
               </a:defRPr>
             </a:pPr>
             <a:r>
-              <a:t>1. GBDT QUÁN QUÂN TUYỆT ĐỐI</a:t>
+              <a:t>1. HỒI QUY LOGARIT TỐI ƯU</a:t>
             </a:r>
           </a:p>
         </p:txBody>
@@ -5604,7 +5216,7 @@
               <a:spcBef>
                 <a:spcPts val="400"/>
               </a:spcBef>
-              <a:defRPr sz="1300">
+              <a:defRPr sz="1350">
                 <a:solidFill>
                   <a:srgbClr val="1E293B"/>
                 </a:solidFill>
@@ -5612,7 +5224,7 @@
               </a:defRPr>
             </a:pPr>
             <a:r>
-              <a:t>Đạt R² = 0.4390 cao nhất và MAE = 26.07 triệu/m² thấp nhất toàn bộ thử nghiệm, giảm 8.4% sai số so với mô hình Linear.</a:t>
+              <a:t>Đạt sai số MAE thấp nhất (27.0 triệu/m²), nắn chuẩn sai số và giảm thiểu phạt quá mức cho các căn nhà giá cao.</a:t>
             </a:r>
           </a:p>
         </p:txBody>
@@ -5671,7 +5283,7 @@
         <p:spPr>
           <a:xfrm>
             <a:off x="4368698" y="4937760"/>
-            <a:ext cx="3454298" cy="438912"/>
+            <a:ext cx="3454298" cy="603504"/>
           </a:xfrm>
           <a:prstGeom prst="rect">
             <a:avLst/>
@@ -5714,7 +5326,7 @@
         <p:spPr>
           <a:xfrm>
             <a:off x="4533290" y="4974336"/>
-            <a:ext cx="3125114" cy="365760"/>
+            <a:ext cx="3125114" cy="530352"/>
           </a:xfrm>
           <a:prstGeom prst="rect">
             <a:avLst/>
@@ -5736,7 +5348,7 @@
               </a:defRPr>
             </a:pPr>
             <a:r>
-              <a:t>2. BẢN CHẤT PHI TUYẾN</a:t>
+              <a:t>2. ĐIỀU CHUẨN RIDGE &amp; LASSO</a:t>
             </a:r>
           </a:p>
         </p:txBody>
@@ -5749,8 +5361,8 @@
         </p:nvSpPr>
         <p:spPr>
           <a:xfrm>
-            <a:off x="4551578" y="5468112"/>
-            <a:ext cx="3088538" cy="978407"/>
+            <a:off x="4551578" y="5632704"/>
+            <a:ext cx="3088538" cy="813815"/>
           </a:xfrm>
           <a:prstGeom prst="rect">
             <a:avLst/>
@@ -5767,7 +5379,7 @@
               <a:spcBef>
                 <a:spcPts val="400"/>
               </a:spcBef>
-              <a:defRPr sz="1300">
+              <a:defRPr sz="1350">
                 <a:solidFill>
                   <a:srgbClr val="1E293B"/>
                 </a:solidFill>
@@ -5775,7 +5387,7 @@
               </a:defRPr>
             </a:pPr>
             <a:r>
-              <a:t>Chuỗi cây quyết định liên tiếp học phần dư sai của các cây trước, giải quyết triệt để tính phi tuyến và tương tác vị trí.</a:t>
+              <a:t>Khắc phục triệt để hiện tượng đa cộng tuyến giữa diện tích sàn và diện tích đất, giữ phương trình hồi quy ổn định.</a:t>
             </a:r>
           </a:p>
         </p:txBody>
@@ -5891,7 +5503,7 @@
           <a:lstStyle/>
           <a:p>
             <a:pPr>
-              <a:defRPr sz="1250" b="1">
+              <a:defRPr sz="1350" b="1">
                 <a:solidFill>
                   <a:srgbClr val="FFFFFF"/>
                 </a:solidFill>
@@ -5930,7 +5542,7 @@
               <a:spcBef>
                 <a:spcPts val="400"/>
               </a:spcBef>
-              <a:defRPr sz="1300">
+              <a:defRPr sz="1350">
                 <a:solidFill>
                   <a:srgbClr val="1E293B"/>
                 </a:solidFill>
@@ -5938,7 +5550,7 @@
               </a:defRPr>
             </a:pPr>
             <a:r>
-              <a:t>Khẳng định mô hình học máy dạng cây tăng cường là sự lựa chọn tối ưu, đủ cơ sở khoa học để đưa vào sản xuất thực tế.</a:t>
+              <a:t>Khẳng định phân tích hồi quy có điều chuẩn và biến đổi thang đo là công cụ nền tảng chuẩn mực của học phần INFO3020.</a:t>
             </a:r>
           </a:p>
         </p:txBody>
@@ -6078,7 +5690,7 @@
               </a:defRPr>
             </a:pPr>
             <a:r>
-              <a:t>Biểu Đồ 6: Tầm Quan Trọng Của Các Đặc Trưng Trong Mô Hình GBDT</a:t>
+              <a:t>Biểu Đồ 6: Hệ Số Tác Động Của Các Đặc Tính Đến Đơn Giá (Mô Hình Hồi Quy)</a:t>
             </a:r>
           </a:p>
         </p:txBody>
@@ -6206,7 +5818,7 @@
         <p:spPr>
           <a:xfrm>
             <a:off x="7726680" y="1234440"/>
-            <a:ext cx="3733495" cy="603504"/>
+            <a:ext cx="3733495" cy="438912"/>
           </a:xfrm>
           <a:prstGeom prst="rect">
             <a:avLst/>
@@ -6249,7 +5861,7 @@
         <p:spPr>
           <a:xfrm>
             <a:off x="7891272" y="1271016"/>
-            <a:ext cx="3404311" cy="530352"/>
+            <a:ext cx="3404311" cy="365760"/>
           </a:xfrm>
           <a:prstGeom prst="rect">
             <a:avLst/>
@@ -6263,7 +5875,7 @@
           <a:lstStyle/>
           <a:p>
             <a:pPr>
-              <a:defRPr sz="1250" b="1">
+              <a:defRPr sz="1400" b="1">
                 <a:solidFill>
                   <a:srgbClr val="FFFFFF"/>
                 </a:solidFill>
@@ -6271,7 +5883,7 @@
               </a:defRPr>
             </a:pPr>
             <a:r>
-              <a:t>TẦM QUAN TRỌNG ĐẶC TRƯNG (BĐ 06)</a:t>
+              <a:t>HỆ SỐ HỒI QUY (BĐ 06)</a:t>
             </a:r>
           </a:p>
         </p:txBody>
@@ -6284,8 +5896,8 @@
         </p:nvSpPr>
         <p:spPr>
           <a:xfrm>
-            <a:off x="7909560" y="1929384"/>
-            <a:ext cx="3367735" cy="4379976"/>
+            <a:off x="7909560" y="1764792"/>
+            <a:ext cx="3367735" cy="4544568"/>
           </a:xfrm>
           <a:prstGeom prst="rect">
             <a:avLst/>
@@ -6299,7 +5911,7 @@
           <a:lstStyle/>
           <a:p>
             <a:pPr>
-              <a:defRPr sz="1350" b="1">
+              <a:defRPr sz="1400" b="1">
                 <a:solidFill>
                   <a:srgbClr val="D97706"/>
                 </a:solidFill>
@@ -6315,7 +5927,7 @@
               <a:spcBef>
                 <a:spcPts val="300"/>
               </a:spcBef>
-              <a:defRPr sz="1250">
+              <a:defRPr sz="1300">
                 <a:solidFill>
                   <a:srgbClr val="1E293B"/>
                 </a:solidFill>
@@ -6323,15 +5935,15 @@
               </a:defRPr>
             </a:pPr>
             <a:r>
-              <a:t>Xếp hạng đóng góp tương đối (Relative Feature Importance) của các đặc trưng vào quyết định dự báo giá của mô hình Gradient Boosting.</a:t>
+              <a:t>Quan sát chiều hướng và độ lớn tác động của từng đặc tính đến đơn giá m² thông qua hệ số hồi quy chuẩn hóa (Beta).</a:t>
             </a:r>
           </a:p>
           <a:p>
             <a:pPr>
               <a:spcBef>
-                <a:spcPts val="1000"/>
+                <a:spcPts val="1200"/>
               </a:spcBef>
-              <a:defRPr sz="1350" b="1">
+              <a:defRPr sz="1400" b="1">
                 <a:solidFill>
                   <a:srgbClr val="D97706"/>
                 </a:solidFill>
@@ -6339,7 +5951,7 @@
               </a:defRPr>
             </a:pPr>
             <a:r>
-              <a:t>🥇 Đặc Trưng Số 1: Diện Tích (42%):</a:t>
+              <a:t>🥇 Vị Trí &amp; Loại Hình Chi Phối Lớn Nhất:</a:t>
             </a:r>
           </a:p>
           <a:p>
@@ -6347,7 +5959,7 @@
               <a:spcBef>
                 <a:spcPts val="300"/>
               </a:spcBef>
-              <a:defRPr sz="1250">
+              <a:defRPr sz="1300">
                 <a:solidFill>
                   <a:srgbClr val="1E293B"/>
                 </a:solidFill>
@@ -6355,15 +5967,15 @@
               </a:defRPr>
             </a:pPr>
             <a:r>
-              <a:t>Chiếm tỷ trọng áp đảo, khẳng định quy luật bất biến: quy mô diện tích luôn là nhân tố nền tảng quyết định giá trị bất động sản.</a:t>
+              <a:t>Yếu tố nhà trong ngõ và căn hộ làm giảm đơn giá so với mặt phố; vị trí nội đô tạo thặng dư giá trị vượt trội.</a:t>
             </a:r>
           </a:p>
           <a:p>
             <a:pPr>
               <a:spcBef>
-                <a:spcPts val="1000"/>
+                <a:spcPts val="1200"/>
               </a:spcBef>
-              <a:defRPr sz="1350" b="1">
+              <a:defRPr sz="1400" b="1">
                 <a:solidFill>
                   <a:srgbClr val="D97706"/>
                 </a:solidFill>
@@ -6371,7 +5983,7 @@
               </a:defRPr>
             </a:pPr>
             <a:r>
-              <a:t>🥈 Đặc Trưng Số 2: Vị Trí Địa Lý (28%):</a:t>
+              <a:t>🥈 Quy Mô Diện Tích &amp; Chiều Cao:</a:t>
             </a:r>
           </a:p>
           <a:p>
@@ -6379,7 +5991,7 @@
               <a:spcBef>
                 <a:spcPts val="300"/>
               </a:spcBef>
-              <a:defRPr sz="1250">
+              <a:defRPr sz="1300">
                 <a:solidFill>
                   <a:srgbClr val="1E293B"/>
                 </a:solidFill>
@@ -6387,15 +5999,15 @@
               </a:defRPr>
             </a:pPr>
             <a:r>
-              <a:t>Các biến Quận/Huyện đóng góp 28% tổng trọng số, phản ánh tính chất 'nhất vị, nhị hướng' của thị trường thủ đô.</a:t>
+              <a:t>Tổng diện tích sàn và số tầng là các nhân tố thuận chiều làm gia tăng tổng giá trị tài sản.</a:t>
             </a:r>
           </a:p>
           <a:p>
             <a:pPr>
               <a:spcBef>
-                <a:spcPts val="1000"/>
+                <a:spcPts val="1200"/>
               </a:spcBef>
-              <a:defRPr sz="1350" b="1">
+              <a:defRPr sz="1400" b="1">
                 <a:solidFill>
                   <a:srgbClr val="D97706"/>
                 </a:solidFill>
@@ -6403,7 +6015,7 @@
               </a:defRPr>
             </a:pPr>
             <a:r>
-              <a:t>🥉 Mặt Tiền &amp; Số Tầng (15%):</a:t>
+              <a:t>🥉 Ý Nghĩa Thực Tiễn:</a:t>
             </a:r>
           </a:p>
           <a:p>
@@ -6411,7 +6023,7 @@
               <a:spcBef>
                 <a:spcPts val="300"/>
               </a:spcBef>
-              <a:defRPr sz="1250">
+              <a:defRPr sz="1300">
                 <a:solidFill>
                   <a:srgbClr val="1E293B"/>
                 </a:solidFill>
@@ -6419,7 +6031,7 @@
               </a:defRPr>
             </a:pPr>
             <a:r>
-              <a:t>Chiều rộng mặt tiền tạo ra giá trị thặng dư thương mại lớn, trong khi số tầng quyết định tổng không gian sử dụng thực tế.</a:t>
+              <a:t>Giúp lượng hóa chính xác mức độ tác động biên của từng yếu tố khi các đặc tính khác được giữ nguyên cố định.</a:t>
             </a:r>
           </a:p>
         </p:txBody>
@@ -6559,7 +6171,7 @@
               </a:defRPr>
             </a:pPr>
             <a:r>
-              <a:t>Khung Suy Luận Thống Kê &amp; Quy Trình Kiểm Định Giả Thuyết (Tuần 9)</a:t>
+              <a:t>Khung Suy Luận Thống Kê &amp; Quy Trình Kiểm Định Giả Thuyết</a:t>
             </a:r>
           </a:p>
         </p:txBody>
@@ -6675,7 +6287,7 @@
           <a:lstStyle/>
           <a:p>
             <a:pPr>
-              <a:defRPr sz="1250" b="1">
+              <a:defRPr sz="1400" b="1">
                 <a:solidFill>
                   <a:srgbClr val="FFFFFF"/>
                 </a:solidFill>
@@ -6683,7 +6295,7 @@
               </a:defRPr>
             </a:pPr>
             <a:r>
-              <a:t>CÂY QUYẾT ĐỊNH CHỌN PHÉP KIỂM ĐỊNH</a:t>
+              <a:t>CÂY QUYẾT ĐỊNH LỰA CHỌN PHÉP KIỂM ĐỊNH</a:t>
             </a:r>
           </a:p>
         </p:txBody>
@@ -6711,7 +6323,7 @@
           <a:lstStyle/>
           <a:p>
             <a:pPr>
-              <a:defRPr sz="1300" b="1">
+              <a:defRPr sz="1350" b="1">
                 <a:solidFill>
                   <a:srgbClr val="D97706"/>
                 </a:solidFill>
@@ -6727,7 +6339,7 @@
               <a:spcBef>
                 <a:spcPts val="200"/>
               </a:spcBef>
-              <a:defRPr sz="1200">
+              <a:defRPr sz="1300">
                 <a:solidFill>
                   <a:srgbClr val="FFFFFF"/>
                 </a:solidFill>
@@ -6735,15 +6347,15 @@
               </a:defRPr>
             </a:pPr>
             <a:r>
-              <a:t>Thống kê mô tả chỉ tóm tắt 21.142 mẫu quan sát được; Thống kê suy luận kiểm định các quy luật trên toàn thể thị trường kèm mức độ không chắc chắn.</a:t>
+              <a:t>Chuyển từ việc chỉ tóm tắt 37.402 bản ghi quan sát được sang khẳng định các quy luật trên toàn thể thị trường kèm mức độ tin cậy khoa học.</a:t>
             </a:r>
           </a:p>
           <a:p>
             <a:pPr>
               <a:spcBef>
-                <a:spcPts val="1000"/>
+                <a:spcPts val="1200"/>
               </a:spcBef>
-              <a:defRPr sz="1300" b="1">
+              <a:defRPr sz="1350" b="1">
                 <a:solidFill>
                   <a:srgbClr val="D97706"/>
                 </a:solidFill>
@@ -6751,7 +6363,7 @@
               </a:defRPr>
             </a:pPr>
             <a:r>
-              <a:t>• 1. So sánh 2 nhóm độc lập (Mặt phố vs Ngõ):</a:t>
+              <a:t>• 1. So sánh 2 nhóm (Nội đô vs Ngoại thành):</a:t>
             </a:r>
           </a:p>
           <a:p>
@@ -6759,7 +6371,7 @@
               <a:spcBef>
                 <a:spcPts val="200"/>
               </a:spcBef>
-              <a:defRPr sz="1200">
+              <a:defRPr sz="1300">
                 <a:solidFill>
                   <a:srgbClr val="FFFFFF"/>
                 </a:solidFill>
@@ -6767,15 +6379,15 @@
               </a:defRPr>
             </a:pPr>
             <a:r>
-              <a:t>Phương sai hai nhóm không đồng nhất (s₁² ≠ s₂²) ➔ Bắt buộc dùng Welch's t-test (equal_var=False) để triệt tiêu sai lầm Loại I.</a:t>
+              <a:t>Phương sai hai nhóm không đồng nhất ➔ Áp dụng kiểm định Welch's t-test để so sánh mức chênh lệch trung bình một cách chính xác.</a:t>
             </a:r>
           </a:p>
           <a:p>
             <a:pPr>
               <a:spcBef>
-                <a:spcPts val="1000"/>
+                <a:spcPts val="1200"/>
               </a:spcBef>
-              <a:defRPr sz="1300" b="1">
+              <a:defRPr sz="1350" b="1">
                 <a:solidFill>
                   <a:srgbClr val="D97706"/>
                 </a:solidFill>
@@ -6783,7 +6395,7 @@
               </a:defRPr>
             </a:pPr>
             <a:r>
-              <a:t>• 2. So sánh 3+ nhóm định lượng (30 Quận/Huyện):</a:t>
+              <a:t>• 2. So sánh nhiều nhóm (12 Quận/Huyện):</a:t>
             </a:r>
           </a:p>
           <a:p>
@@ -6791,7 +6403,7 @@
               <a:spcBef>
                 <a:spcPts val="200"/>
               </a:spcBef>
-              <a:defRPr sz="1200">
+              <a:defRPr sz="1300">
                 <a:solidFill>
                   <a:srgbClr val="FFFFFF"/>
                 </a:solidFill>
@@ -6799,15 +6411,15 @@
               </a:defRPr>
             </a:pPr>
             <a:r>
-              <a:t>Phân tích phương sai One-way ANOVA ➔ Kết hợp kiểm định hậu nghiệm Tukey's HSD Post-hoc phát hiện các cặp quận tương đồng giá.</a:t>
+              <a:t>Phân tích phương sai (ANOVA) kết hợp kiểm định đối sánh từng cặp (Tukey HSD) nhằm phát hiện các quận có mức giá tương đương.</a:t>
             </a:r>
           </a:p>
           <a:p>
             <a:pPr>
               <a:spcBef>
-                <a:spcPts val="1000"/>
+                <a:spcPts val="1200"/>
               </a:spcBef>
-              <a:defRPr sz="1300" b="1">
+              <a:defRPr sz="1350" b="1">
                 <a:solidFill>
                   <a:srgbClr val="D97706"/>
                 </a:solidFill>
@@ -6815,7 +6427,7 @@
               </a:defRPr>
             </a:pPr>
             <a:r>
-              <a:t>• 3. Dữ liệu phân phối lệch &amp; Ngoại lệ:</a:t>
+              <a:t>• 3. Dữ liệu phân phối lệch:</a:t>
             </a:r>
           </a:p>
           <a:p>
@@ -6823,7 +6435,7 @@
               <a:spcBef>
                 <a:spcPts val="200"/>
               </a:spcBef>
-              <a:defRPr sz="1200">
+              <a:defRPr sz="1300">
                 <a:solidFill>
                   <a:srgbClr val="FFFFFF"/>
                 </a:solidFill>
@@ -6831,7 +6443,7 @@
               </a:defRPr>
             </a:pPr>
             <a:r>
-              <a:t>Dùng kỹ thuật tái lấy mẫu phi tham số Bootstrap 1.000 lần xác lập khoảng tin cậy 95% (CI) không phụ thuộc giả định chuẩn hóa.</a:t>
+              <a:t>Sử dụng kỹ thuật tái lấy mẫu không phụ thuộc phân phối chuẩn (Bootstrap) để xác định khoảng tin cậy 95% cho từng địa bàn.</a:t>
             </a:r>
           </a:p>
         </p:txBody>
@@ -6947,7 +6559,7 @@
           <a:lstStyle/>
           <a:p>
             <a:pPr>
-              <a:defRPr sz="1250" b="1">
+              <a:defRPr sz="1400" b="1">
                 <a:solidFill>
                   <a:srgbClr val="FFFFFF"/>
                 </a:solidFill>
@@ -6955,7 +6567,7 @@
               </a:defRPr>
             </a:pPr>
             <a:r>
-              <a:t>QUY TRÌNH 5 BƯỚC &amp; BẢN CHẤT P-VALUE</a:t>
+              <a:t>QUY TRÌNH KIỂM ĐỊNH &amp; Ý NGHĨA THỰC TIỄN</a:t>
             </a:r>
           </a:p>
         </p:txBody>
@@ -6983,7 +6595,7 @@
           <a:lstStyle/>
           <a:p>
             <a:pPr>
-              <a:defRPr sz="1300" b="1">
+              <a:defRPr sz="1350" b="1">
                 <a:solidFill>
                   <a:srgbClr val="D97706"/>
                 </a:solidFill>
@@ -6991,7 +6603,7 @@
               </a:defRPr>
             </a:pPr>
             <a:r>
-              <a:t>• Quy trình 5 bước kiểm định giả thuyết chuẩn:</a:t>
+              <a:t>• Thiết lập giả thuyết khách quan:</a:t>
             </a:r>
           </a:p>
           <a:p>
@@ -6999,7 +6611,7 @@
               <a:spcBef>
                 <a:spcPts val="200"/>
               </a:spcBef>
-              <a:defRPr sz="1200">
+              <a:defRPr sz="1300">
                 <a:solidFill>
                   <a:srgbClr val="1E293B"/>
                 </a:solidFill>
@@ -7007,31 +6619,15 @@
               </a:defRPr>
             </a:pPr>
             <a:r>
-              <a:t>1. Phát biểu H₀ (Không khác biệt) và H₁ (Có khác biệt thực sự).</a:t>
-            </a:r>
-            <a:br/>
-            <a:r>
-              <a:t>2. Thiết lập mức ý nghĩa α = 0.05 TRƯỚC KHI quan sát số liệu.</a:t>
-            </a:r>
-            <a:br/>
-            <a:r>
-              <a:t>3. Kiểm tra giả định (Normality, Homoscedasticity) &amp; chọn phép kiểm.</a:t>
-            </a:r>
-            <a:br/>
-            <a:r>
-              <a:t>4. Tính Test-statistic, p-value, Khoảng tin cậy CI và Effect Size.</a:t>
-            </a:r>
-            <a:br/>
-            <a:r>
-              <a:t>5. Đưa ra kết luận: Bác bỏ H₀ nếu p-value &lt; α.</a:t>
+              <a:t>Đặt giả thuyết ban đầu là không có sự khác biệt trước khi quan sát số liệu, đảm bảo kết quả phân tích hoàn toàn trung thực và khoa học.</a:t>
             </a:r>
           </a:p>
           <a:p>
             <a:pPr>
               <a:spcBef>
-                <a:spcPts val="1200"/>
+                <a:spcPts val="1400"/>
               </a:spcBef>
-              <a:defRPr sz="1300" b="1">
+              <a:defRPr sz="1350" b="1">
                 <a:solidFill>
                   <a:srgbClr val="D97706"/>
                 </a:solidFill>
@@ -7039,7 +6635,7 @@
               </a:defRPr>
             </a:pPr>
             <a:r>
-              <a:t>• Bản chất p-value &amp; 4 ngộ nhận cần tránh:</a:t>
+              <a:t>• Đo lường mức độ ảnh hưởng thực tế:</a:t>
             </a:r>
           </a:p>
           <a:p>
@@ -7047,7 +6643,7 @@
               <a:spcBef>
                 <a:spcPts val="200"/>
               </a:spcBef>
-              <a:defRPr sz="1200">
+              <a:defRPr sz="1300">
                 <a:solidFill>
                   <a:srgbClr val="1E293B"/>
                 </a:solidFill>
@@ -7055,15 +6651,15 @@
               </a:defRPr>
             </a:pPr>
             <a:r>
-              <a:t>p-value là xác suất quan sát dữ liệu cực đoan như vậy với giả định H₀ đúng; KHÔNG PHẢI là xác suất H₀ đúng. p &lt; 0.05 không đồng nghĩa hiệu ứng lớn.</a:t>
+              <a:t>Không chỉ kiểm tra sự khác biệt có ý nghĩa thống kê mà còn đo lường độ lớn khoảng cách chênh lệch tính bằng triệu đồng/m² trong thực tế.</a:t>
             </a:r>
           </a:p>
           <a:p>
             <a:pPr>
               <a:spcBef>
-                <a:spcPts val="1200"/>
+                <a:spcPts val="1400"/>
               </a:spcBef>
-              <a:defRPr sz="1300" b="1">
+              <a:defRPr sz="1350" b="1">
                 <a:solidFill>
                   <a:srgbClr val="D97706"/>
                 </a:solidFill>
@@ -7071,7 +6667,7 @@
               </a:defRPr>
             </a:pPr>
             <a:r>
-              <a:t>• Kiểm soát 2 loại sai lầm thống kê:</a:t>
+              <a:t>• Kiểm soát rủi ro kết luận:</a:t>
             </a:r>
           </a:p>
           <a:p>
@@ -7079,7 +6675,7 @@
               <a:spcBef>
                 <a:spcPts val="200"/>
               </a:spcBef>
-              <a:defRPr sz="1200">
+              <a:defRPr sz="1300">
                 <a:solidFill>
                   <a:srgbClr val="1E293B"/>
                 </a:solidFill>
@@ -7087,11 +6683,7 @@
               </a:defRPr>
             </a:pPr>
             <a:r>
-              <a:t>• Sai lầm Loại I (α): Bác bỏ H₀ khi H₀ đúng (Báo động giả).</a:t>
-            </a:r>
-            <a:br/>
-            <a:r>
-              <a:t>• Sai lầm Loại II (β): Không bác bỏ H₀ khi H₀ sai; Power = 1 - β ≥ 0.8.</a:t>
+              <a:t>Thiết lập ngưỡng tin cậy nghiêm ngặt nhằm tránh kết luận nhầm lẫn (tránh nhận định có sự khác biệt khi thực tế chỉ là do ngẫu nhiên).</a:t>
             </a:r>
           </a:p>
         </p:txBody>
@@ -7231,7 +6823,7 @@
               </a:defRPr>
             </a:pPr>
             <a:r>
-              <a:t>Thống Kê Suy Luận: Welch's T-Test (Mặt Tiền vs Trong Ngõ)</a:t>
+              <a:t>Thống Kê Suy Luận: So Sánh Giá Đất Nội Đô &amp; Ngoại Thành</a:t>
             </a:r>
           </a:p>
         </p:txBody>
@@ -7290,7 +6882,7 @@
         <p:spPr>
           <a:xfrm>
             <a:off x="731520" y="1234440"/>
-            <a:ext cx="5184648" cy="438912"/>
+            <a:ext cx="5184648" cy="603504"/>
           </a:xfrm>
           <a:prstGeom prst="rect">
             <a:avLst/>
@@ -7333,7 +6925,7 @@
         <p:spPr>
           <a:xfrm>
             <a:off x="896112" y="1271016"/>
-            <a:ext cx="4855464" cy="365760"/>
+            <a:ext cx="4855464" cy="530352"/>
           </a:xfrm>
           <a:prstGeom prst="rect">
             <a:avLst/>
@@ -7347,7 +6939,7 @@
           <a:lstStyle/>
           <a:p>
             <a:pPr>
-              <a:defRPr sz="1350" b="1">
+              <a:defRPr sz="1400" b="1">
                 <a:solidFill>
                   <a:srgbClr val="FFFFFF"/>
                 </a:solidFill>
@@ -7355,7 +6947,7 @@
               </a:defRPr>
             </a:pPr>
             <a:r>
-              <a:t>NHÓM 1: BẤT ĐỘNG SẢN MẶT PHỐ</a:t>
+              <a:t>BẤT ĐỘNG SẢN NỘI ĐÔ (23.330 BẢN GHI)</a:t>
             </a:r>
           </a:p>
         </p:txBody>
@@ -7368,8 +6960,8 @@
         </p:nvSpPr>
         <p:spPr>
           <a:xfrm>
-            <a:off x="914400" y="1764792"/>
-            <a:ext cx="4818888" cy="3218688"/>
+            <a:off x="914400" y="1929384"/>
+            <a:ext cx="4818888" cy="3054096"/>
           </a:xfrm>
           <a:prstGeom prst="rect">
             <a:avLst/>
@@ -7391,7 +6983,7 @@
               </a:defRPr>
             </a:pPr>
             <a:r>
-              <a:t>• Đơn giá trung bình thực nghiệm:</a:t>
+              <a:t>• Mặt bằng đơn giá thực tế:</a:t>
             </a:r>
           </a:p>
           <a:p>
@@ -7399,7 +6991,7 @@
               <a:spcBef>
                 <a:spcPts val="200"/>
               </a:spcBef>
-              <a:defRPr sz="1250">
+              <a:defRPr sz="1300">
                 <a:solidFill>
                   <a:srgbClr val="1E293B"/>
                 </a:solidFill>
@@ -7407,13 +6999,13 @@
               </a:defRPr>
             </a:pPr>
             <a:r>
-              <a:t>162.8 triệu/m² (Độ lệch chuẩn: 42.5 triệu/m²).</a:t>
+              <a:t>Đơn giá trung bình đạt 114.2 triệu/m² (mức trung vị đạt 96.7 triệu/m²).</a:t>
             </a:r>
           </a:p>
           <a:p>
             <a:pPr>
               <a:spcBef>
-                <a:spcPts val="1200"/>
+                <a:spcPts val="1400"/>
               </a:spcBef>
               <a:defRPr sz="1350" b="1">
                 <a:solidFill>
@@ -7423,7 +7015,7 @@
               </a:defRPr>
             </a:pPr>
             <a:r>
-              <a:t>• Đặc tính kinh tế vượt trội:</a:t>
+              <a:t>• Khu vực đại diện:</a:t>
             </a:r>
           </a:p>
           <a:p>
@@ -7431,7 +7023,7 @@
               <a:spcBef>
                 <a:spcPts val="200"/>
               </a:spcBef>
-              <a:defRPr sz="1250">
+              <a:defRPr sz="1300">
                 <a:solidFill>
                   <a:srgbClr val="1E293B"/>
                 </a:solidFill>
@@ -7439,13 +7031,13 @@
               </a:defRPr>
             </a:pPr>
             <a:r>
-              <a:t>Khả năng khai thác thương mại, mở showroom, cửa hàng kinh doanh tạo dòng tiền thụ động.</a:t>
+              <a:t>Gồm 7 quận trung tâm lịch sử: Hoàn Kiếm, Ba Đình, Đống Đa, Hai Bà Trưng, Cầu Giấy, Tây Hồ, Thanh Xuân.</a:t>
             </a:r>
           </a:p>
           <a:p>
             <a:pPr>
               <a:spcBef>
-                <a:spcPts val="1200"/>
+                <a:spcPts val="1400"/>
               </a:spcBef>
               <a:defRPr sz="1350" b="1">
                 <a:solidFill>
@@ -7455,7 +7047,7 @@
               </a:defRPr>
             </a:pPr>
             <a:r>
-              <a:t>• Thanh khoản thị trường:</a:t>
+              <a:t>• Đặc tính kinh tế cốt lõi:</a:t>
             </a:r>
           </a:p>
           <a:p>
@@ -7463,7 +7055,7 @@
               <a:spcBef>
                 <a:spcPts val="200"/>
               </a:spcBef>
-              <a:defRPr sz="1250">
+              <a:defRPr sz="1300">
                 <a:solidFill>
                   <a:srgbClr val="1E293B"/>
                 </a:solidFill>
@@ -7471,39 +7063,7 @@
               </a:defRPr>
             </a:pPr>
             <a:r>
-              <a:t>Nhu cầu mua giữ tài sản lớn, tốc độ tăng giá ổn định trước biến động lạm phát.</a:t>
-            </a:r>
-          </a:p>
-          <a:p>
-            <a:pPr>
-              <a:spcBef>
-                <a:spcPts val="1200"/>
-              </a:spcBef>
-              <a:defRPr sz="1350" b="1">
-                <a:solidFill>
-                  <a:srgbClr val="D97706"/>
-                </a:solidFill>
-                <a:latin typeface="Arial"/>
-              </a:defRPr>
-            </a:pPr>
-            <a:r>
-              <a:t>• Quy mô mẫu phân tích:</a:t>
-            </a:r>
-          </a:p>
-          <a:p>
-            <a:pPr>
-              <a:spcBef>
-                <a:spcPts val="200"/>
-              </a:spcBef>
-              <a:defRPr sz="1250">
-                <a:solidFill>
-                  <a:srgbClr val="1E293B"/>
-                </a:solidFill>
-                <a:latin typeface="Arial"/>
-              </a:defRPr>
-            </a:pPr>
-            <a:r>
-              <a:t>3.420 bản ghi BĐS mặt phố trên toàn địa bàn Hà Nội.</a:t>
+              <a:t>Hạ tầng hoàn chỉnh, tiện ích thương mại dày đặc, quỹ đất khan hiếm tạo nên sàn giá cao bền vững.</a:t>
             </a:r>
           </a:p>
         </p:txBody>
@@ -7619,7 +7179,7 @@
           <a:lstStyle/>
           <a:p>
             <a:pPr>
-              <a:defRPr sz="1250" b="1">
+              <a:defRPr sz="1400" b="1">
                 <a:solidFill>
                   <a:srgbClr val="FFFFFF"/>
                 </a:solidFill>
@@ -7627,7 +7187,7 @@
               </a:defRPr>
             </a:pPr>
             <a:r>
-              <a:t>NHÓM 2: BẤT ĐỘNG SẢN TRONG NGÕ NGÁCH</a:t>
+              <a:t>BẤT ĐỘNG SẢN NGOẠI THÀNH (14.072 BẢN GHI)</a:t>
             </a:r>
           </a:p>
         </p:txBody>
@@ -7663,7 +7223,7 @@
               </a:defRPr>
             </a:pPr>
             <a:r>
-              <a:t>• Đơn giá trung bình thực nghiệm:</a:t>
+              <a:t>• Mặt bằng đơn giá thực tế:</a:t>
             </a:r>
           </a:p>
           <a:p>
@@ -7671,7 +7231,7 @@
               <a:spcBef>
                 <a:spcPts val="200"/>
               </a:spcBef>
-              <a:defRPr sz="1250">
+              <a:defRPr sz="1300">
                 <a:solidFill>
                   <a:srgbClr val="1E293B"/>
                 </a:solidFill>
@@ -7679,13 +7239,13 @@
               </a:defRPr>
             </a:pPr>
             <a:r>
-              <a:t>114.2 triệu/m² (Độ lệch chuẩn: 31.8 triệu/m²).</a:t>
+              <a:t>Đơn giá trung bình đạt 82.2 triệu/m² (mức trung vị đạt 76.8 triệu/m²).</a:t>
             </a:r>
           </a:p>
           <a:p>
             <a:pPr>
               <a:spcBef>
-                <a:spcPts val="1200"/>
+                <a:spcPts val="1400"/>
               </a:spcBef>
               <a:defRPr sz="1350" b="1">
                 <a:solidFill>
@@ -7695,7 +7255,7 @@
               </a:defRPr>
             </a:pPr>
             <a:r>
-              <a:t>• Đặc tính an cư:</a:t>
+              <a:t>• Khu vực đại diện:</a:t>
             </a:r>
           </a:p>
           <a:p>
@@ -7703,7 +7263,7 @@
               <a:spcBef>
                 <a:spcPts val="200"/>
               </a:spcBef>
-              <a:defRPr sz="1250">
+              <a:defRPr sz="1300">
                 <a:solidFill>
                   <a:srgbClr val="1E293B"/>
                 </a:solidFill>
@@ -7711,13 +7271,13 @@
               </a:defRPr>
             </a:pPr>
             <a:r>
-              <a:t>Không gian yên tĩnh, phục vụ mục đích ở thuần túy, phụ thuộc vào độ rộng ngõ và khả năng đỗ ô tô.</a:t>
+              <a:t>Gồm các quận mở rộng và huyện ven đô: Hà Đông, Hoàng Mai, Long Biên, Bắc Từ Liêm, Thanh Trì...</a:t>
             </a:r>
           </a:p>
           <a:p>
             <a:pPr>
               <a:spcBef>
-                <a:spcPts val="1200"/>
+                <a:spcPts val="1400"/>
               </a:spcBef>
               <a:defRPr sz="1350" b="1">
                 <a:solidFill>
@@ -7727,7 +7287,7 @@
               </a:defRPr>
             </a:pPr>
             <a:r>
-              <a:t>• Chênh lệch giá trị tuyệt đối:</a:t>
+              <a:t>• Đặc tính kinh tế cốt lõi:</a:t>
             </a:r>
           </a:p>
           <a:p>
@@ -7735,7 +7295,7 @@
               <a:spcBef>
                 <a:spcPts val="200"/>
               </a:spcBef>
-              <a:defRPr sz="1250">
+              <a:defRPr sz="1300">
                 <a:solidFill>
                   <a:srgbClr val="1E293B"/>
                 </a:solidFill>
@@ -7743,39 +7303,7 @@
               </a:defRPr>
             </a:pPr>
             <a:r>
-              <a:t>Thấp hơn nhà mặt phố trung bình 48.6 triệu/m² (chênh lệch ~30% giá trị).</a:t>
-            </a:r>
-          </a:p>
-          <a:p>
-            <a:pPr>
-              <a:spcBef>
-                <a:spcPts val="1200"/>
-              </a:spcBef>
-              <a:defRPr sz="1350" b="1">
-                <a:solidFill>
-                  <a:srgbClr val="D97706"/>
-                </a:solidFill>
-                <a:latin typeface="Arial"/>
-              </a:defRPr>
-            </a:pPr>
-            <a:r>
-              <a:t>• Quy mô mẫu phân tích:</a:t>
-            </a:r>
-          </a:p>
-          <a:p>
-            <a:pPr>
-              <a:spcBef>
-                <a:spcPts val="200"/>
-              </a:spcBef>
-              <a:defRPr sz="1250">
-                <a:solidFill>
-                  <a:srgbClr val="1E293B"/>
-                </a:solidFill>
-                <a:latin typeface="Arial"/>
-              </a:defRPr>
-            </a:pPr>
-            <a:r>
-              <a:t>17.722 bản ghi BĐS trong ngõ ngách sau làm sạch.</a:t>
+              <a:t>Quỹ đất phát triển rộng, mặt bằng giá vừa túi tiền, phù hợp nhu cầu định cư số đông.</a:t>
             </a:r>
           </a:p>
         </p:txBody>
@@ -7830,7 +7358,7 @@
               </a:defRPr>
             </a:pPr>
             <a:r>
-              <a:t>🔬 KẾT QUẢ KIỂM ĐỊNH WELCH'S T-TEST (PHƯƠNG SAI KHÔNG ĐỒNG NHẤT)</a:t>
+              <a:t>🔬 KẾT LUẬN KIỂM ĐỊNH THỐNG KÊ (SO SÁNH 2 VÙNG ĐỊA LÝ)</a:t>
             </a:r>
           </a:p>
           <a:p>
@@ -7838,7 +7366,7 @@
               <a:spcBef>
                 <a:spcPts val="600"/>
               </a:spcBef>
-              <a:defRPr sz="1250">
+              <a:defRPr sz="1300">
                 <a:solidFill>
                   <a:srgbClr val="FFFFFF"/>
                 </a:solidFill>
@@ -7846,11 +7374,11 @@
               </a:defRPr>
             </a:pPr>
             <a:r>
-              <a:t>• T-statistic = 42.18 | P-value = 1.2e-85 (&lt; 0.001) -&gt; BÁC BỎ HOÀN TOÀN GIẢ THUYẾT H0 (HAI NHÓM CÓ GIÁ BẰNG NHAU).</a:t>
+              <a:t>• Khẳng định khoa học: Giá nhà đất Nội đô cao hơn Ngoại thành trung bình 32.0 triệu/m² (+39.0%), sự khác biệt mang tính quy luật vững chắc của thị trường, hoàn toàn không phải do biến động ngẫu nhiên.</a:t>
             </a:r>
             <a:br/>
             <a:r>
-              <a:t>• Khẳng định với độ tin cậy &gt; 99.99%: Nhà mặt phố tại Hà Nội có giá trị cao hơn có ý nghĩa thống kê so với nhà trong ngõ.</a:t>
+              <a:t>• Ý nghĩa thực tiễn: Mức chênh lệch lớn khẳng định vị trí trung tâm vẫn là yếu tố nắm giữ thặng dư giá trị hàng đầu tại thị trường Hà Nội.</a:t>
             </a:r>
           </a:p>
         </p:txBody>
@@ -7990,7 +7518,7 @@
               </a:defRPr>
             </a:pPr>
             <a:r>
-              <a:t>ANOVA Phân Tích Phương Sai &amp; 9 Cặp Quận 'Song Sinh' Giá</a:t>
+              <a:t>Phân Tầng Giá 12 Quận/Huyện &amp; Nhận Diện Tài Sản Thay Thế</a:t>
             </a:r>
           </a:p>
         </p:txBody>
@@ -8106,7 +7634,7 @@
           <a:lstStyle/>
           <a:p>
             <a:pPr>
-              <a:defRPr sz="1250" b="1">
+              <a:defRPr sz="1400" b="1">
                 <a:solidFill>
                   <a:srgbClr val="FFFFFF"/>
                 </a:solidFill>
@@ -8114,7 +7642,7 @@
               </a:defRPr>
             </a:pPr>
             <a:r>
-              <a:t>KẾT QUẢ PHÂN TÍCH PHƯƠNG SAI ANOVA 30 QUẬN/HUYỆN</a:t>
+              <a:t>KẾT QUẢ PHÂN TÍCH PHƯƠNG SAI &amp; ĐỐI SÁNH ĐA NHÓM GIỮA 12 QUẬN</a:t>
             </a:r>
           </a:p>
         </p:txBody>
@@ -8142,7 +7670,7 @@
           <a:lstStyle/>
           <a:p>
             <a:pPr>
-              <a:defRPr sz="1300" b="1">
+              <a:defRPr sz="1350" b="1">
                 <a:solidFill>
                   <a:srgbClr val="D97706"/>
                 </a:solidFill>
@@ -8150,16 +7678,16 @@
               </a:defRPr>
             </a:pPr>
             <a:r>
-              <a:t>• F-statistic = 186.42 | P-value &lt; 0.001: </a:t>
-            </a:r>
-            <a:r>
-              <a:rPr sz="1250">
+              <a:t>• Phân tích phương sai (ANOVA): </a:t>
+            </a:r>
+            <a:r>
+              <a:rPr sz="1300">
                 <a:solidFill>
                   <a:srgbClr val="1E293B"/>
                 </a:solidFill>
                 <a:latin typeface="Arial"/>
               </a:rPr>
-              <a:t>Bác bỏ giả thuyết H0; vị trí địa lý tạo nên sự phân hóa đơn giá có ý nghĩa thống kê cực kỳ mạnh mẽ.</a:t>
+              <a:t>Khẳng định giữa 12 quận/huyện có sự phân tầng giá cực kỳ sâu sắc, vị trí địa lý quyết định mức sàn giá.</a:t>
             </a:r>
           </a:p>
           <a:p>
@@ -8167,7 +7695,7 @@
               <a:spcBef>
                 <a:spcPts val="800"/>
               </a:spcBef>
-              <a:defRPr sz="1300" b="1">
+              <a:defRPr sz="1350" b="1">
                 <a:solidFill>
                   <a:srgbClr val="D97706"/>
                 </a:solidFill>
@@ -8175,16 +7703,16 @@
               </a:defRPr>
             </a:pPr>
             <a:r>
-              <a:t>• Ý nghĩa kiểm định hậu nghiệm (Tukey HSD Post-hoc): </a:t>
-            </a:r>
-            <a:r>
-              <a:rPr sz="1250">
+              <a:t>• Kết quả kiểm định đối sánh từng cặp: </a:t>
+            </a:r>
+            <a:r>
+              <a:rPr sz="1300">
                 <a:solidFill>
                   <a:srgbClr val="1E293B"/>
                 </a:solidFill>
                 <a:latin typeface="Arial"/>
               </a:rPr>
-              <a:t>Xác định chính xác những cặp quận nào có giá thực sự khác biệt và những cặp quận nào có mức giá tương đương nhau.</a:t>
+              <a:t>Phát hiện chính xác 9 cặp quận có mặt bằng giá tương đương nhau, tạo thành các cụm tài sản thay thế hoàn hảo.</a:t>
             </a:r>
           </a:p>
         </p:txBody>
@@ -8300,7 +7828,7 @@
           <a:lstStyle/>
           <a:p>
             <a:pPr>
-              <a:defRPr sz="1250" b="1">
+              <a:defRPr sz="1400" b="1">
                 <a:solidFill>
                   <a:srgbClr val="FFFFFF"/>
                 </a:solidFill>
@@ -8308,7 +7836,7 @@
               </a:defRPr>
             </a:pPr>
             <a:r>
-              <a:t>9 CẶP QUẬN 'SONG SINH' TƯƠNG ĐỒNG GIÁ</a:t>
+              <a:t>9 CẶP QUẬN CÓ MẶT BẰNG GIÁ TƯƠNG ĐỒNG NHAU</a:t>
             </a:r>
           </a:p>
         </p:txBody>
@@ -8336,7 +7864,7 @@
           <a:lstStyle/>
           <a:p>
             <a:pPr>
-              <a:defRPr sz="1300" b="1">
+              <a:defRPr sz="1350" b="1">
                 <a:solidFill>
                   <a:srgbClr val="D97706"/>
                 </a:solidFill>
@@ -8344,16 +7872,16 @@
               </a:defRPr>
             </a:pPr>
             <a:r>
-              <a:t>• Cầu Giấy ≈ Đống Đa: </a:t>
-            </a:r>
-            <a:r>
-              <a:rPr sz="1200">
+              <a:t>• Tam giác vàng trung tâm: </a:t>
+            </a:r>
+            <a:r>
+              <a:rPr sz="1250">
                 <a:solidFill>
                   <a:srgbClr val="1E293B"/>
                 </a:solidFill>
                 <a:latin typeface="Arial"/>
               </a:rPr>
-              <a:t>Chênh lệch trung vị &lt; 2.5% (p = 0.82), hai trung tâm giáo dục &amp; văn phòng.</a:t>
+              <a:t>Ba Đình (128.6 tr) ≈ Cầu Giấy (125.3 tr) ≈ Tây Hồ (123.7 tr/m²) tạo thành cụm giá cao nhất.</a:t>
             </a:r>
           </a:p>
           <a:p>
@@ -8361,7 +7889,7 @@
               <a:spcBef>
                 <a:spcPts val="1000"/>
               </a:spcBef>
-              <a:defRPr sz="1300" b="1">
+              <a:defRPr sz="1350" b="1">
                 <a:solidFill>
                   <a:srgbClr val="D97706"/>
                 </a:solidFill>
@@ -8369,16 +7897,16 @@
               </a:defRPr>
             </a:pPr>
             <a:r>
-              <a:t>• Thanh Xuân ≈ Nam Từ Liêm: </a:t>
-            </a:r>
-            <a:r>
-              <a:rPr sz="1200">
+              <a:t>• Cặp cận trung tâm phía Nam: </a:t>
+            </a:r>
+            <a:r>
+              <a:rPr sz="1250">
                 <a:solidFill>
                   <a:srgbClr val="1E293B"/>
                 </a:solidFill>
                 <a:latin typeface="Arial"/>
               </a:rPr>
-              <a:t>Chênh lệch &lt; 3.2% (p = 0.76), trục phát triển đô thị phía Tây sôi động.</a:t>
+              <a:t>Hai Bà Trưng (102.6 tr) ≈ Thanh Xuân (102.7 tr/m²), mặt bằng giá gần như trùng khớp hoàn toàn.</a:t>
             </a:r>
           </a:p>
           <a:p>
@@ -8386,7 +7914,7 @@
               <a:spcBef>
                 <a:spcPts val="1000"/>
               </a:spcBef>
-              <a:defRPr sz="1300" b="1">
+              <a:defRPr sz="1350" b="1">
                 <a:solidFill>
                   <a:srgbClr val="D97706"/>
                 </a:solidFill>
@@ -8394,16 +7922,16 @@
               </a:defRPr>
             </a:pPr>
             <a:r>
-              <a:t>• Hà Đông ≈ Hoàng Mai: </a:t>
-            </a:r>
-            <a:r>
-              <a:rPr sz="1200">
+              <a:t>• Chùm 4 quận mở rộng đồng nhất: </a:t>
+            </a:r>
+            <a:r>
+              <a:rPr sz="1250">
                 <a:solidFill>
                   <a:srgbClr val="1E293B"/>
                 </a:solidFill>
                 <a:latin typeface="Arial"/>
               </a:rPr>
-              <a:t>Chênh lệch &lt; 2.1% (p = 0.88), phân khúc giá vừa túi tiền cho gia đình trẻ.</a:t>
+              <a:t>Bắc Từ Liêm (83.9 tr) ≈ Hoàng Mai (83.8 tr) ≈ Long Biên (85.5 tr) ≈ Hà Đông (80.8 tr/m²).</a:t>
             </a:r>
           </a:p>
           <a:p>
@@ -8411,7 +7939,7 @@
               <a:spcBef>
                 <a:spcPts val="1000"/>
               </a:spcBef>
-              <a:defRPr sz="1300" b="1">
+              <a:defRPr sz="1350" b="1">
                 <a:solidFill>
                   <a:srgbClr val="D97706"/>
                 </a:solidFill>
@@ -8419,16 +7947,16 @@
               </a:defRPr>
             </a:pPr>
             <a:r>
-              <a:t>• Long Biên ≈ Tây Hồ (vùng ngoài): </a:t>
-            </a:r>
-            <a:r>
-              <a:rPr sz="1200">
+              <a:t>• Nhóm huyện ven đô: </a:t>
+            </a:r>
+            <a:r>
+              <a:rPr sz="1250">
                 <a:solidFill>
                   <a:srgbClr val="1E293B"/>
                 </a:solidFill>
                 <a:latin typeface="Arial"/>
               </a:rPr>
-              <a:t>Tương đồng về biên độ tăng trưởng phân khúc nhà vườn/biệt thự.</a:t>
+              <a:t>Thanh Trì (62.9 tr/m²) định hình phân khúc giá mềm nhất trong nhóm nghiên cứu.</a:t>
             </a:r>
           </a:p>
         </p:txBody>
@@ -8544,7 +8072,7 @@
           <a:lstStyle/>
           <a:p>
             <a:pPr>
-              <a:defRPr sz="1250" b="1">
+              <a:defRPr sz="1400" b="1">
                 <a:solidFill>
                   <a:srgbClr val="FFFFFF"/>
                 </a:solidFill>
@@ -8552,7 +8080,7 @@
               </a:defRPr>
             </a:pPr>
             <a:r>
-              <a:t>Ý NGHĨA KINH DOANH &amp; TỐI ƯU DANH MỤC ĐẦU TƯ</a:t>
+              <a:t>Ý NGHĨA KINH DOANH &amp; TỐI ƯU HÓA DANH MỤC</a:t>
             </a:r>
           </a:p>
         </p:txBody>
@@ -8580,7 +8108,7 @@
           <a:lstStyle/>
           <a:p>
             <a:pPr>
-              <a:defRPr sz="1300" b="1">
+              <a:defRPr sz="1350" b="1">
                 <a:solidFill>
                   <a:srgbClr val="D97706"/>
                 </a:solidFill>
@@ -8588,7 +8116,7 @@
               </a:defRPr>
             </a:pPr>
             <a:r>
-              <a:t>• Chiến lược hàng hóa thay thế (Substitute Assets):</a:t>
+              <a:t>• Chiến lược tài sản thay thế (Substitute Assets):</a:t>
             </a:r>
           </a:p>
           <a:p>
@@ -8596,7 +8124,7 @@
               <a:spcBef>
                 <a:spcPts val="200"/>
               </a:spcBef>
-              <a:defRPr sz="1200">
+              <a:defRPr sz="1250">
                 <a:solidFill>
                   <a:srgbClr val="1E293B"/>
                 </a:solidFill>
@@ -8604,7 +8132,7 @@
               </a:defRPr>
             </a:pPr>
             <a:r>
-              <a:t>Khi giá tại Cầu Giấy bị đẩy lên quá cao, nhà đầu tư có thể chuyển dịch vốn sang Đống Đa hoặc Nam Từ Liêm với kỳ vọng tỷ suất sinh lời tương đương.</a:t>
+              <a:t>Khi giá tại một quận bị đẩy lên quá cao, nhà đầu tư có thể chuyển dịch vốn sang quận lân cận có hạ tầng và mức giá tương đương.</a:t>
             </a:r>
           </a:p>
           <a:p>
@@ -8612,7 +8140,7 @@
               <a:spcBef>
                 <a:spcPts val="1000"/>
               </a:spcBef>
-              <a:defRPr sz="1300" b="1">
+              <a:defRPr sz="1350" b="1">
                 <a:solidFill>
                   <a:srgbClr val="D97706"/>
                 </a:solidFill>
@@ -8620,7 +8148,7 @@
               </a:defRPr>
             </a:pPr>
             <a:r>
-              <a:t>• Phòng ngừa rủi ro định giá sai (Arbitrage):</a:t>
+              <a:t>• Phòng ngừa rủi ro định giá lệch:</a:t>
             </a:r>
           </a:p>
           <a:p>
@@ -8628,7 +8156,7 @@
               <a:spcBef>
                 <a:spcPts val="200"/>
               </a:spcBef>
-              <a:defRPr sz="1200">
+              <a:defRPr sz="1250">
                 <a:solidFill>
                   <a:srgbClr val="1E293B"/>
                 </a:solidFill>
@@ -8636,7 +8164,7 @@
               </a:defRPr>
             </a:pPr>
             <a:r>
-              <a:t>Phát hiện ngay những căn nhà bị định giá lệch khỏi mức cân bằng của cặp quận song sinh để thực hiện chiến lược mua gom.</a:t>
+              <a:t>Nhận diện những căn nhà bị chào giá lệch khỏi mức cân bằng của cụm quận tương đồng để thương lượng mức giá tốt hơn.</a:t>
             </a:r>
           </a:p>
           <a:p>
@@ -8644,7 +8172,7 @@
               <a:spcBef>
                 <a:spcPts val="1000"/>
               </a:spcBef>
-              <a:defRPr sz="1300" b="1">
+              <a:defRPr sz="1350" b="1">
                 <a:solidFill>
                   <a:srgbClr val="D97706"/>
                 </a:solidFill>
@@ -8652,7 +8180,7 @@
               </a:defRPr>
             </a:pPr>
             <a:r>
-              <a:t>• Khuyến nghị cho sàn môi giới:</a:t>
+              <a:t>• Khuyến nghị cho khách hàng mua nhà:</a:t>
             </a:r>
           </a:p>
           <a:p>
@@ -8660,7 +8188,7 @@
               <a:spcBef>
                 <a:spcPts val="200"/>
               </a:spcBef>
-              <a:defRPr sz="1200">
+              <a:defRPr sz="1250">
                 <a:solidFill>
                   <a:srgbClr val="1E293B"/>
                 </a:solidFill>
@@ -8668,7 +8196,7 @@
               </a:defRPr>
             </a:pPr>
             <a:r>
-              <a:t>Đa dạng hóa rổ sản phẩm liên quận, tư vấn linh hoạt cho khách hàng có ngân sách cố định.</a:t>
+              <a:t>Người mua với ngân sách khoảng 80 - 85 tr/m² có thể linh hoạt chuyển đổi giữa Bắc Từ Liêm, Hoàng Mai, Long Biên, Hà Đông.</a:t>
             </a:r>
           </a:p>
         </p:txBody>
@@ -8808,7 +8336,7 @@
               </a:defRPr>
             </a:pPr>
             <a:r>
-              <a:t>Biểu Đồ 7: Khoảng Tin Cậy 95% Bootstrap Đơn Giá Từng Quận</a:t>
+              <a:t>Biểu Đồ 7: Khoảng Giá Trị An Toàn Của Từng Quận/Huyện</a:t>
             </a:r>
           </a:p>
         </p:txBody>
@@ -8993,7 +8521,7 @@
           <a:lstStyle/>
           <a:p>
             <a:pPr>
-              <a:defRPr sz="1250" b="1">
+              <a:defRPr sz="1400" b="1">
                 <a:solidFill>
                   <a:srgbClr val="FFFFFF"/>
                 </a:solidFill>
@@ -9001,7 +8529,7 @@
               </a:defRPr>
             </a:pPr>
             <a:r>
-              <a:t>KHOẢNG TIN CẬY 95% (BĐ 07)</a:t>
+              <a:t>KHOẢNG GIÁ AN TOÀN (BĐ 07)</a:t>
             </a:r>
           </a:p>
         </p:txBody>
@@ -9029,7 +8557,7 @@
           <a:lstStyle/>
           <a:p>
             <a:pPr>
-              <a:defRPr sz="1350" b="1">
+              <a:defRPr sz="1400" b="1">
                 <a:solidFill>
                   <a:srgbClr val="D97706"/>
                 </a:solidFill>
@@ -9045,7 +8573,7 @@
               <a:spcBef>
                 <a:spcPts val="300"/>
               </a:spcBef>
-              <a:defRPr sz="1250">
+              <a:defRPr sz="1300">
                 <a:solidFill>
                   <a:srgbClr val="1E293B"/>
                 </a:solidFill>
@@ -9053,15 +8581,15 @@
               </a:defRPr>
             </a:pPr>
             <a:r>
-              <a:t>Sử dụng kỹ thuật tái lấy mẫu không hoàn lại Bootstrap 1.000 lần để xác định dải dao động 95% tin cậy của đơn giá m² từng quận.</a:t>
+              <a:t>Ước lượng dải biến thiên đơn giá thực tế của từng quận với độ tin cậy cao, xác định biên độ an toàn giữa mức giá sàn và mức giá trần.</a:t>
             </a:r>
           </a:p>
           <a:p>
             <a:pPr>
               <a:spcBef>
-                <a:spcPts val="1000"/>
+                <a:spcPts val="1200"/>
               </a:spcBef>
-              <a:defRPr sz="1350" b="1">
+              <a:defRPr sz="1400" b="1">
                 <a:solidFill>
                   <a:srgbClr val="D97706"/>
                 </a:solidFill>
@@ -9069,7 +8597,7 @@
               </a:defRPr>
             </a:pPr>
             <a:r>
-              <a:t>Miễn Nhiễm Với Giả Định Phân Phối:</a:t>
+              <a:t>Phương Pháp Ước Lượng Ổn Định:</a:t>
             </a:r>
           </a:p>
           <a:p>
@@ -9077,7 +8605,7 @@
               <a:spcBef>
                 <a:spcPts val="300"/>
               </a:spcBef>
-              <a:defRPr sz="1250">
+              <a:defRPr sz="1300">
                 <a:solidFill>
                   <a:srgbClr val="1E293B"/>
                 </a:solidFill>
@@ -9085,15 +8613,15 @@
               </a:defRPr>
             </a:pPr>
             <a:r>
-              <a:t>Bootstrap không đòi hỏi dữ liệu phải tuân theo phân phối chuẩn, bảo toàn độ chính xác tuyệt đối ngay cả ở các quận có độ lệch cao.</a:t>
+              <a:t>Kỹ thuật ước lượng không phụ thuộc giả định chuẩn hóa, bảo toàn độ chính xác ngay cả ở các khu vực có phân phối giá phân tán mạnh.</a:t>
             </a:r>
           </a:p>
           <a:p>
             <a:pPr>
               <a:spcBef>
-                <a:spcPts val="1000"/>
+                <a:spcPts val="1200"/>
               </a:spcBef>
-              <a:defRPr sz="1350" b="1">
+              <a:defRPr sz="1400" b="1">
                 <a:solidFill>
                   <a:srgbClr val="D97706"/>
                 </a:solidFill>
@@ -9101,7 +8629,7 @@
               </a:defRPr>
             </a:pPr>
             <a:r>
-              <a:t>Ứng Dụng Quản Trị Rủi Ro Tín Dụng:</a:t>
+              <a:t>Minh Chứng Cặp Quận Tương Đồng:</a:t>
             </a:r>
           </a:p>
           <a:p>
@@ -9109,7 +8637,7 @@
               <a:spcBef>
                 <a:spcPts val="300"/>
               </a:spcBef>
-              <a:defRPr sz="1250">
+              <a:defRPr sz="1300">
                 <a:solidFill>
                   <a:srgbClr val="1E293B"/>
                 </a:solidFill>
@@ -9117,15 +8645,15 @@
               </a:defRPr>
             </a:pPr>
             <a:r>
-              <a:t>Ngân hàng có thể sử dụng cận dưới (Lower Bound 95%) làm mức định giá trần an toàn khi duyệt hạn mức cho vay thế chấp.</a:t>
+              <a:t>Thanh dải giá của Ba Đình, Cầu Giấy và Tây Hồ gối đè lên nhau, giải thích trực quan lý do tại sao 3 quận này có mức giá tương đương.</a:t>
             </a:r>
           </a:p>
           <a:p>
             <a:pPr>
               <a:spcBef>
-                <a:spcPts val="1000"/>
+                <a:spcPts val="1200"/>
               </a:spcBef>
-              <a:defRPr sz="1350" b="1">
+              <a:defRPr sz="1400" b="1">
                 <a:solidFill>
                   <a:srgbClr val="D97706"/>
                 </a:solidFill>
@@ -9133,7 +8661,7 @@
               </a:defRPr>
             </a:pPr>
             <a:r>
-              <a:t>Ý Nghĩa Với Người Mua Nhà:</a:t>
+              <a:t>Ứng Dụng Quản Trị Rủi Ro Tín Dụng:</a:t>
             </a:r>
           </a:p>
           <a:p>
@@ -9141,7 +8669,7 @@
               <a:spcBef>
                 <a:spcPts val="300"/>
               </a:spcBef>
-              <a:defRPr sz="1250">
+              <a:defRPr sz="1300">
                 <a:solidFill>
                   <a:srgbClr val="1E293B"/>
                 </a:solidFill>
@@ -9149,7 +8677,7 @@
               </a:defRPr>
             </a:pPr>
             <a:r>
-              <a:t>Giúp khách hàng nhận diện nhanh giao dịch đang mua là đắt hay rẻ so với biên độ dao động thống kê chuẩn mực của khu vực.</a:t>
+              <a:t>Ngân hàng có thể sử dụng mức cận an toàn của dải giá làm cơ sở xác định hạn mức cho vay thế chấp bất động sản.</a:t>
             </a:r>
           </a:p>
         </p:txBody>
@@ -9289,7 +8817,7 @@
               </a:defRPr>
             </a:pPr>
             <a:r>
-              <a:t>Phân Tích Hồi Quy Tuyến Tính OLS &amp; 3 Nghĩa Vụ Đạo Đức AI</a:t>
+              <a:t>Tác Động Của Các Yếu Tố Đến Đơn Giá &amp; 3 Nguyên Tắc Diễn Giải</a:t>
             </a:r>
           </a:p>
         </p:txBody>
@@ -9405,7 +8933,7 @@
           <a:lstStyle/>
           <a:p>
             <a:pPr>
-              <a:defRPr sz="1250" b="1">
+              <a:defRPr sz="1350" b="1">
                 <a:solidFill>
                   <a:srgbClr val="FFFFFF"/>
                 </a:solidFill>
@@ -9413,7 +8941,7 @@
               </a:defRPr>
             </a:pPr>
             <a:r>
-              <a:t>ĐỌC HIỂU HỆ SỐ HỒI QUY OLS</a:t>
+              <a:t>MỨC ĐỘ TÁC ĐỘNG ĐẾN ĐƠN GIÁ (MẪU NGHIÊN CỨU)</a:t>
             </a:r>
           </a:p>
         </p:txBody>
@@ -9441,7 +8969,7 @@
           <a:lstStyle/>
           <a:p>
             <a:pPr>
-              <a:defRPr sz="1300" b="1">
+              <a:defRPr sz="1350" b="1">
                 <a:solidFill>
                   <a:srgbClr val="D97706"/>
                 </a:solidFill>
@@ -9449,7 +8977,7 @@
               </a:defRPr>
             </a:pPr>
             <a:r>
-              <a:t>• Độ giải thích R² = 0.382:</a:t>
+              <a:t>• Vị trí nội đô:</a:t>
             </a:r>
           </a:p>
           <a:p>
@@ -9457,7 +8985,7 @@
               <a:spcBef>
                 <a:spcPts val="200"/>
               </a:spcBef>
-              <a:defRPr sz="1250">
+              <a:defRPr sz="1300">
                 <a:solidFill>
                   <a:srgbClr val="1E293B"/>
                 </a:solidFill>
@@ -9465,15 +8993,15 @@
               </a:defRPr>
             </a:pPr>
             <a:r>
-              <a:t>Mô hình OLS giải thích được 38.2% độ biến thiên giá trị; phần còn lại thuộc về yếu tố phi tuyến và vi vị trí.</a:t>
+              <a:t>Cùng diện tích và số tầng, nhà nội đô gắn liền với mức giá cao hơn khoảng 33 triệu/m² so với ngoại thành.</a:t>
             </a:r>
           </a:p>
           <a:p>
             <a:pPr>
               <a:spcBef>
-                <a:spcPts val="1200"/>
+                <a:spcPts val="1400"/>
               </a:spcBef>
-              <a:defRPr sz="1300" b="1">
+              <a:defRPr sz="1350" b="1">
                 <a:solidFill>
                   <a:srgbClr val="D97706"/>
                 </a:solidFill>
@@ -9481,7 +9009,7 @@
               </a:defRPr>
             </a:pPr>
             <a:r>
-              <a:t>• Hệ số Diện tích (Area):</a:t>
+              <a:t>• Vị trí trong ngõ hẻm:</a:t>
             </a:r>
           </a:p>
           <a:p>
@@ -9489,7 +9017,7 @@
               <a:spcBef>
                 <a:spcPts val="200"/>
               </a:spcBef>
-              <a:defRPr sz="1250">
+              <a:defRPr sz="1300">
                 <a:solidFill>
                   <a:srgbClr val="1E293B"/>
                 </a:solidFill>
@@ -9497,15 +9025,15 @@
               </a:defRPr>
             </a:pPr>
             <a:r>
-              <a:t>Beta chuẩn hóa = +0.58 (p &lt; 0.001) - Biến số có sức ảnh hưởng mạnh nhất đến tổng giá.</a:t>
+              <a:t>Nhà trong ngõ hẻm gắn liền với mức giá thấp hơn khoảng 33 triệu/m² so với nhà mặt phố.</a:t>
             </a:r>
           </a:p>
           <a:p>
             <a:pPr>
               <a:spcBef>
-                <a:spcPts val="1200"/>
+                <a:spcPts val="1400"/>
               </a:spcBef>
-              <a:defRPr sz="1300" b="1">
+              <a:defRPr sz="1350" b="1">
                 <a:solidFill>
                   <a:srgbClr val="D97706"/>
                 </a:solidFill>
@@ -9513,7 +9041,7 @@
               </a:defRPr>
             </a:pPr>
             <a:r>
-              <a:t>• Hệ số Mặt tiền (Frontage):</a:t>
+              <a:t>• Chiều rộng mặt tiền:</a:t>
             </a:r>
           </a:p>
           <a:p>
@@ -9521,7 +9049,7 @@
               <a:spcBef>
                 <a:spcPts val="200"/>
               </a:spcBef>
-              <a:defRPr sz="1250">
+              <a:defRPr sz="1300">
                 <a:solidFill>
                   <a:srgbClr val="1E293B"/>
                 </a:solidFill>
@@ -9529,15 +9057,15 @@
               </a:defRPr>
             </a:pPr>
             <a:r>
-              <a:t>Beta chuẩn hóa = +0.24 (p &lt; 0.001) - Tăng thêm giá trị thặng dư thương mại độc lập.</a:t>
+              <a:t>Mỗi mét mặt tiền mở rộng đi kèm với mức tăng thêm khoảng 2 triệu/m² đơn giá.</a:t>
             </a:r>
           </a:p>
           <a:p>
             <a:pPr>
               <a:spcBef>
-                <a:spcPts val="1200"/>
+                <a:spcPts val="1400"/>
               </a:spcBef>
-              <a:defRPr sz="1300" b="1">
+              <a:defRPr sz="1350" b="1">
                 <a:solidFill>
                   <a:srgbClr val="D97706"/>
                 </a:solidFill>
@@ -9545,7 +9073,7 @@
               </a:defRPr>
             </a:pPr>
             <a:r>
-              <a:t>• Cảnh báo Đa cộng tuyến (VIF):</a:t>
+              <a:t>• Chiều sâu thửa đất:</a:t>
             </a:r>
           </a:p>
           <a:p>
@@ -9553,7 +9081,7 @@
               <a:spcBef>
                 <a:spcPts val="200"/>
               </a:spcBef>
-              <a:defRPr sz="1250">
+              <a:defRPr sz="1300">
                 <a:solidFill>
                   <a:srgbClr val="1E293B"/>
                 </a:solidFill>
@@ -9561,7 +9089,7 @@
               </a:defRPr>
             </a:pPr>
             <a:r>
-              <a:t>Biến số phòng ngủ có VIF &gt; 4.2 khi kết hợp với diện tích -&gt; Cần loại bỏ để tránh ước lượng sai số.</a:t>
+              <a:t>Không cho thấy tác động rõ rệt đến đơn giá khi các yếu tố diện tích sàn và mặt tiền đã được xem xét.</a:t>
             </a:r>
           </a:p>
         </p:txBody>
@@ -9677,7 +9205,7 @@
           <a:lstStyle/>
           <a:p>
             <a:pPr>
-              <a:defRPr sz="1250" b="1">
+              <a:defRPr sz="1350" b="1">
                 <a:solidFill>
                   <a:srgbClr val="FFFFFF"/>
                 </a:solidFill>
@@ -9685,7 +9213,7 @@
               </a:defRPr>
             </a:pPr>
             <a:r>
-              <a:t>1. TÍNH MINH BẠCH &amp; KHẢ NĂNG GIẢI THÍCH (TRANSPARENCY)</a:t>
+              <a:t>1. NGUYÊN TẮC 1: KHÔNG KHẲNG ĐỊNH QUAN HỆ NHÂN QUẢ</a:t>
             </a:r>
           </a:p>
         </p:txBody>
@@ -9716,7 +9244,7 @@
               <a:spcBef>
                 <a:spcPts val="400"/>
               </a:spcBef>
-              <a:defRPr sz="1250">
+              <a:defRPr sz="1300">
                 <a:solidFill>
                   <a:srgbClr val="1E293B"/>
                 </a:solidFill>
@@ -9724,7 +9252,7 @@
               </a:defRPr>
             </a:pPr>
             <a:r>
-              <a:t>Không sử dụng mô hình 'hộp đen' khó hiểu. Mọi kết quả định giá từ mô hình đều phải giải trình rõ ràng đóng góp biên của các đặc trưng (SHAP/Feature Importance) cho các bên liên quan.</a:t>
+              <a:t>Bắt buộc dùng cụm từ 'gắn liền với / đi kèm với', không dùng từ 'gây ra'. Mô hình quan sát chỉ phản ánh mối liên hệ thống kê giữa các biến số, không chứng minh quan hệ nhân quả.</a:t>
             </a:r>
           </a:p>
         </p:txBody>
@@ -9840,7 +9368,7 @@
           <a:lstStyle/>
           <a:p>
             <a:pPr>
-              <a:defRPr sz="1250" b="1">
+              <a:defRPr sz="1350" b="1">
                 <a:solidFill>
                   <a:srgbClr val="FFFFFF"/>
                 </a:solidFill>
@@ -9848,7 +9376,7 @@
               </a:defRPr>
             </a:pPr>
             <a:r>
-              <a:t>2. PHÒNG CHỐNG ĐỊNH KIẾN THUẬT TOÁN (FAIRNESS)</a:t>
+              <a:t>2. NGUYÊN TẮC 2: ĐIỀU KIỆN CỐ ĐỊNH CÁC YẾU TỐ KHÁC</a:t>
             </a:r>
           </a:p>
         </p:txBody>
@@ -9879,7 +9407,7 @@
               <a:spcBef>
                 <a:spcPts val="400"/>
               </a:spcBef>
-              <a:defRPr sz="1250">
+              <a:defRPr sz="1300">
                 <a:solidFill>
                   <a:srgbClr val="1E293B"/>
                 </a:solidFill>
@@ -9887,7 +9415,7 @@
               </a:defRPr>
             </a:pPr>
             <a:r>
-              <a:t>Đảm bảo mô hình không áp đặt định kiến tiêu cực lên các quận ven đô (Đông Anh, Gia Lâm, Mê Linh). Luôn cập nhật tốc độ phát triển hạ tầng thực tế vào thuật toán.</a:t>
+              <a:t>Mọi nhận định về mức tăng giảm giá chỉ có hiệu lực khi các đặc tính khác (diện tích, số tầng, vị trí) được giữ nguyên để cô lập tác động riêng lẻ của đặc tính đang xét.</a:t>
             </a:r>
           </a:p>
         </p:txBody>
@@ -10003,7 +9531,7 @@
           <a:lstStyle/>
           <a:p>
             <a:pPr>
-              <a:defRPr sz="1250" b="1">
+              <a:defRPr sz="1350" b="1">
                 <a:solidFill>
                   <a:srgbClr val="FFFFFF"/>
                 </a:solidFill>
@@ -10011,7 +9539,7 @@
               </a:defRPr>
             </a:pPr>
             <a:r>
-              <a:t>3. BẢO MẬT DỮ LIỆU &amp; QUYỀN RIÊNG TƯ (DATA PRIVACY)</a:t>
+              <a:t>3. NGUYÊN TẮC 3: GIỚI HẠN TRONG PHẠM VI DỮ LIỆU ĐÃ HỌC</a:t>
             </a:r>
           </a:p>
         </p:txBody>
@@ -10042,7 +9570,7 @@
               <a:spcBef>
                 <a:spcPts val="400"/>
               </a:spcBef>
-              <a:defRPr sz="1250">
+              <a:defRPr sz="1300">
                 <a:solidFill>
                   <a:srgbClr val="1E293B"/>
                 </a:solidFill>
@@ -10050,7 +9578,7 @@
               </a:defRPr>
             </a:pPr>
             <a:r>
-              <a:t>Ẩn danh hóa hoàn toàn số nhà, tên chủ hộ, thông tin liên lạc cá nhân theo đúng Nghị định 13/2023/NĐ-CP về bảo vệ dữ liệu cá nhân.</a:t>
+              <a:t>Kết quả phân tích chỉ có giá trị trong phạm vi dữ liệu quan sát (nhà đất phổ thông dưới 500 m² và dưới 500 tr/m²), tuyệt đối không suy diễn cho các dự án siêu biệt thự đặc thù.</a:t>
             </a:r>
           </a:p>
         </p:txBody>
@@ -10190,7 +9718,7 @@
               </a:defRPr>
             </a:pPr>
             <a:r>
-              <a:t>Biểu Đồ 8: Kiểm Định 4 GiẢ Định Hồi Quy Tuyến Tính (LINE Diagnostics)</a:t>
+              <a:t>Biểu Đồ 8: Kiểm Tra Tính Hợp Lệ Của Mô Hình Hồi Quy</a:t>
             </a:r>
           </a:p>
         </p:txBody>
@@ -10375,7 +9903,7 @@
           <a:lstStyle/>
           <a:p>
             <a:pPr>
-              <a:defRPr sz="1250" b="1">
+              <a:defRPr sz="1400" b="1">
                 <a:solidFill>
                   <a:srgbClr val="FFFFFF"/>
                 </a:solidFill>
@@ -10383,7 +9911,7 @@
               </a:defRPr>
             </a:pPr>
             <a:r>
-              <a:t>CHẨN ĐOÁN 4 GIẢ ĐỊNH (BĐ 08)</a:t>
+              <a:t>KIỂM ĐỊNH MÔ HÌNH (BĐ 08)</a:t>
             </a:r>
           </a:p>
         </p:txBody>
@@ -10411,7 +9939,7 @@
           <a:lstStyle/>
           <a:p>
             <a:pPr>
-              <a:defRPr sz="1350" b="1">
+              <a:defRPr sz="1400" b="1">
                 <a:solidFill>
                   <a:srgbClr val="D97706"/>
                 </a:solidFill>
@@ -10427,7 +9955,7 @@
               <a:spcBef>
                 <a:spcPts val="300"/>
               </a:spcBef>
-              <a:defRPr sz="1250">
+              <a:defRPr sz="1300">
                 <a:solidFill>
                   <a:srgbClr val="1E293B"/>
                 </a:solidFill>
@@ -10435,15 +9963,15 @@
               </a:defRPr>
             </a:pPr>
             <a:r>
-              <a:t>Kiểm tra tính hợp lệ của mô hình OLS qua 4 giả định cốt lõi: Tuyến tính (Linearity), Độc lập (Independence), Chuẩn hóa (Normality), và Phương sai đồng nhất (Equal variance).</a:t>
+              <a:t>Kiểm tra xem mô hình dự báo ban đầu có đáp ứng đầy đủ các điều kiện khoa học (tính chuẩn hóa và tính ổn định của sai số) hay không.</a:t>
             </a:r>
           </a:p>
           <a:p>
             <a:pPr>
               <a:spcBef>
-                <a:spcPts val="1000"/>
+                <a:spcPts val="1200"/>
               </a:spcBef>
-              <a:defRPr sz="1350" b="1">
+              <a:defRPr sz="1400" b="1">
                 <a:solidFill>
                   <a:srgbClr val="D97706"/>
                 </a:solidFill>
@@ -10451,7 +9979,7 @@
               </a:defRPr>
             </a:pPr>
             <a:r>
-              <a:t>Vi Phạm Giả Định Phương Sai (Heteroscedasticity):</a:t>
+              <a:t>Hiện Tượng Sai Số Phình To (Hình Phễu):</a:t>
             </a:r>
           </a:p>
           <a:p>
@@ -10459,7 +9987,7 @@
               <a:spcBef>
                 <a:spcPts val="300"/>
               </a:spcBef>
-              <a:defRPr sz="1250">
+              <a:defRPr sz="1300">
                 <a:solidFill>
                   <a:srgbClr val="1E293B"/>
                 </a:solidFill>
@@ -10467,15 +9995,15 @@
               </a:defRPr>
             </a:pPr>
             <a:r>
-              <a:t>Đồ thị Residuals vs Fitted phình to hình phễu ở nhóm giá cao; phương sai sai số không đồng nhất làm lệch khoảng tin cậy của OLS.</a:t>
+              <a:t>Đồ thị sai số phình to rõ rệt ở phân khúc nhà giá cao: Nhà càng đắt tiền thì mức độ phân tán sai số dự báo càng lớn.</a:t>
             </a:r>
           </a:p>
           <a:p>
             <a:pPr>
               <a:spcBef>
-                <a:spcPts val="1000"/>
+                <a:spcPts val="1200"/>
               </a:spcBef>
-              <a:defRPr sz="1350" b="1">
+              <a:defRPr sz="1400" b="1">
                 <a:solidFill>
                   <a:srgbClr val="D97706"/>
                 </a:solidFill>
@@ -10483,7 +10011,7 @@
               </a:defRPr>
             </a:pPr>
             <a:r>
-              <a:t>Độ Lệch Chuẩn Ở Q-Q Plot:</a:t>
+              <a:t>Ảnh Hưởng Của Nhóm Nhà Cao Cấp:</a:t>
             </a:r>
           </a:p>
           <a:p>
@@ -10491,7 +10019,7 @@
               <a:spcBef>
                 <a:spcPts val="300"/>
               </a:spcBef>
-              <a:defRPr sz="1250">
+              <a:defRPr sz="1300">
                 <a:solidFill>
                   <a:srgbClr val="1E293B"/>
                 </a:solidFill>
@@ -10499,15 +10027,15 @@
               </a:defRPr>
             </a:pPr>
             <a:r>
-              <a:t>Đường Q-Q uốn cong mạnh ở hai đầu đuôi (heavy tails), phản ánh sự hiện diện của các biệt thự hạng sang có mức giá cá biệt.</a:t>
+              <a:t>Sự xuất hiện của các biệt thự giá trị lớn kéo dải phân phối uốn cong ở hai đầu đuôi, làm méo mó các ước lượng ban đầu.</a:t>
             </a:r>
           </a:p>
           <a:p>
             <a:pPr>
               <a:spcBef>
-                <a:spcPts val="1000"/>
+                <a:spcPts val="1200"/>
               </a:spcBef>
-              <a:defRPr sz="1350" b="1">
+              <a:defRPr sz="1400" b="1">
                 <a:solidFill>
                   <a:srgbClr val="D97706"/>
                 </a:solidFill>
@@ -10515,7 +10043,7 @@
               </a:defRPr>
             </a:pPr>
             <a:r>
-              <a:t>Định Hướng Khắc Phục Triệt Để:</a:t>
+              <a:t>Định Hướng Khắc Phục:</a:t>
             </a:r>
           </a:p>
           <a:p>
@@ -10523,7 +10051,7 @@
               <a:spcBef>
                 <a:spcPts val="300"/>
               </a:spcBef>
-              <a:defRPr sz="1250">
+              <a:defRPr sz="1300">
                 <a:solidFill>
                   <a:srgbClr val="1E293B"/>
                 </a:solidFill>
@@ -10531,7 +10059,7 @@
               </a:defRPr>
             </a:pPr>
             <a:r>
-              <a:t>Minh chứng rõ ràng lý do tại sao phải chuyển sang mô hình phi tuyến GBDT hoặc áp dụng biến đổi Logarit toàn diện.</a:t>
+              <a:t>Minh chứng lý do bắt buộc phải áp dụng biến đổi thang đo Logarit để nắn chuẩn phân phối phần dư và ổn định sai số.</a:t>
             </a:r>
           </a:p>
         </p:txBody>
@@ -10787,7 +10315,7 @@
           <a:lstStyle/>
           <a:p>
             <a:pPr>
-              <a:defRPr sz="1350" b="1">
+              <a:defRPr sz="1400" b="1">
                 <a:solidFill>
                   <a:srgbClr val="FFFFFF"/>
                 </a:solidFill>
@@ -10831,7 +10359,7 @@
               </a:defRPr>
             </a:pPr>
             <a:r>
-              <a:t>🎯 GIẢI MÃ TÍNH PHI TUYẾN</a:t>
+              <a:t>🎯 PHÂN TÍCH HỒI QUY (TUẦN 10)</a:t>
             </a:r>
           </a:p>
           <a:p>
@@ -10839,7 +10367,7 @@
               <a:spcBef>
                 <a:spcPts val="1400"/>
               </a:spcBef>
-              <a:defRPr sz="1300" b="1">
+              <a:defRPr sz="1350" b="1">
                 <a:solidFill>
                   <a:srgbClr val="1A365D"/>
                 </a:solidFill>
@@ -10847,7 +10375,7 @@
               </a:defRPr>
             </a:pPr>
             <a:r>
-              <a:t>• Thực trạng thị trường:</a:t>
+              <a:t>• Vấn đề thực tế:</a:t>
             </a:r>
           </a:p>
           <a:p>
@@ -10855,7 +10383,7 @@
               <a:spcBef>
                 <a:spcPts val="300"/>
               </a:spcBef>
-              <a:defRPr sz="1250">
+              <a:defRPr sz="1300">
                 <a:solidFill>
                   <a:srgbClr val="1E293B"/>
                 </a:solidFill>
@@ -10863,7 +10391,7 @@
               </a:defRPr>
             </a:pPr>
             <a:r>
-              <a:t>Thị trường BĐS Hà Nội biến động mạnh, chênh lệch giữa các quận lên tới 10 lần.</a:t>
+              <a:t>Thị trường BĐS Hà Nội biến động mạnh, mức giá giữa các khu vực có sự phân hóa sâu sắc.</a:t>
             </a:r>
           </a:p>
           <a:p>
@@ -10871,7 +10399,7 @@
               <a:spcBef>
                 <a:spcPts val="1400"/>
               </a:spcBef>
-              <a:defRPr sz="1300" b="1">
+              <a:defRPr sz="1350" b="1">
                 <a:solidFill>
                   <a:srgbClr val="1A365D"/>
                 </a:solidFill>
@@ -10879,7 +10407,7 @@
               </a:defRPr>
             </a:pPr>
             <a:r>
-              <a:t>• Mục tiêu kỹ thuật:</a:t>
+              <a:t>• Phương pháp tiếp cận:</a:t>
             </a:r>
           </a:p>
           <a:p>
@@ -10887,7 +10415,7 @@
               <a:spcBef>
                 <a:spcPts val="300"/>
               </a:spcBef>
-              <a:defRPr sz="1250">
+              <a:defRPr sz="1300">
                 <a:solidFill>
                   <a:srgbClr val="1E293B"/>
                 </a:solidFill>
@@ -10895,7 +10423,7 @@
               </a:defRPr>
             </a:pPr>
             <a:r>
-              <a:t>Xây dựng thuật toán Machine Learning (GBDT, Random Forest) dự báo đơn giá m² chính xác.</a:t>
+              <a:t>Xây dựng phương trình Hồi quy tuyến tính đa biến (OLS) kết hợp điều chuẩn (Ridge, Lasso) và biến đổi Logarit.</a:t>
             </a:r>
           </a:p>
           <a:p>
@@ -10903,7 +10431,7 @@
               <a:spcBef>
                 <a:spcPts val="1400"/>
               </a:spcBef>
-              <a:defRPr sz="1300" b="1">
+              <a:defRPr sz="1350" b="1">
                 <a:solidFill>
                   <a:srgbClr val="1A365D"/>
                 </a:solidFill>
@@ -10911,7 +10439,7 @@
               </a:defRPr>
             </a:pPr>
             <a:r>
-              <a:t>• Chỉ số kỳ vọng:</a:t>
+              <a:t>• Kết quả kỳ vọng:</a:t>
             </a:r>
           </a:p>
           <a:p>
@@ -10919,7 +10447,7 @@
               <a:spcBef>
                 <a:spcPts val="300"/>
               </a:spcBef>
-              <a:defRPr sz="1250">
+              <a:defRPr sz="1300">
                 <a:solidFill>
                   <a:srgbClr val="1E293B"/>
                 </a:solidFill>
@@ -10927,7 +10455,7 @@
               </a:defRPr>
             </a:pPr>
             <a:r>
-              <a:t>Đạt sai số MAE &lt; 28 triệu/m² và hệ số xác định R² &gt; 0.40 trên tập kiểm thử độc lập.</a:t>
+              <a:t>Tối ưu hóa sai số dự báo MAE, giải thích định lượng mức độ đóng góp của từng yếu tố đến đơn giá m².</a:t>
             </a:r>
           </a:p>
         </p:txBody>
@@ -11043,7 +10571,7 @@
           <a:lstStyle/>
           <a:p>
             <a:pPr>
-              <a:defRPr sz="1350" b="1">
+              <a:defRPr sz="1400" b="1">
                 <a:solidFill>
                   <a:srgbClr val="FFFFFF"/>
                 </a:solidFill>
@@ -11095,7 +10623,7 @@
               <a:spcBef>
                 <a:spcPts val="1400"/>
               </a:spcBef>
-              <a:defRPr sz="1300" b="1">
+              <a:defRPr sz="1350" b="1">
                 <a:solidFill>
                   <a:srgbClr val="1A365D"/>
                 </a:solidFill>
@@ -11103,7 +10631,7 @@
               </a:defRPr>
             </a:pPr>
             <a:r>
-              <a:t>• Thực trạng tài chính:</a:t>
+              <a:t>• Vấn đề thực tế:</a:t>
             </a:r>
           </a:p>
           <a:p>
@@ -11111,7 +10639,7 @@
               <a:spcBef>
                 <a:spcPts val="300"/>
               </a:spcBef>
-              <a:defRPr sz="1250">
+              <a:defRPr sz="1300">
                 <a:solidFill>
                   <a:srgbClr val="1E293B"/>
                 </a:solidFill>
@@ -11119,7 +10647,7 @@
               </a:defRPr>
             </a:pPr>
             <a:r>
-              <a:t>Ngân hàng và nhà đầu tư đối mặt rủi ro nợ xấu khi định giá tài sản sai lệch.</a:t>
+              <a:t>Định giá sai lệch gây rủi ro nợ xấu lớn cho ngân hàng và tổ chức tài chính khi duyệt hồ sơ thế chấp.</a:t>
             </a:r>
           </a:p>
           <a:p>
@@ -11127,7 +10655,7 @@
               <a:spcBef>
                 <a:spcPts val="1400"/>
               </a:spcBef>
-              <a:defRPr sz="1300" b="1">
+              <a:defRPr sz="1350" b="1">
                 <a:solidFill>
                   <a:srgbClr val="1A365D"/>
                 </a:solidFill>
@@ -11135,7 +10663,7 @@
               </a:defRPr>
             </a:pPr>
             <a:r>
-              <a:t>• Mục tiêu kỹ thuật:</a:t>
+              <a:t>• Phương pháp tiếp cận:</a:t>
             </a:r>
           </a:p>
           <a:p>
@@ -11143,7 +10671,7 @@
               <a:spcBef>
                 <a:spcPts val="300"/>
               </a:spcBef>
-              <a:defRPr sz="1250">
+              <a:defRPr sz="1300">
                 <a:solidFill>
                   <a:srgbClr val="1E293B"/>
                 </a:solidFill>
@@ -11151,7 +10679,7 @@
               </a:defRPr>
             </a:pPr>
             <a:r>
-              <a:t>Thống kê suy luận (Welch's T-Test, ANOVA) và khoảng tin cậy 95% Bootstrap.</a:t>
+              <a:t>Ứng dụng phương pháp thống kê suy luận (Welch's t-test, Bootstrap CI) để ước lượng dải giá an toàn.</a:t>
             </a:r>
           </a:p>
           <a:p>
@@ -11159,7 +10687,7 @@
               <a:spcBef>
                 <a:spcPts val="1400"/>
               </a:spcBef>
-              <a:defRPr sz="1300" b="1">
+              <a:defRPr sz="1350" b="1">
                 <a:solidFill>
                   <a:srgbClr val="1A365D"/>
                 </a:solidFill>
@@ -11167,7 +10695,7 @@
               </a:defRPr>
             </a:pPr>
             <a:r>
-              <a:t>• Chỉ số kỳ vọng:</a:t>
+              <a:t>• Kết quả kỳ vọng:</a:t>
             </a:r>
           </a:p>
           <a:p>
@@ -11175,7 +10703,7 @@
               <a:spcBef>
                 <a:spcPts val="300"/>
               </a:spcBef>
-              <a:defRPr sz="1250">
+              <a:defRPr sz="1300">
                 <a:solidFill>
                   <a:srgbClr val="1E293B"/>
                 </a:solidFill>
@@ -11183,7 +10711,7 @@
               </a:defRPr>
             </a:pPr>
             <a:r>
-              <a:t>Xác lập biên độ định giá an toàn (Lower-Upper Bound) cho 30 Quận/Huyện.</a:t>
+              <a:t>Cung cấp ngưỡng định giá an toàn, hạn chế tối đa rủi ro giải ngân vượt giá trị thực của tài sản.</a:t>
             </a:r>
           </a:p>
         </p:txBody>
@@ -11299,7 +10827,7 @@
           <a:lstStyle/>
           <a:p>
             <a:pPr>
-              <a:defRPr sz="1350" b="1">
+              <a:defRPr sz="1400" b="1">
                 <a:solidFill>
                   <a:srgbClr val="FFFFFF"/>
                 </a:solidFill>
@@ -11343,7 +10871,7 @@
               </a:defRPr>
             </a:pPr>
             <a:r>
-              <a:t>🎯 PHÂN KHÚC &amp; QUẬN SONG SINH</a:t>
+              <a:t>🎯 PHÂN TẦNG &amp; TÀI SẢN THAY THẾ</a:t>
             </a:r>
           </a:p>
           <a:p>
@@ -11351,7 +10879,7 @@
               <a:spcBef>
                 <a:spcPts val="1400"/>
               </a:spcBef>
-              <a:defRPr sz="1300" b="1">
+              <a:defRPr sz="1350" b="1">
                 <a:solidFill>
                   <a:srgbClr val="1A365D"/>
                 </a:solidFill>
@@ -11359,7 +10887,7 @@
               </a:defRPr>
             </a:pPr>
             <a:r>
-              <a:t>• Thực trạng đầu tư:</a:t>
+              <a:t>• Vấn đề thực tế:</a:t>
             </a:r>
           </a:p>
           <a:p>
@@ -11367,7 +10895,7 @@
               <a:spcBef>
                 <a:spcPts val="300"/>
               </a:spcBef>
-              <a:defRPr sz="1250">
+              <a:defRPr sz="1300">
                 <a:solidFill>
                   <a:srgbClr val="1E293B"/>
                 </a:solidFill>
@@ -11375,7 +10903,7 @@
               </a:defRPr>
             </a:pPr>
             <a:r>
-              <a:t>Nhà đầu tư khó nhận diện phân khúc giá và các khu vực có tỷ suất sinh lời tương đương.</a:t>
+              <a:t>Nhà đầu tư gặp khó khăn trong việc nhận diện các khu vực có mức giá và tiềm năng tương đương để phân bổ vốn.</a:t>
             </a:r>
           </a:p>
           <a:p>
@@ -11383,7 +10911,7 @@
               <a:spcBef>
                 <a:spcPts val="1400"/>
               </a:spcBef>
-              <a:defRPr sz="1300" b="1">
+              <a:defRPr sz="1350" b="1">
                 <a:solidFill>
                   <a:srgbClr val="1A365D"/>
                 </a:solidFill>
@@ -11391,7 +10919,7 @@
               </a:defRPr>
             </a:pPr>
             <a:r>
-              <a:t>• Mục tiêu kỹ thuật:</a:t>
+              <a:t>• Phương pháp tiếp cận:</a:t>
             </a:r>
           </a:p>
           <a:p>
@@ -11399,7 +10927,7 @@
               <a:spcBef>
                 <a:spcPts val="300"/>
               </a:spcBef>
-              <a:defRPr sz="1250">
+              <a:defRPr sz="1300">
                 <a:solidFill>
                   <a:srgbClr val="1E293B"/>
                 </a:solidFill>
@@ -11407,7 +10935,7 @@
               </a:defRPr>
             </a:pPr>
             <a:r>
-              <a:t>Phân tích phương sai ANOVA &amp; Tukey HSD tìm kiếm 9 cặp quận tương đồng giá (Substitute Assets).</a:t>
+              <a:t>Phân tích phương sai One-Way ANOVA &amp; đối sánh từng cặp Tukey HSD để tìm kiếm các quận có mức giá đồng nhất.</a:t>
             </a:r>
           </a:p>
           <a:p>
@@ -11415,7 +10943,7 @@
               <a:spcBef>
                 <a:spcPts val="1400"/>
               </a:spcBef>
-              <a:defRPr sz="1300" b="1">
+              <a:defRPr sz="1350" b="1">
                 <a:solidFill>
                   <a:srgbClr val="1A365D"/>
                 </a:solidFill>
@@ -11423,7 +10951,7 @@
               </a:defRPr>
             </a:pPr>
             <a:r>
-              <a:t>• Chỉ số kỳ vọng:</a:t>
+              <a:t>• Kết quả kỳ vọng:</a:t>
             </a:r>
           </a:p>
           <a:p>
@@ -11431,7 +10959,7 @@
               <a:spcBef>
                 <a:spcPts val="300"/>
               </a:spcBef>
-              <a:defRPr sz="1250">
+              <a:defRPr sz="1300">
                 <a:solidFill>
                   <a:srgbClr val="1E293B"/>
                 </a:solidFill>
@@ -11439,7 +10967,7 @@
               </a:defRPr>
             </a:pPr>
             <a:r>
-              <a:t>Xác lập bản đồ phân khúc giá 30 Quận/Huyện phục vụ chiến lược dịch chuyển dòng vốn đầu tư.</a:t>
+              <a:t>Xác lập bản đồ tài sản thay thế, mở rộng cơ hội đầu tư và tối ưu hóa danh mục tài sản.</a:t>
             </a:r>
           </a:p>
         </p:txBody>
@@ -11579,7 +11107,7 @@
               </a:defRPr>
             </a:pPr>
             <a:r>
-              <a:t>So Sánh Hiệu Quả Trước &amp; Sau Khi Biến Đổi Logarit</a:t>
+              <a:t>So Sánh Hiệu Quả Trước &amp; Sau Khi Biến Đổi Thang Đo Logarit</a:t>
             </a:r>
           </a:p>
         </p:txBody>
@@ -11695,7 +11223,7 @@
           <a:lstStyle/>
           <a:p>
             <a:pPr>
-              <a:defRPr sz="1250" b="1">
+              <a:defRPr sz="1400" b="1">
                 <a:solidFill>
                   <a:srgbClr val="FFFFFF"/>
                 </a:solidFill>
@@ -11739,7 +11267,7 @@
               </a:defRPr>
             </a:pPr>
             <a:r>
-              <a:t>• Phân phối lệch phải cực nặng:</a:t>
+              <a:t>• Phân phối sai số bị kéo lệch:</a:t>
             </a:r>
           </a:p>
           <a:p>
@@ -11747,7 +11275,7 @@
               <a:spcBef>
                 <a:spcPts val="300"/>
               </a:spcBef>
-              <a:defRPr sz="1250">
+              <a:defRPr sz="1300">
                 <a:solidFill>
                   <a:srgbClr val="1E293B"/>
                 </a:solidFill>
@@ -11755,7 +11283,7 @@
               </a:defRPr>
             </a:pPr>
             <a:r>
-              <a:t>Độ lệch Skewness = 3.84; hàm mục tiêu bị kéo lệch bởi nhóm BĐS cao cấp.</a:t>
+              <a:t>Sai số dự báo bị lệch nhiều về phía các căn nhà đắt tiền, phân phối không cân xứng.</a:t>
             </a:r>
           </a:p>
           <a:p>
@@ -11771,7 +11299,7 @@
               </a:defRPr>
             </a:pPr>
             <a:r>
-              <a:t>• Hiệu năng mô hình tuyến tính yếu:</a:t>
+              <a:t>• Độ phân tán sai số không đồng đều:</a:t>
             </a:r>
           </a:p>
           <a:p>
@@ -11779,7 +11307,7 @@
               <a:spcBef>
                 <a:spcPts val="300"/>
               </a:spcBef>
-              <a:defRPr sz="1250">
+              <a:defRPr sz="1300">
                 <a:solidFill>
                   <a:srgbClr val="1E293B"/>
                 </a:solidFill>
@@ -11787,7 +11315,7 @@
               </a:defRPr>
             </a:pPr>
             <a:r>
-              <a:t>R² dừng lại ở 0.382; sai số RMSE lên tới 38.1 triệu/m² do nhạy cảm với ngoại lệ.</a:t>
+              <a:t>Nhà giá rẻ có sai số nhỏ, nhưng nhà giá cao có sai số tăng vọt (hiện tượng hình phễu).</a:t>
             </a:r>
           </a:p>
           <a:p>
@@ -11803,7 +11331,7 @@
               </a:defRPr>
             </a:pPr>
             <a:r>
-              <a:t>• Dư sai vi phạm nặng giả định LINE:</a:t>
+              <a:t>• Sai số trung bình còn lớn:</a:t>
             </a:r>
           </a:p>
           <a:p>
@@ -11811,7 +11339,7 @@
               <a:spcBef>
                 <a:spcPts val="300"/>
               </a:spcBef>
-              <a:defRPr sz="1250">
+              <a:defRPr sz="1300">
                 <a:solidFill>
                   <a:srgbClr val="1E293B"/>
                 </a:solidFill>
@@ -11819,7 +11347,7 @@
               </a:defRPr>
             </a:pPr>
             <a:r>
-              <a:t>Biểu đồ phần dư có hiện tượng phương sai thay đổi rõ nét, làm giảm độ tin cậy khi suy luận thống kê.</a:t>
+              <a:t>Sai số bình quân trên tập kiểm thử ở mức 28.5 triệu/m² do chịu ảnh hưởng của các ngoại lai giá cao.</a:t>
             </a:r>
           </a:p>
           <a:p>
@@ -11835,7 +11363,7 @@
               </a:defRPr>
             </a:pPr>
             <a:r>
-              <a:t>• Khó khăn khi tối ưu hóa Gradient:</a:t>
+              <a:t>• Khả năng khái quát hóa hạn chế:</a:t>
             </a:r>
           </a:p>
           <a:p>
@@ -11843,7 +11371,7 @@
               <a:spcBef>
                 <a:spcPts val="300"/>
               </a:spcBef>
-              <a:defRPr sz="1250">
+              <a:defRPr sz="1300">
                 <a:solidFill>
                   <a:srgbClr val="1E293B"/>
                 </a:solidFill>
@@ -11851,7 +11379,7 @@
               </a:defRPr>
             </a:pPr>
             <a:r>
-              <a:t>Thuật toán học máy hội tụ chậm và dễ bị kẹt tại các cực tiểu cục bộ do dải giá trị biến thiên quá rộng.</a:t>
+              <a:t>Các giả định cơ bản của mô hình tuyến tính bị vi phạm, làm giảm độ tin cậy khi dự báo.</a:t>
             </a:r>
           </a:p>
         </p:txBody>
@@ -11967,7 +11495,7 @@
           <a:lstStyle/>
           <a:p>
             <a:pPr>
-              <a:defRPr sz="1250" b="1">
+              <a:defRPr sz="1400" b="1">
                 <a:solidFill>
                   <a:srgbClr val="FFFFFF"/>
                 </a:solidFill>
@@ -11975,7 +11503,7 @@
               </a:defRPr>
             </a:pPr>
             <a:r>
-              <a:t>SAU BIẾN ĐỔI LOGARIT (LOG-TRANSFORMED)</a:t>
+              <a:t>SAU BIẾN ĐỔI LOGARIT (NẮN CHUẨN DỮ LIỆU)</a:t>
             </a:r>
           </a:p>
         </p:txBody>
@@ -12011,7 +11539,7 @@
               </a:defRPr>
             </a:pPr>
             <a:r>
-              <a:t>• Phân phối tiệm cận chuẩn Gauss lý tưởng:</a:t>
+              <a:t>• Phân phối sai số đối xứng chuẩn mực:</a:t>
             </a:r>
           </a:p>
           <a:p>
@@ -12019,7 +11547,7 @@
               <a:spcBef>
                 <a:spcPts val="300"/>
               </a:spcBef>
-              <a:defRPr sz="1250">
+              <a:defRPr sz="1300">
                 <a:solidFill>
                   <a:srgbClr val="FFFFFF"/>
                 </a:solidFill>
@@ -12027,7 +11555,7 @@
               </a:defRPr>
             </a:pPr>
             <a:r>
-              <a:t>Độ lệch Skewness giảm sâu xuống 0.18, đối xứng hoàn hảo quanh trung vị.</a:t>
+              <a:t>Sai số trở nên cân bằng hoàn hảo quanh mức 0, khắc phục triệt để hiện tượng lệch đuôi.</a:t>
             </a:r>
           </a:p>
           <a:p>
@@ -12043,7 +11571,7 @@
               </a:defRPr>
             </a:pPr>
             <a:r>
-              <a:t>• Hiệu năng mô hình tăng vọt (+15.4%):</a:t>
+              <a:t>• Độ phân tán sai số ổn định:</a:t>
             </a:r>
           </a:p>
           <a:p>
@@ -12051,7 +11579,7 @@
               <a:spcBef>
                 <a:spcPts val="300"/>
               </a:spcBef>
-              <a:defRPr sz="1250">
+              <a:defRPr sz="1300">
                 <a:solidFill>
                   <a:srgbClr val="FFFFFF"/>
                 </a:solidFill>
@@ -12059,7 +11587,7 @@
               </a:defRPr>
             </a:pPr>
             <a:r>
-              <a:t>R² tăng từ 0.382 lên 0.441; sai số phần trăm trung bình MAPE giảm về mức 12.8%.</a:t>
+              <a:t>Thu hẹp khoảng cách sai số giữa nhà bình dân và nhà cao cấp, triệt tiêu hiện tượng phình to.</a:t>
             </a:r>
           </a:p>
           <a:p>
@@ -12075,7 +11603,7 @@
               </a:defRPr>
             </a:pPr>
             <a:r>
-              <a:t>• Ổn định phương sai dư sai (Homoscedasticity):</a:t>
+              <a:t>• Sai số trung bình giảm xuống 27.0 tr/m²:</a:t>
             </a:r>
           </a:p>
           <a:p>
@@ -12083,7 +11611,7 @@
               <a:spcBef>
                 <a:spcPts val="300"/>
               </a:spcBef>
-              <a:defRPr sz="1250">
+              <a:defRPr sz="1300">
                 <a:solidFill>
                   <a:srgbClr val="FFFFFF"/>
                 </a:solidFill>
@@ -12091,7 +11619,7 @@
               </a:defRPr>
             </a:pPr>
             <a:r>
-              <a:t>Sai số phân bổ đồng đều trên toàn bộ các phân khúc từ nhà giá rẻ đến biệt thự cao cấp.</a:t>
+              <a:t>Giảm bớt trọng số phạt quá mức cho các căn nhà đắt tiền, tối ưu hóa độ chính xác.</a:t>
             </a:r>
           </a:p>
           <a:p>
@@ -12107,7 +11635,7 @@
               </a:defRPr>
             </a:pPr>
             <a:r>
-              <a:t>• Độ trễ tối ưu hóa giảm mạnh:</a:t>
+              <a:t>• Hệ số phản ánh mức thay đổi tương đối (%):</a:t>
             </a:r>
           </a:p>
           <a:p>
@@ -12115,7 +11643,7 @@
               <a:spcBef>
                 <a:spcPts val="300"/>
               </a:spcBef>
-              <a:defRPr sz="1250">
+              <a:defRPr sz="1300">
                 <a:solidFill>
                   <a:srgbClr val="FFFFFF"/>
                 </a:solidFill>
@@ -12123,7 +11651,7 @@
               </a:defRPr>
             </a:pPr>
             <a:r>
-              <a:t>Các thuật toán Gradient Descent hội tụ nhanh gấp 2 lần, gradient ổn định không bị hiện tượng bùng nổ.</a:t>
+              <a:t>Hỗ trợ diễn giải kinh tế mạch lạc: Nhà nội đô có mức đơn giá cao hơn khoảng 40% so với ngoại thành.</a:t>
             </a:r>
           </a:p>
         </p:txBody>
@@ -12263,7 +11791,7 @@
               </a:defRPr>
             </a:pPr>
             <a:r>
-              <a:t>Biểu Đồ 9: Kiểm Soát Quá Khớp Với Regularization (Lasso L1 vs Ridge L2)</a:t>
+              <a:t>Biểu Đồ 9: Kiểm Soát Quá Khớp &amp; Tự Động Chọn Lọc Đặc Trưng</a:t>
             </a:r>
           </a:p>
         </p:txBody>
@@ -12391,7 +11919,7 @@
         <p:spPr>
           <a:xfrm>
             <a:off x="7726680" y="1234440"/>
-            <a:ext cx="3733495" cy="438912"/>
+            <a:ext cx="3733495" cy="603504"/>
           </a:xfrm>
           <a:prstGeom prst="rect">
             <a:avLst/>
@@ -12434,7 +11962,7 @@
         <p:spPr>
           <a:xfrm>
             <a:off x="7891272" y="1271016"/>
-            <a:ext cx="3404311" cy="365760"/>
+            <a:ext cx="3404311" cy="530352"/>
           </a:xfrm>
           <a:prstGeom prst="rect">
             <a:avLst/>
@@ -12448,7 +11976,7 @@
           <a:lstStyle/>
           <a:p>
             <a:pPr>
-              <a:defRPr sz="1350" b="1">
+              <a:defRPr sz="1400" b="1">
                 <a:solidFill>
                   <a:srgbClr val="FFFFFF"/>
                 </a:solidFill>
@@ -12456,7 +11984,7 @@
               </a:defRPr>
             </a:pPr>
             <a:r>
-              <a:t>REGULARIZATION (BĐ 09)</a:t>
+              <a:t>ĐIỀU CHUẨN MÔ HÌNH (BĐ 09)</a:t>
             </a:r>
           </a:p>
         </p:txBody>
@@ -12469,8 +11997,8 @@
         </p:nvSpPr>
         <p:spPr>
           <a:xfrm>
-            <a:off x="7909560" y="1764792"/>
-            <a:ext cx="3367735" cy="4544568"/>
+            <a:off x="7909560" y="1929384"/>
+            <a:ext cx="3367735" cy="4379976"/>
           </a:xfrm>
           <a:prstGeom prst="rect">
             <a:avLst/>
@@ -12484,7 +12012,7 @@
           <a:lstStyle/>
           <a:p>
             <a:pPr>
-              <a:defRPr sz="1350" b="1">
+              <a:defRPr sz="1400" b="1">
                 <a:solidFill>
                   <a:srgbClr val="D97706"/>
                 </a:solidFill>
@@ -12500,7 +12028,7 @@
               <a:spcBef>
                 <a:spcPts val="300"/>
               </a:spcBef>
-              <a:defRPr sz="1250">
+              <a:defRPr sz="1300">
                 <a:solidFill>
                   <a:srgbClr val="1E293B"/>
                 </a:solidFill>
@@ -12508,15 +12036,15 @@
               </a:defRPr>
             </a:pPr>
             <a:r>
-              <a:t>Quan sát đường cong thu hẹp hệ số (Shrinkage Path) khi tham số phạt alpha tăng dần từ 0.001 đến 100 trên hai kỹ thuật chuẩn hóa.</a:t>
+              <a:t>So sánh cơ chế kiểm soát hiện tượng các đặc tính phụ thuộc lẫn nhau, giúp mô hình hoạt động ổn định và không bị quá khớp dữ liệu.</a:t>
             </a:r>
           </a:p>
           <a:p>
             <a:pPr>
               <a:spcBef>
-                <a:spcPts val="1000"/>
+                <a:spcPts val="1200"/>
               </a:spcBef>
-              <a:defRPr sz="1350" b="1">
+              <a:defRPr sz="1400" b="1">
                 <a:solidFill>
                   <a:srgbClr val="D97706"/>
                 </a:solidFill>
@@ -12524,7 +12052,7 @@
               </a:defRPr>
             </a:pPr>
             <a:r>
-              <a:t>🎯 Lasso (L1 Penalty) - Tự Động Lựa Chọn Biến:</a:t>
+              <a:t>🎯 Cơ Chế Lasso - Tự Động Loại Bỏ Biến Dư Thừa:</a:t>
             </a:r>
           </a:p>
           <a:p>
@@ -12532,7 +12060,7 @@
               <a:spcBef>
                 <a:spcPts val="300"/>
               </a:spcBef>
-              <a:defRPr sz="1250">
+              <a:defRPr sz="1300">
                 <a:solidFill>
                   <a:srgbClr val="1E293B"/>
                 </a:solidFill>
@@ -12540,15 +12068,15 @@
               </a:defRPr>
             </a:pPr>
             <a:r>
-              <a:t>Triệt tiêu hoàn toàn các hệ số biến nhiễu về chính xác 0, giữ lại tập đặc trưng tinh gọn nhất cho mô hình.</a:t>
+              <a:t>Lasso tự động triệt tiêu tác động của các biến dư thừa (như Diện tích đất thô và Chiều sâu) về bằng 0, chỉ giữ lại các yếu tố cốt lõi nhất.</a:t>
             </a:r>
           </a:p>
           <a:p>
             <a:pPr>
               <a:spcBef>
-                <a:spcPts val="1000"/>
+                <a:spcPts val="1200"/>
               </a:spcBef>
-              <a:defRPr sz="1350" b="1">
+              <a:defRPr sz="1400" b="1">
                 <a:solidFill>
                   <a:srgbClr val="D97706"/>
                 </a:solidFill>
@@ -12556,7 +12084,7 @@
               </a:defRPr>
             </a:pPr>
             <a:r>
-              <a:t>🛡️ Ridge (L2 Penalty) - Khống Chế Đa Cộng Tuyến:</a:t>
+              <a:t>🛡️ Cơ Chế Ridge - Ổn Định Trọng Số Các Biến:</a:t>
             </a:r>
           </a:p>
           <a:p>
@@ -12564,7 +12092,7 @@
               <a:spcBef>
                 <a:spcPts val="300"/>
               </a:spcBef>
-              <a:defRPr sz="1250">
+              <a:defRPr sz="1300">
                 <a:solidFill>
                   <a:srgbClr val="1E293B"/>
                 </a:solidFill>
@@ -12572,15 +12100,15 @@
               </a:defRPr>
             </a:pPr>
             <a:r>
-              <a:t>Thu nhỏ đồng đều tất cả hệ số mà không triệt tiêu về 0, giúp mô hình ổn định khi 30 quận/huyện có tương quan nội bộ cao.</a:t>
+              <a:t>Ridge thu nhỏ đồng đều tác động của các biến có tương quan cao mà không loại bỏ biến, giúp mô hình ổn định trước biến động dữ liệu.</a:t>
             </a:r>
           </a:p>
           <a:p>
             <a:pPr>
               <a:spcBef>
-                <a:spcPts val="1000"/>
+                <a:spcPts val="1200"/>
               </a:spcBef>
-              <a:defRPr sz="1350" b="1">
+              <a:defRPr sz="1400" b="1">
                 <a:solidFill>
                   <a:srgbClr val="D97706"/>
                 </a:solidFill>
@@ -12588,7 +12116,7 @@
               </a:defRPr>
             </a:pPr>
             <a:r>
-              <a:t>Quyết Định Lựa Chọn Tối Ưu:</a:t>
+              <a:t>Ý Nghĩa Nghiệp Vụ Thực Tế:</a:t>
             </a:r>
           </a:p>
           <a:p>
@@ -12596,7 +12124,7 @@
               <a:spcBef>
                 <a:spcPts val="300"/>
               </a:spcBef>
-              <a:defRPr sz="1250">
+              <a:defRPr sz="1300">
                 <a:solidFill>
                   <a:srgbClr val="1E293B"/>
                 </a:solidFill>
@@ -12604,7 +12132,7 @@
               </a:defRPr>
             </a:pPr>
             <a:r>
-              <a:t>Áp dụng kết hợp ElasticNet hoặc sử dụng Ridge trong các bài toán yêu cầu bảo toàn toàn bộ danh sách 30 Quận/Huyện.</a:t>
+              <a:t>Khi mô hình đã có biến Tổng diện tích sàn và Mặt tiền, các biến diện tích thô trở nên dư thừa và được tự động gạt bỏ để tinh gọn phương trình.</a:t>
             </a:r>
           </a:p>
         </p:txBody>
@@ -12744,7 +12272,7 @@
               </a:defRPr>
             </a:pPr>
             <a:r>
-              <a:t>7 Kết Luận Thực Tiễn Cho Doanh Nghiệp &amp; Nhà Đầu Tư</a:t>
+              <a:t>Kết Luận Thực Tiễn Cho Doanh Nghiệp &amp; Nhà Đầu Tư</a:t>
             </a:r>
           </a:p>
         </p:txBody>
@@ -12860,7 +12388,7 @@
           <a:lstStyle/>
           <a:p>
             <a:pPr>
-              <a:defRPr sz="1250" b="1">
+              <a:defRPr sz="1350" b="1">
                 <a:solidFill>
                   <a:srgbClr val="FFFFFF"/>
                 </a:solidFill>
@@ -12868,7 +12396,7 @@
               </a:defRPr>
             </a:pPr>
             <a:r>
-              <a:t>TRỤ CỘT 1: ĐỊNH GIÁ &amp; GIAO DỊCH BĐS</a:t>
+              <a:t>TRỤ CỘT 1: ĐỊNH GIÁ VỚI PHÂN TÍCH HỒI QUY</a:t>
             </a:r>
           </a:p>
         </p:txBody>
@@ -12896,7 +12424,7 @@
           <a:lstStyle/>
           <a:p>
             <a:pPr>
-              <a:defRPr sz="1250" b="1">
+              <a:defRPr sz="1300" b="1">
                 <a:solidFill>
                   <a:srgbClr val="D97706"/>
                 </a:solidFill>
@@ -12904,16 +12432,16 @@
               </a:defRPr>
             </a:pPr>
             <a:r>
-              <a:t>• Tự động hóa định giá khách quan: </a:t>
-            </a:r>
-            <a:r>
-              <a:rPr sz="1200">
+              <a:t>• Mô hình Hồi quy Logarit tối ưu: </a:t>
+            </a:r>
+            <a:r>
+              <a:rPr sz="1250">
                 <a:solidFill>
                   <a:srgbClr val="1E293B"/>
                 </a:solidFill>
                 <a:latin typeface="Arial"/>
               </a:rPr>
-              <a:t>Áp dụng thuật toán GBDT đạt sai số MAE ~26 tr/m², giảm 8.4% sai số so với Linear.</a:t>
+              <a:t>Đạt sai số dự báo thấp nhất (27.0 triệu/m²), là công cụ định giá khách quan, khoa học.</a:t>
             </a:r>
           </a:p>
           <a:p>
@@ -12921,7 +12449,7 @@
               <a:spcBef>
                 <a:spcPts val="800"/>
               </a:spcBef>
-              <a:defRPr sz="1250" b="1">
+              <a:defRPr sz="1300" b="1">
                 <a:solidFill>
                   <a:srgbClr val="D97706"/>
                 </a:solidFill>
@@ -12929,16 +12457,16 @@
               </a:defRPr>
             </a:pPr>
             <a:r>
-              <a:t>• Độ chính xác vượt trội: </a:t>
-            </a:r>
-            <a:r>
-              <a:rPr sz="1200">
+              <a:t>• Độ tin cậy được kiểm chứng: </a:t>
+            </a:r>
+            <a:r>
+              <a:rPr sz="1250">
                 <a:solidFill>
                   <a:srgbClr val="1E293B"/>
                 </a:solidFill>
                 <a:latin typeface="Arial"/>
               </a:rPr>
-              <a:t>Sai số thực tế chỉ ~26 tr/m², tin cậy cao trên tập kiểm thử.</a:t>
+              <a:t>Mô hình ổn định trên 7.481 bản ghi kiểm thử, kiểm soát sai lệch giá hàng trăm triệu đồng.</a:t>
             </a:r>
           </a:p>
           <a:p>
@@ -12946,7 +12474,7 @@
               <a:spcBef>
                 <a:spcPts val="800"/>
               </a:spcBef>
-              <a:defRPr sz="1250" b="1">
+              <a:defRPr sz="1300" b="1">
                 <a:solidFill>
                   <a:srgbClr val="D97706"/>
                 </a:solidFill>
@@ -12954,16 +12482,16 @@
               </a:defRPr>
             </a:pPr>
             <a:r>
-              <a:t>• Bảo vệ quyền lợi người mua: </a:t>
-            </a:r>
-            <a:r>
-              <a:rPr sz="1200">
+              <a:t>• Bảo vệ người mua nhà: </a:t>
+            </a:r>
+            <a:r>
+              <a:rPr sz="1250">
                 <a:solidFill>
                   <a:srgbClr val="1E293B"/>
                 </a:solidFill>
                 <a:latin typeface="Arial"/>
               </a:rPr>
-              <a:t>Phát hiện ngay tin rao khống giá hoặc lệch mặt bằng khu vực.</a:t>
+              <a:t>Phát hiện ngay những tin rao khống giá hoặc lệch xa mặt bằng giao dịch thực tế của khu vực.</a:t>
             </a:r>
           </a:p>
         </p:txBody>
@@ -13079,7 +12607,7 @@
           <a:lstStyle/>
           <a:p>
             <a:pPr>
-              <a:defRPr sz="1250" b="1">
+              <a:defRPr sz="1350" b="1">
                 <a:solidFill>
                   <a:srgbClr val="FFFFFF"/>
                 </a:solidFill>
@@ -13115,7 +12643,7 @@
           <a:lstStyle/>
           <a:p>
             <a:pPr>
-              <a:defRPr sz="1250" b="1">
+              <a:defRPr sz="1300" b="1">
                 <a:solidFill>
                   <a:srgbClr val="D97706"/>
                 </a:solidFill>
@@ -13123,16 +12651,16 @@
               </a:defRPr>
             </a:pPr>
             <a:r>
-              <a:t>• Khai thác 9 cặp quận 'song sinh': </a:t>
-            </a:r>
-            <a:r>
-              <a:rPr sz="1200">
+              <a:t>• Khai thác các cặp quận tương đương: </a:t>
+            </a:r>
+            <a:r>
+              <a:rPr sz="1250">
                 <a:solidFill>
                   <a:srgbClr val="1E293B"/>
                 </a:solidFill>
                 <a:latin typeface="Arial"/>
               </a:rPr>
-              <a:t>Chuyển dịch dòng vốn sang quận lân cận có giá tương đồng.</a:t>
+              <a:t>Chuyển dịch dòng vốn sang quận lân cận có mặt bằng giá và tiềm năng tương đồng.</a:t>
             </a:r>
           </a:p>
           <a:p>
@@ -13140,7 +12668,7 @@
               <a:spcBef>
                 <a:spcPts val="800"/>
               </a:spcBef>
-              <a:defRPr sz="1250" b="1">
+              <a:defRPr sz="1300" b="1">
                 <a:solidFill>
                   <a:srgbClr val="D97706"/>
                 </a:solidFill>
@@ -13148,16 +12676,16 @@
               </a:defRPr>
             </a:pPr>
             <a:r>
-              <a:t>• Bắt đáy cơ hội tăng trưởng: </a:t>
-            </a:r>
-            <a:r>
-              <a:rPr sz="1200">
+              <a:t>• Nắm bắt cơ hội ven đô: </a:t>
+            </a:r>
+            <a:r>
+              <a:rPr sz="1250">
                 <a:solidFill>
                   <a:srgbClr val="1E293B"/>
                 </a:solidFill>
                 <a:latin typeface="Arial"/>
               </a:rPr>
-              <a:t>Tận dụng các khu vực ven đô có quy hoạch vành đai và metro.</a:t>
+              <a:t>Đón đầu các khu vực hưởng lợi từ quy hoạch đường vành đai và mạng lưới metro mở rộng.</a:t>
             </a:r>
           </a:p>
           <a:p>
@@ -13165,7 +12693,7 @@
               <a:spcBef>
                 <a:spcPts val="800"/>
               </a:spcBef>
-              <a:defRPr sz="1250" b="1">
+              <a:defRPr sz="1300" b="1">
                 <a:solidFill>
                   <a:srgbClr val="D97706"/>
                 </a:solidFill>
@@ -13173,16 +12701,16 @@
               </a:defRPr>
             </a:pPr>
             <a:r>
-              <a:t>• Tối ưu hóa lợi suất cho thuê: </a:t>
-            </a:r>
-            <a:r>
-              <a:rPr sz="1200">
+              <a:t>• Tối ưu giá trị thương mại: </a:t>
+            </a:r>
+            <a:r>
+              <a:rPr sz="1250">
                 <a:solidFill>
                   <a:srgbClr val="1E293B"/>
                 </a:solidFill>
                 <a:latin typeface="Arial"/>
               </a:rPr>
-              <a:t>Lựa chọn nhà mặt phố có thặng dư thương mại cao.</a:t>
+              <a:t>Ưu tiên lựa chọn bất động sản có mặt tiền từ 5m trở lên để tối đa hóa thanh khoản.</a:t>
             </a:r>
           </a:p>
         </p:txBody>
@@ -13298,7 +12826,7 @@
           <a:lstStyle/>
           <a:p>
             <a:pPr>
-              <a:defRPr sz="1250" b="1">
+              <a:defRPr sz="1350" b="1">
                 <a:solidFill>
                   <a:srgbClr val="FFFFFF"/>
                 </a:solidFill>
@@ -13334,7 +12862,7 @@
           <a:lstStyle/>
           <a:p>
             <a:pPr>
-              <a:defRPr sz="1250" b="1">
+              <a:defRPr sz="1300" b="1">
                 <a:solidFill>
                   <a:srgbClr val="D97706"/>
                 </a:solidFill>
@@ -13342,16 +12870,16 @@
               </a:defRPr>
             </a:pPr>
             <a:r>
-              <a:t>• Chốt chặn an toàn với Bootstrap: </a:t>
-            </a:r>
-            <a:r>
-              <a:rPr sz="1200">
+              <a:t>• Xác lập ngưỡng cho vay an toàn: </a:t>
+            </a:r>
+            <a:r>
+              <a:rPr sz="1250">
                 <a:solidFill>
                   <a:srgbClr val="1E293B"/>
                 </a:solidFill>
                 <a:latin typeface="Arial"/>
               </a:rPr>
-              <a:t>Áp dụng Lower Bound 95% làm ngưỡng giải ngân an toàn.</a:t>
+              <a:t>Sử dụng mức cận dưới của khoảng giá làm cơ sở phê duyệt hạn mức thế chấp an toàn.</a:t>
             </a:r>
           </a:p>
           <a:p>
@@ -13359,7 +12887,7 @@
               <a:spcBef>
                 <a:spcPts val="800"/>
               </a:spcBef>
-              <a:defRPr sz="1250" b="1">
+              <a:defRPr sz="1300" b="1">
                 <a:solidFill>
                   <a:srgbClr val="D97706"/>
                 </a:solidFill>
@@ -13367,16 +12895,16 @@
               </a:defRPr>
             </a:pPr>
             <a:r>
-              <a:t>• Giảm thiểu rủi ro nợ xấu: </a:t>
-            </a:r>
-            <a:r>
-              <a:rPr sz="1200">
+              <a:t>• Ngăn ngừa rủi ro nợ xấu: </a:t>
+            </a:r>
+            <a:r>
+              <a:rPr sz="1250">
                 <a:solidFill>
                   <a:srgbClr val="1E293B"/>
                 </a:solidFill>
                 <a:latin typeface="Arial"/>
               </a:rPr>
-              <a:t>Phát hiện hiện tượng thổi giá cục bộ của giới đầu cơ.</a:t>
+              <a:t>Nhận diện sớm các hiện tượng đầu cơ thổi giá cục bộ tại các khu vực đang sốt đất.</a:t>
             </a:r>
           </a:p>
           <a:p>
@@ -13384,7 +12912,7 @@
               <a:spcBef>
                 <a:spcPts val="800"/>
               </a:spcBef>
-              <a:defRPr sz="1250" b="1">
+              <a:defRPr sz="1300" b="1">
                 <a:solidFill>
                   <a:srgbClr val="D97706"/>
                 </a:solidFill>
@@ -13392,16 +12920,16 @@
               </a:defRPr>
             </a:pPr>
             <a:r>
-              <a:t>• Tự động hóa hồ sơ thế chấp: </a:t>
-            </a:r>
-            <a:r>
-              <a:rPr sz="1200">
+              <a:t>• Tự động hóa luồng phê duyệt: </a:t>
+            </a:r>
+            <a:r>
+              <a:rPr sz="1250">
                 <a:solidFill>
                   <a:srgbClr val="1E293B"/>
                 </a:solidFill>
                 <a:latin typeface="Arial"/>
               </a:rPr>
-              <a:t>Tích hợp API định giá vào luồng phê duyệt tín dụng tự động.</a:t>
+              <a:t>Tích hợp công cụ định giá tự động vào quy trình thẩm định hồ sơ tín dụng.</a:t>
             </a:r>
           </a:p>
         </p:txBody>
@@ -13517,7 +13045,7 @@
           <a:lstStyle/>
           <a:p>
             <a:pPr>
-              <a:defRPr sz="1250" b="1">
+              <a:defRPr sz="1350" b="1">
                 <a:solidFill>
                   <a:srgbClr val="FFFFFF"/>
                 </a:solidFill>
@@ -13553,7 +13081,7 @@
           <a:lstStyle/>
           <a:p>
             <a:pPr>
-              <a:defRPr sz="1250" b="1">
+              <a:defRPr sz="1300" b="1">
                 <a:solidFill>
                   <a:srgbClr val="D97706"/>
                 </a:solidFill>
@@ -13561,16 +13089,16 @@
               </a:defRPr>
             </a:pPr>
             <a:r>
-              <a:t>• Chuẩn hóa dữ liệu toàn diện: </a:t>
-            </a:r>
-            <a:r>
-              <a:rPr sz="1200">
+              <a:t>• Dữ liệu được chuẩn hóa cao: </a:t>
+            </a:r>
+            <a:r>
+              <a:rPr sz="1250">
                 <a:solidFill>
                   <a:srgbClr val="1E293B"/>
                 </a:solidFill>
                 <a:latin typeface="Arial"/>
               </a:rPr>
-              <a:t>Khắc phục triệt để tin rác, tin ảo, tin trùng lặp.</a:t>
+              <a:t>Phễu sàng lọc 4 tầng loại bỏ triệt để tin rác, tin ảo và tin trùng lặp.</a:t>
             </a:r>
           </a:p>
           <a:p>
@@ -13578,7 +13106,7 @@
               <a:spcBef>
                 <a:spcPts val="800"/>
               </a:spcBef>
-              <a:defRPr sz="1250" b="1">
+              <a:defRPr sz="1300" b="1">
                 <a:solidFill>
                   <a:srgbClr val="D97706"/>
                 </a:solidFill>
@@ -13589,13 +13117,13 @@
               <a:t>• Tuân thủ chuẩn mực đạo đức AI: </a:t>
             </a:r>
             <a:r>
-              <a:rPr sz="1200">
+              <a:rPr sz="1250">
                 <a:solidFill>
                   <a:srgbClr val="1E293B"/>
                 </a:solidFill>
                 <a:latin typeface="Arial"/>
               </a:rPr>
-              <a:t>Minh bạch thuật toán, bảo vệ tuyệt đối dữ liệu người dùng.</a:t>
+              <a:t>Minh bạch cách thức đưa ra mức giá, bảo vệ quyền riêng tư dữ liệu người dùng.</a:t>
             </a:r>
           </a:p>
           <a:p>
@@ -13603,7 +13131,7 @@
               <a:spcBef>
                 <a:spcPts val="800"/>
               </a:spcBef>
-              <a:defRPr sz="1250" b="1">
+              <a:defRPr sz="1300" b="1">
                 <a:solidFill>
                   <a:srgbClr val="D97706"/>
                 </a:solidFill>
@@ -13611,16 +13139,16 @@
               </a:defRPr>
             </a:pPr>
             <a:r>
-              <a:t>• Sẵn sàng cho sản phẩm thực tế: </a:t>
-            </a:r>
-            <a:r>
-              <a:rPr sz="1200">
+              <a:t>• Sẵn sàng ứng dụng thực tế: </a:t>
+            </a:r>
+            <a:r>
+              <a:rPr sz="1250">
                 <a:solidFill>
                   <a:srgbClr val="1E293B"/>
                 </a:solidFill>
                 <a:latin typeface="Arial"/>
               </a:rPr>
-              <a:t>Đóng gói pipeline hoàn chỉnh, sẵn sàng mở rộng quy mô toàn quốc.</a:t>
+              <a:t>Mô hình được đóng gói hoàn chỉnh, sẵn sàng tích hợp vào các hệ thống quản trị.</a:t>
             </a:r>
           </a:p>
         </p:txBody>
@@ -13876,7 +13404,7 @@
           <a:lstStyle/>
           <a:p>
             <a:pPr>
-              <a:defRPr sz="1250" b="1">
+              <a:defRPr sz="1400" b="1">
                 <a:solidFill>
                   <a:srgbClr val="FFFFFF"/>
                 </a:solidFill>
@@ -13884,7 +13412,7 @@
               </a:defRPr>
             </a:pPr>
             <a:r>
-              <a:t>3 MỤC TIÊU ĐỘT PHÁ TUẦN 11 - 12</a:t>
+              <a:t>3 MỤC TIÊU HOÀN THIỆN ĐỒ ÁN (TUẦN 11 - 12)</a:t>
             </a:r>
           </a:p>
         </p:txBody>
@@ -13912,7 +13440,7 @@
           <a:lstStyle/>
           <a:p>
             <a:pPr>
-              <a:defRPr sz="1350" b="1">
+              <a:defRPr sz="1400" b="1">
                 <a:solidFill>
                   <a:srgbClr val="D97706"/>
                 </a:solidFill>
@@ -13920,7 +13448,7 @@
               </a:defRPr>
             </a:pPr>
             <a:r>
-              <a:t>1. Tinh Chỉnh &amp; Mở Rộng Mô Hình (Tuần 11):</a:t>
+              <a:t>1. Mở rộng bài toán phân loại phân khúc giá (Tuần 11):</a:t>
             </a:r>
           </a:p>
           <a:p>
@@ -13928,7 +13456,7 @@
               <a:spcBef>
                 <a:spcPts val="400"/>
               </a:spcBef>
-              <a:defRPr sz="1250">
+              <a:defRPr sz="1300">
                 <a:solidFill>
                   <a:srgbClr val="1E293B"/>
                 </a:solidFill>
@@ -13936,7 +13464,7 @@
               </a:defRPr>
             </a:pPr>
             <a:r>
-              <a:t>Áp dụng Bayesian Optimization cho XGBoost/LightGBM và đánh giá Precision/Recall, PR-AUC cho bài toán phân loại phân khúc giá.</a:t>
+              <a:t>Ứng dụng Logistic Regression và các thuật toán phân loại cơ bản để phân loại bất động sản tự động vào 5 phân khúc giá; Đánh giá bằng ma trận nhầm lẫn và chỉ số F1-Score.</a:t>
             </a:r>
           </a:p>
           <a:p>
@@ -13944,7 +13472,7 @@
               <a:spcBef>
                 <a:spcPts val="1800"/>
               </a:spcBef>
-              <a:defRPr sz="1350" b="1">
+              <a:defRPr sz="1400" b="1">
                 <a:solidFill>
                   <a:srgbClr val="D97706"/>
                 </a:solidFill>
@@ -13952,7 +13480,7 @@
               </a:defRPr>
             </a:pPr>
             <a:r>
-              <a:t>2. Trí Tuệ Nhân Tạo Có Thể Giải Thích (SHAP XAI - Tuần 12):</a:t>
+              <a:t>2. Minh bạch hóa và giải thích mô hình (Tuần 12):</a:t>
             </a:r>
           </a:p>
           <a:p>
@@ -13960,7 +13488,7 @@
               <a:spcBef>
                 <a:spcPts val="400"/>
               </a:spcBef>
-              <a:defRPr sz="1250">
+              <a:defRPr sz="1300">
                 <a:solidFill>
                   <a:srgbClr val="1E293B"/>
                 </a:solidFill>
@@ -13968,7 +13496,7 @@
               </a:defRPr>
             </a:pPr>
             <a:r>
-              <a:t>Tích hợp thư viện SHAP (Shapley Additive exPlanations) để bóc tách chính xác lý do tại sao một căn nhà cụ thể được định giá tăng hoặc giảm.</a:t>
+              <a:t>Phân tích sâu hơn các hệ số hồi quy và tương tác giữa các thuộc tính để minh bạch hóa lý do đưa ra mức định giá cho từng căn nhà cụ thể.</a:t>
             </a:r>
           </a:p>
           <a:p>
@@ -13976,7 +13504,7 @@
               <a:spcBef>
                 <a:spcPts val="1800"/>
               </a:spcBef>
-              <a:defRPr sz="1350" b="1">
+              <a:defRPr sz="1400" b="1">
                 <a:solidFill>
                   <a:srgbClr val="D97706"/>
                 </a:solidFill>
@@ -13984,7 +13512,7 @@
               </a:defRPr>
             </a:pPr>
             <a:r>
-              <a:t>3. Chuẩn Hóa Quản Trị &amp; Đạo Đức Dữ Liệu (Tuần 12):</a:t>
+              <a:t>3. Chuẩn hóa hồ sơ dữ liệu &amp; Kiểm toán công bằng (Tuần 12):</a:t>
             </a:r>
           </a:p>
           <a:p>
@@ -13992,7 +13520,7 @@
               <a:spcBef>
                 <a:spcPts val="400"/>
               </a:spcBef>
-              <a:defRPr sz="1250">
+              <a:defRPr sz="1300">
                 <a:solidFill>
                   <a:srgbClr val="1E293B"/>
                 </a:solidFill>
@@ -14000,7 +13528,7 @@
               </a:defRPr>
             </a:pPr>
             <a:r>
-              <a:t>Xây dựng Datasheets for Datasets và Model Cards theo chuẩn Google PAIR &amp; Nghị định 13/2023/NĐ-CP, thiết lập cơ chế ẩn danh k-anonymity.</a:t>
+              <a:t>Xây dựng tài liệu hồ sơ dữ liệu và thẻ mô hình (Datasheet &amp; Model Card) theo chuẩn mực quốc tế; Đảm bảo mô hình không bị định kiến sai lệch giữa các khu vực địa lý.</a:t>
             </a:r>
           </a:p>
         </p:txBody>
@@ -14091,7 +13619,7 @@
               <a:spcBef>
                 <a:spcPts val="1600"/>
               </a:spcBef>
-              <a:defRPr sz="1400">
+              <a:defRPr sz="1450">
                 <a:solidFill>
                   <a:srgbClr val="FFFFFF"/>
                 </a:solidFill>
@@ -14239,7 +13767,7 @@
               </a:defRPr>
             </a:pPr>
             <a:r>
-              <a:t>Phễu Sàng Lọc &amp; Làm Sạch Dữ Liệu (33.456 ➔ 21.142 Bản Ghi)</a:t>
+              <a:t>Phễu Sàng Lọc &amp; Chuẩn Hóa Dữ Liệu (99.998 ➔ 37.402 Bản Ghi)</a:t>
             </a:r>
           </a:p>
         </p:txBody>
@@ -14286,7 +13814,7 @@
           <a:lstStyle/>
           <a:p>
             <a:pPr algn="ctr">
-              <a:defRPr sz="1100" b="1">
+              <a:defRPr sz="1150" b="1">
                 <a:solidFill>
                   <a:srgbClr val="D97706"/>
                 </a:solidFill>
@@ -14302,7 +13830,7 @@
               <a:spcBef>
                 <a:spcPts val="200"/>
               </a:spcBef>
-              <a:defRPr sz="2400" b="1">
+              <a:defRPr sz="2500" b="1">
                 <a:solidFill>
                   <a:srgbClr val="FFFFFF"/>
                 </a:solidFill>
@@ -14310,7 +13838,7 @@
               </a:defRPr>
             </a:pPr>
             <a:r>
-              <a:t>33.456</a:t>
+              <a:t>99.998</a:t>
             </a:r>
           </a:p>
           <a:p>
@@ -14318,7 +13846,7 @@
               <a:spcBef>
                 <a:spcPts val="200"/>
               </a:spcBef>
-              <a:defRPr sz="1100">
+              <a:defRPr sz="1150">
                 <a:solidFill>
                   <a:srgbClr val="E2E8F0"/>
                 </a:solidFill>
@@ -14326,7 +13854,7 @@
               </a:defRPr>
             </a:pPr>
             <a:r>
-              <a:t>100.0% • Thu thập đa nguồn</a:t>
+              <a:t>100.0% • Thu thập đa kênh</a:t>
             </a:r>
           </a:p>
         </p:txBody>
@@ -14373,7 +13901,7 @@
           <a:lstStyle/>
           <a:p>
             <a:pPr algn="ctr">
-              <a:defRPr sz="1100" b="1">
+              <a:defRPr sz="1150" b="1">
                 <a:solidFill>
                   <a:srgbClr val="D97706"/>
                 </a:solidFill>
@@ -14381,7 +13909,7 @@
               </a:defRPr>
             </a:pPr>
             <a:r>
-              <a:t>BƯỚC 2: LỌC MISSING</a:t>
+              <a:t>BƯỚC 2: CỬA SỔ 18 THÁNG</a:t>
             </a:r>
           </a:p>
           <a:p>
@@ -14389,7 +13917,7 @@
               <a:spcBef>
                 <a:spcPts val="200"/>
               </a:spcBef>
-              <a:defRPr sz="2400" b="1">
+              <a:defRPr sz="2500" b="1">
                 <a:solidFill>
                   <a:srgbClr val="FFFFFF"/>
                 </a:solidFill>
@@ -14397,7 +13925,7 @@
               </a:defRPr>
             </a:pPr>
             <a:r>
-              <a:t>29.478</a:t>
+              <a:t>38.505</a:t>
             </a:r>
           </a:p>
           <a:p>
@@ -14405,7 +13933,7 @@
               <a:spcBef>
                 <a:spcPts val="200"/>
               </a:spcBef>
-              <a:defRPr sz="1100">
+              <a:defRPr sz="1150">
                 <a:solidFill>
                   <a:srgbClr val="E2E8F0"/>
                 </a:solidFill>
@@ -14413,7 +13941,7 @@
               </a:defRPr>
             </a:pPr>
             <a:r>
-              <a:t>88.1% • Loại khuyết giá/diện tích</a:t>
+              <a:t>38.5% • Lọc giai đoạn 2025 - 2026</a:t>
             </a:r>
           </a:p>
         </p:txBody>
@@ -14460,7 +13988,7 @@
           <a:lstStyle/>
           <a:p>
             <a:pPr algn="ctr">
-              <a:defRPr sz="1100" b="1">
+              <a:defRPr sz="1150" b="1">
                 <a:solidFill>
                   <a:srgbClr val="D97706"/>
                 </a:solidFill>
@@ -14468,7 +13996,7 @@
               </a:defRPr>
             </a:pPr>
             <a:r>
-              <a:t>BƯỚC 3: XỬ LÝ OUTLIERS</a:t>
+              <a:t>BƯỚC 3: XÓA RÁC &amp; KHUYẾT</a:t>
             </a:r>
           </a:p>
           <a:p>
@@ -14476,7 +14004,7 @@
               <a:spcBef>
                 <a:spcPts val="200"/>
               </a:spcBef>
-              <a:defRPr sz="2400" b="1">
+              <a:defRPr sz="2500" b="1">
                 <a:solidFill>
                   <a:srgbClr val="FFFFFF"/>
                 </a:solidFill>
@@ -14484,7 +14012,7 @@
               </a:defRPr>
             </a:pPr>
             <a:r>
-              <a:t>25.500</a:t>
+              <a:t>37.630</a:t>
             </a:r>
           </a:p>
           <a:p>
@@ -14492,7 +14020,7 @@
               <a:spcBef>
                 <a:spcPts val="200"/>
               </a:spcBef>
-              <a:defRPr sz="1100">
+              <a:defRPr sz="1150">
                 <a:solidFill>
                   <a:srgbClr val="E2E8F0"/>
                 </a:solidFill>
@@ -14500,7 +14028,7 @@
               </a:defRPr>
             </a:pPr>
             <a:r>
-              <a:t>76.2% • Cắt tỉa IQR &amp; Z-score</a:t>
+              <a:t>37.6% • Loại giá 'Thỏa thuận' &amp; inf</a:t>
             </a:r>
           </a:p>
         </p:txBody>
@@ -14547,7 +14075,7 @@
           <a:lstStyle/>
           <a:p>
             <a:pPr algn="ctr">
-              <a:defRPr sz="1100" b="1">
+              <a:defRPr sz="1150" b="1">
                 <a:solidFill>
                   <a:srgbClr val="D97706"/>
                 </a:solidFill>
@@ -14563,7 +14091,7 @@
               <a:spcBef>
                 <a:spcPts val="200"/>
               </a:spcBef>
-              <a:defRPr sz="2400" b="1">
+              <a:defRPr sz="2500" b="1">
                 <a:solidFill>
                   <a:srgbClr val="FFFFFF"/>
                 </a:solidFill>
@@ -14571,7 +14099,7 @@
               </a:defRPr>
             </a:pPr>
             <a:r>
-              <a:t>21.142</a:t>
+              <a:t>37.402</a:t>
             </a:r>
           </a:p>
           <a:p>
@@ -14579,7 +14107,7 @@
               <a:spcBef>
                 <a:spcPts val="200"/>
               </a:spcBef>
-              <a:defRPr sz="1100">
+              <a:defRPr sz="1150">
                 <a:solidFill>
                   <a:srgbClr val="E2E8F0"/>
                 </a:solidFill>
@@ -14587,7 +14115,7 @@
               </a:defRPr>
             </a:pPr>
             <a:r>
-              <a:t>63.2% • Chuẩn hóa hoàn tất</a:t>
+              <a:t>37.4% • 38 đặc trưng chuẩn hóa</a:t>
             </a:r>
           </a:p>
         </p:txBody>
@@ -14611,10 +14139,10 @@
                 <a:tableStyleId>{5C22544A-7EE6-4342-B048-85BDC9FD1C3A}</a:tableStyleId>
               </a:tblPr>
               <a:tblGrid>
-                <a:gridCol w="2011680"/>
+                <a:gridCol w="2103120"/>
                 <a:gridCol w="1371600"/>
                 <a:gridCol w="1188720"/>
-                <a:gridCol w="6156655"/>
+                <a:gridCol w="6065215"/>
               </a:tblGrid>
               <a:tr h="713232">
                 <a:tc>
@@ -14623,7 +14151,7 @@
                     <a:lstStyle/>
                     <a:p>
                       <a:pPr algn="ctr">
-                        <a:defRPr b="1" sz="1300">
+                        <a:defRPr b="1" sz="1350">
                           <a:solidFill>
                             <a:srgbClr val="FFFFFF"/>
                           </a:solidFill>
@@ -14647,7 +14175,7 @@
                     <a:lstStyle/>
                     <a:p>
                       <a:pPr algn="ctr">
-                        <a:defRPr b="1" sz="1300">
+                        <a:defRPr b="1" sz="1350">
                           <a:solidFill>
                             <a:srgbClr val="FFFFFF"/>
                           </a:solidFill>
@@ -14655,7 +14183,7 @@
                         </a:defRPr>
                       </a:pPr>
                       <a:r>
-                        <a:t>Bản Ghi Loại</a:t>
+                        <a:t>Số Bản Ghi</a:t>
                       </a:r>
                     </a:p>
                   </a:txBody>
@@ -14671,7 +14199,7 @@
                     <a:lstStyle/>
                     <a:p>
                       <a:pPr algn="ctr">
-                        <a:defRPr b="1" sz="1300">
+                        <a:defRPr b="1" sz="1350">
                           <a:solidFill>
                             <a:srgbClr val="FFFFFF"/>
                           </a:solidFill>
@@ -14695,7 +14223,7 @@
                     <a:lstStyle/>
                     <a:p>
                       <a:pPr algn="ctr">
-                        <a:defRPr b="1" sz="1300">
+                        <a:defRPr b="1" sz="1350">
                           <a:solidFill>
                             <a:srgbClr val="FFFFFF"/>
                           </a:solidFill>
@@ -14703,7 +14231,7 @@
                         </a:defRPr>
                       </a:pPr>
                       <a:r>
-                        <a:t>Nguyên Nhân Thực Tế &amp; Tác Động Thuật Toán</a:t>
+                        <a:t>Cơ Sở Kỹ Thuật &amp; Nguyên Nhân Thực Tế</a:t>
                       </a:r>
                     </a:p>
                   </a:txBody>
@@ -14721,7 +14249,7 @@
                     <a:lstStyle/>
                     <a:p>
                       <a:pPr>
-                        <a:defRPr sz="1250">
+                        <a:defRPr sz="1300">
                           <a:solidFill>
                             <a:srgbClr val="1E293B"/>
                           </a:solidFill>
@@ -14729,7 +14257,7 @@
                         </a:defRPr>
                       </a:pPr>
                       <a:r>
-                        <a:t>Thiếu thông tin (Missing)</a:t>
+                        <a:t>Lọc chu kỳ 18 tháng</a:t>
                       </a:r>
                     </a:p>
                   </a:txBody>
@@ -14745,7 +14273,7 @@
                     <a:lstStyle/>
                     <a:p>
                       <a:pPr algn="ctr">
-                        <a:defRPr sz="1250" b="1">
+                        <a:defRPr sz="1300" b="1">
                           <a:solidFill>
                             <a:srgbClr val="1E293B"/>
                           </a:solidFill>
@@ -14753,7 +14281,7 @@
                         </a:defRPr>
                       </a:pPr>
                       <a:r>
-                        <a:t>3.978</a:t>
+                        <a:t>61.493</a:t>
                       </a:r>
                     </a:p>
                   </a:txBody>
@@ -14769,7 +14297,7 @@
                     <a:lstStyle/>
                     <a:p>
                       <a:pPr algn="ctr">
-                        <a:defRPr sz="1250" b="1">
+                        <a:defRPr sz="1300" b="1">
                           <a:solidFill>
                             <a:srgbClr val="1E293B"/>
                           </a:solidFill>
@@ -14777,7 +14305,7 @@
                         </a:defRPr>
                       </a:pPr>
                       <a:r>
-                        <a:t>11.9%</a:t>
+                        <a:t>61.5%</a:t>
                       </a:r>
                     </a:p>
                   </a:txBody>
@@ -14793,7 +14321,7 @@
                     <a:lstStyle/>
                     <a:p>
                       <a:pPr>
-                        <a:defRPr sz="1250">
+                        <a:defRPr sz="1300">
                           <a:solidFill>
                             <a:srgbClr val="1E293B"/>
                           </a:solidFill>
@@ -14801,7 +14329,7 @@
                         </a:defRPr>
                       </a:pPr>
                       <a:r>
-                        <a:t>Tin rao ghi 'Thỏa thuận', thiếu diện tích/giá -&gt; Buộc loại bỏ để tránh biến thiên giả.</a:t>
+                        <a:t>Loại bỏ tin cũ trước tháng 09/2024 để phản ánh đúng mặt bằng giá sau chu kỳ sốt đất 2024.</a:t>
                       </a:r>
                     </a:p>
                   </a:txBody>
@@ -14819,7 +14347,7 @@
                     <a:lstStyle/>
                     <a:p>
                       <a:pPr>
-                        <a:defRPr sz="1250">
+                        <a:defRPr sz="1300">
                           <a:solidFill>
                             <a:srgbClr val="1E293B"/>
                           </a:solidFill>
@@ -14827,7 +14355,7 @@
                         </a:defRPr>
                       </a:pPr>
                       <a:r>
-                        <a:t>Bất thường (Outliers)</a:t>
+                        <a:t>Khuyết mục tiêu</a:t>
                       </a:r>
                     </a:p>
                   </a:txBody>
@@ -14843,7 +14371,7 @@
                     <a:lstStyle/>
                     <a:p>
                       <a:pPr algn="ctr">
-                        <a:defRPr sz="1250" b="1">
+                        <a:defRPr sz="1300" b="1">
                           <a:solidFill>
                             <a:srgbClr val="1E293B"/>
                           </a:solidFill>
@@ -14851,7 +14379,7 @@
                         </a:defRPr>
                       </a:pPr>
                       <a:r>
-                        <a:t>3.978</a:t>
+                        <a:t>875</a:t>
                       </a:r>
                     </a:p>
                   </a:txBody>
@@ -14867,7 +14395,7 @@
                     <a:lstStyle/>
                     <a:p>
                       <a:pPr algn="ctr">
-                        <a:defRPr sz="1250" b="1">
+                        <a:defRPr sz="1300" b="1">
                           <a:solidFill>
                             <a:srgbClr val="1E293B"/>
                           </a:solidFill>
@@ -14875,7 +14403,7 @@
                         </a:defRPr>
                       </a:pPr>
                       <a:r>
-                        <a:t>11.9%</a:t>
+                        <a:t>2.3%</a:t>
                       </a:r>
                     </a:p>
                   </a:txBody>
@@ -14891,7 +14419,7 @@
                     <a:lstStyle/>
                     <a:p>
                       <a:pPr>
-                        <a:defRPr sz="1250">
+                        <a:defRPr sz="1300">
                           <a:solidFill>
                             <a:srgbClr val="1E293B"/>
                           </a:solidFill>
@@ -14899,7 +14427,7 @@
                         </a:defRPr>
                       </a:pPr>
                       <a:r>
-                        <a:t>Tin rác (diện tích 1m², giá 1 tỷ/m² hoặc 1 triệu) -&gt; Lọc theo IQR (10-500m², 15-500 tr/m²).</a:t>
+                        <a:t>Tin rao ghi 'Giá thỏa thuận', khuyết diện tích hoặc lỗi chuyển đổi -&gt; Loại bỏ hoàn toàn.</a:t>
                       </a:r>
                     </a:p>
                   </a:txBody>
@@ -14917,7 +14445,7 @@
                     <a:lstStyle/>
                     <a:p>
                       <a:pPr>
-                        <a:defRPr sz="1250">
+                        <a:defRPr sz="1300">
                           <a:solidFill>
                             <a:srgbClr val="1E293B"/>
                           </a:solidFill>
@@ -14925,7 +14453,7 @@
                         </a:defRPr>
                       </a:pPr>
                       <a:r>
-                        <a:t>Tin trùng lặp (Duplicates)</a:t>
+                        <a:t>Ngoại lai miền tri thức</a:t>
                       </a:r>
                     </a:p>
                   </a:txBody>
@@ -14941,7 +14469,7 @@
                     <a:lstStyle/>
                     <a:p>
                       <a:pPr algn="ctr">
-                        <a:defRPr sz="1250" b="1">
+                        <a:defRPr sz="1300" b="1">
                           <a:solidFill>
                             <a:srgbClr val="1E293B"/>
                           </a:solidFill>
@@ -14949,7 +14477,7 @@
                         </a:defRPr>
                       </a:pPr>
                       <a:r>
-                        <a:t>2.358</a:t>
+                        <a:t>228</a:t>
                       </a:r>
                     </a:p>
                   </a:txBody>
@@ -14965,7 +14493,7 @@
                     <a:lstStyle/>
                     <a:p>
                       <a:pPr algn="ctr">
-                        <a:defRPr sz="1250" b="1">
+                        <a:defRPr sz="1300" b="1">
                           <a:solidFill>
                             <a:srgbClr val="1E293B"/>
                           </a:solidFill>
@@ -14973,7 +14501,7 @@
                         </a:defRPr>
                       </a:pPr>
                       <a:r>
-                        <a:t>7.0%</a:t>
+                        <a:t>0.6%</a:t>
                       </a:r>
                     </a:p>
                   </a:txBody>
@@ -14989,7 +14517,7 @@
                     <a:lstStyle/>
                     <a:p>
                       <a:pPr>
-                        <a:defRPr sz="1250">
+                        <a:defRPr sz="1300">
                           <a:solidFill>
                             <a:srgbClr val="1E293B"/>
                           </a:solidFill>
@@ -14997,7 +14525,7 @@
                         </a:defRPr>
                       </a:pPr>
                       <a:r>
-                        <a:t>Một BĐS được nhiều môi giới đăng lại nhiều lần -&gt; Giữ bản ghi duy nhất theo địa chỉ &amp; diện tích.</a:t>
+                        <a:t>Áp dụng ngưỡng thực tế [10, 500] tr/m² -&gt; Loại bỏ tin ảo, tin lừa cọc hoặc gõ nhầm số.</a:t>
                       </a:r>
                     </a:p>
                   </a:txBody>
@@ -15015,7 +14543,7 @@
                     <a:lstStyle/>
                     <a:p>
                       <a:pPr>
-                        <a:defRPr sz="1250">
+                        <a:defRPr sz="1300">
                           <a:solidFill>
                             <a:srgbClr val="1E293B"/>
                           </a:solidFill>
@@ -15023,7 +14551,7 @@
                         </a:defRPr>
                       </a:pPr>
                       <a:r>
-                        <a:t>Nhiễu mô tả (Noise Text)</a:t>
+                        <a:t>Chuẩn hóa hình học &amp; đất</a:t>
                       </a:r>
                     </a:p>
                   </a:txBody>
@@ -15039,7 +14567,7 @@
                     <a:lstStyle/>
                     <a:p>
                       <a:pPr algn="ctr">
-                        <a:defRPr sz="1250" b="1">
+                        <a:defRPr sz="1300" b="1">
                           <a:solidFill>
                             <a:srgbClr val="1E293B"/>
                           </a:solidFill>
@@ -15047,7 +14575,7 @@
                         </a:defRPr>
                       </a:pPr>
                       <a:r>
-                        <a:t>2.000</a:t>
+                        <a:t>3.560</a:t>
                       </a:r>
                     </a:p>
                   </a:txBody>
@@ -15063,7 +14591,7 @@
                     <a:lstStyle/>
                     <a:p>
                       <a:pPr algn="ctr">
-                        <a:defRPr sz="1250" b="1">
+                        <a:defRPr sz="1300" b="1">
                           <a:solidFill>
                             <a:srgbClr val="1E293B"/>
                           </a:solidFill>
@@ -15071,7 +14599,7 @@
                         </a:defRPr>
                       </a:pPr>
                       <a:r>
-                        <a:t>6.0%</a:t>
+                        <a:t>9.2%</a:t>
                       </a:r>
                     </a:p>
                   </a:txBody>
@@ -15087,7 +14615,7 @@
                     <a:lstStyle/>
                     <a:p>
                       <a:pPr>
-                        <a:defRPr sz="1250">
+                        <a:defRPr sz="1300">
                           <a:solidFill>
                             <a:srgbClr val="1E293B"/>
                           </a:solidFill>
@@ -15095,7 +14623,7 @@
                         </a:defRPr>
                       </a:pPr>
                       <a:r>
-                        <a:t>Chữ viết hoa lẫn lộn, ký hiệu lạ -&gt; Xóa bỏ ký tự thừa, chuẩn hóa về dạng chữ số chuẩn.</a:t>
+                        <a:t>Đất nền gán Số tầng = 0; Mặt tiền nhập dạng mm (4500mm) được chia 1.000 về đơn vị mét.</a:t>
                       </a:r>
                     </a:p>
                   </a:txBody>
@@ -15245,7 +14773,7 @@
               </a:defRPr>
             </a:pPr>
             <a:r>
-              <a:t>Kỹ Nghệ Đặc Trưng 3 Trụ Cột (Feature Engineering)</a:t>
+              <a:t>Kỹ Nghệ Đặc Trưng 3 Trụ Cột (12 ➔ 38 Biến Số)</a:t>
             </a:r>
           </a:p>
         </p:txBody>
@@ -15361,7 +14889,7 @@
           <a:lstStyle/>
           <a:p>
             <a:pPr>
-              <a:defRPr sz="1250" b="1">
+              <a:defRPr sz="1350" b="1">
                 <a:solidFill>
                   <a:srgbClr val="FFFFFF"/>
                 </a:solidFill>
@@ -15369,7 +14897,7 @@
               </a:defRPr>
             </a:pPr>
             <a:r>
-              <a:t>NHÓM 1: KHÔNG GIAN &amp; VỊ TRÍ</a:t>
+              <a:t>TRỤ CỘT 1: VỊ TRÍ &amp; KHÔNG GIAN</a:t>
             </a:r>
           </a:p>
         </p:txBody>
@@ -15405,15 +14933,15 @@
               </a:defRPr>
             </a:pPr>
             <a:r>
-              <a:t>• Mã hóa One-Hot 30 Quận/Huyện:</a:t>
+              <a:t>• Mã hóa 30 Quận/Huyện:</a:t>
             </a:r>
           </a:p>
           <a:p>
             <a:pPr>
               <a:spcBef>
-                <a:spcPts val="400"/>
+                <a:spcPts val="300"/>
               </a:spcBef>
-              <a:defRPr sz="1250">
+              <a:defRPr sz="1300">
                 <a:solidFill>
                   <a:srgbClr val="1E293B"/>
                 </a:solidFill>
@@ -15421,13 +14949,13 @@
               </a:defRPr>
             </a:pPr>
             <a:r>
-              <a:t>Chuyển đổi biến phân loại vị trí thành vector nhị phân, loại bỏ thứ tự giả định sai lệch.</a:t>
+              <a:t>Chuyển đổi biến phân loại vị trí thành các biến độc lập, tránh áp đặt thứ bậc sai lệch.</a:t>
             </a:r>
           </a:p>
           <a:p>
             <a:pPr>
               <a:spcBef>
-                <a:spcPts val="1800"/>
+                <a:spcPts val="1600"/>
               </a:spcBef>
               <a:defRPr sz="1350" b="1">
                 <a:solidFill>
@@ -15437,15 +14965,15 @@
               </a:defRPr>
             </a:pPr>
             <a:r>
-              <a:t>• Khoảng cách tới Trung tâm:</a:t>
+              <a:t>• Phân vùng Nội đô vs Ngoại thành:</a:t>
             </a:r>
           </a:p>
           <a:p>
             <a:pPr>
               <a:spcBef>
-                <a:spcPts val="400"/>
+                <a:spcPts val="300"/>
               </a:spcBef>
-              <a:defRPr sz="1250">
+              <a:defRPr sz="1300">
                 <a:solidFill>
                   <a:srgbClr val="1E293B"/>
                 </a:solidFill>
@@ -15453,13 +14981,13 @@
               </a:defRPr>
             </a:pPr>
             <a:r>
-              <a:t>Tính bán kính hình học từ tọa độ tâm quận tới Hồ Hoàn Kiếm (0km - 35km).</a:t>
+              <a:t>Tạo biến phân tách rõ ràng 7 quận lõi trung tâm với các quận/huyện mở rộng và ven đô.</a:t>
             </a:r>
           </a:p>
           <a:p>
             <a:pPr>
               <a:spcBef>
-                <a:spcPts val="1800"/>
+                <a:spcPts val="1600"/>
               </a:spcBef>
               <a:defRPr sz="1350" b="1">
                 <a:solidFill>
@@ -15469,15 +14997,15 @@
               </a:defRPr>
             </a:pPr>
             <a:r>
-              <a:t>• Phân tầng 3 Vùng Kinh Tế:</a:t>
+              <a:t>• Khoảng cách tới Trung tâm:</a:t>
             </a:r>
           </a:p>
           <a:p>
             <a:pPr>
               <a:spcBef>
-                <a:spcPts val="400"/>
+                <a:spcPts val="300"/>
               </a:spcBef>
-              <a:defRPr sz="1250">
+              <a:defRPr sz="1300">
                 <a:solidFill>
                   <a:srgbClr val="1E293B"/>
                 </a:solidFill>
@@ -15485,7 +15013,7 @@
               </a:defRPr>
             </a:pPr>
             <a:r>
-              <a:t>Lõi di sản (Hoàn Kiếm, Ba Đình), Cận trung tâm (Cầu Giấy, Đống Đa), và Vành đai ven đô.</a:t>
+              <a:t>Tính bán kính hình học từ tâm quận tới Hồ Hoàn Kiếm làm đại diện cho sự thuận tiện giao thương.</a:t>
             </a:r>
           </a:p>
         </p:txBody>
@@ -15601,7 +15129,7 @@
           <a:lstStyle/>
           <a:p>
             <a:pPr>
-              <a:defRPr sz="1250" b="1">
+              <a:defRPr sz="1350" b="1">
                 <a:solidFill>
                   <a:srgbClr val="FFFFFF"/>
                 </a:solidFill>
@@ -15609,7 +15137,7 @@
               </a:defRPr>
             </a:pPr>
             <a:r>
-              <a:t>NHÓM 2: QUY MÔ HÌNH HỌC</a:t>
+              <a:t>TRỤ CỘT 2: HÌNH HỌC THỬA ĐẤT</a:t>
             </a:r>
           </a:p>
         </p:txBody>
@@ -15651,9 +15179,9 @@
           <a:p>
             <a:pPr>
               <a:spcBef>
-                <a:spcPts val="400"/>
+                <a:spcPts val="300"/>
               </a:spcBef>
-              <a:defRPr sz="1250">
+              <a:defRPr sz="1300">
                 <a:solidFill>
                   <a:srgbClr val="1E293B"/>
                 </a:solidFill>
@@ -15661,13 +15189,13 @@
               </a:defRPr>
             </a:pPr>
             <a:r>
-              <a:t>Tạo biến mục tiêu chuẩn hóa `price_per_m2 = total_price / area` giúp loại trừ sai lệch diện tích.</a:t>
+              <a:t>Tạo biến mục tiêu đơn giá giúp so sánh công bằng giữa các bất động sản có quy mô khác nhau.</a:t>
             </a:r>
           </a:p>
           <a:p>
             <a:pPr>
               <a:spcBef>
-                <a:spcPts val="1800"/>
+                <a:spcPts val="1600"/>
               </a:spcBef>
               <a:defRPr sz="1350" b="1">
                 <a:solidFill>
@@ -15677,15 +15205,15 @@
               </a:defRPr>
             </a:pPr>
             <a:r>
-              <a:t>• Tỷ lệ Chiều rộng / Chiều sâu:</a:t>
+              <a:t>• Tổng diện tích sàn sử dụng:</a:t>
             </a:r>
           </a:p>
           <a:p>
             <a:pPr>
               <a:spcBef>
-                <a:spcPts val="400"/>
+                <a:spcPts val="300"/>
               </a:spcBef>
-              <a:defRPr sz="1250">
+              <a:defRPr sz="1300">
                 <a:solidFill>
                   <a:srgbClr val="1E293B"/>
                 </a:solidFill>
@@ -15693,13 +15221,13 @@
               </a:defRPr>
             </a:pPr>
             <a:r>
-              <a:t>Nhận diện thế đất vuông vức hay nở hậu, ảnh hưởng trực tiếp đến giá trị thương mại.</a:t>
+              <a:t>Tích hợp giữa Diện tích và Số tầng, phản ánh trực tiếp không gian sinh hoạt thực tế của ngôi nhà.</a:t>
             </a:r>
           </a:p>
           <a:p>
             <a:pPr>
               <a:spcBef>
-                <a:spcPts val="1800"/>
+                <a:spcPts val="1600"/>
               </a:spcBef>
               <a:defRPr sz="1350" b="1">
                 <a:solidFill>
@@ -15709,15 +15237,15 @@
               </a:defRPr>
             </a:pPr>
             <a:r>
-              <a:t>• Tương tác Diện tích &amp; Tầng:</a:t>
+              <a:t>• Tỷ lệ Mặt tiền / Diện tích:</a:t>
             </a:r>
           </a:p>
           <a:p>
             <a:pPr>
               <a:spcBef>
-                <a:spcPts val="400"/>
+                <a:spcPts val="300"/>
               </a:spcBef>
-              <a:defRPr sz="1250">
+              <a:defRPr sz="1300">
                 <a:solidFill>
                   <a:srgbClr val="1E293B"/>
                 </a:solidFill>
@@ -15725,7 +15253,7 @@
               </a:defRPr>
             </a:pPr>
             <a:r>
-              <a:t>Tính tổng diện tích sàn sử dụng thực tế (GFA = area * floors).</a:t>
+              <a:t>Đánh giá mức độ thoáng đãng, hình thế thửa đất và khả năng tiếp cận mặt đường giao thông.</a:t>
             </a:r>
           </a:p>
         </p:txBody>
@@ -15841,7 +15369,7 @@
           <a:lstStyle/>
           <a:p>
             <a:pPr>
-              <a:defRPr sz="1250" b="1">
+              <a:defRPr sz="1350" b="1">
                 <a:solidFill>
                   <a:srgbClr val="FFFFFF"/>
                 </a:solidFill>
@@ -15849,7 +15377,7 @@
               </a:defRPr>
             </a:pPr>
             <a:r>
-              <a:t>NHÓM 3: PHÁP LÝ &amp; TIỆN ÍCH</a:t>
+              <a:t>TRỤ CỘT 3: PHÁP LÝ &amp; CÔNG NĂNG</a:t>
             </a:r>
           </a:p>
         </p:txBody>
@@ -15891,9 +15419,9 @@
           <a:p>
             <a:pPr>
               <a:spcBef>
-                <a:spcPts val="400"/>
+                <a:spcPts val="300"/>
               </a:spcBef>
-              <a:defRPr sz="1250">
+              <a:defRPr sz="1300">
                 <a:solidFill>
                   <a:srgbClr val="1E293B"/>
                 </a:solidFill>
@@ -15901,13 +15429,13 @@
               </a:defRPr>
             </a:pPr>
             <a:r>
-              <a:t>Biến nhị phân nhận diện Sổ đỏ / Sổ hồng sẵn sàng giao dịch so với nhà đang chờ cấp.</a:t>
+              <a:t>Xác định tình trạng có Sổ đỏ / Sổ hồng sẵn sàng giao dịch, loại trừ rủi ro tranh chấp pháp lý.</a:t>
             </a:r>
           </a:p>
           <a:p>
             <a:pPr>
               <a:spcBef>
-                <a:spcPts val="1800"/>
+                <a:spcPts val="1600"/>
               </a:spcBef>
               <a:defRPr sz="1350" b="1">
                 <a:solidFill>
@@ -15917,15 +15445,15 @@
               </a:defRPr>
             </a:pPr>
             <a:r>
-              <a:t>• Vị trí Mặt tiền vs Ngõ hẻm:</a:t>
+              <a:t>• Vị trí Mặt phố vs Ngõ hẻm:</a:t>
             </a:r>
           </a:p>
           <a:p>
             <a:pPr>
               <a:spcBef>
-                <a:spcPts val="400"/>
+                <a:spcPts val="300"/>
               </a:spcBef>
-              <a:defRPr sz="1250">
+              <a:defRPr sz="1300">
                 <a:solidFill>
                   <a:srgbClr val="1E293B"/>
                 </a:solidFill>
@@ -15933,13 +15461,13 @@
               </a:defRPr>
             </a:pPr>
             <a:r>
-              <a:t>Biến phân loại `is_frontage` phân tách rõ BĐS kinh doanh và BĐS an cư trong ngõ ngách.</a:t>
+              <a:t>Tách biệt giá trị thương mại kinh doanh của nhà mặt phố với không gian yên tĩnh của nhà trong ngõ.</a:t>
             </a:r>
           </a:p>
           <a:p>
             <a:pPr>
               <a:spcBef>
-                <a:spcPts val="1800"/>
+                <a:spcPts val="1600"/>
               </a:spcBef>
               <a:defRPr sz="1350" b="1">
                 <a:solidFill>
@@ -15949,15 +15477,15 @@
               </a:defRPr>
             </a:pPr>
             <a:r>
-              <a:t>• Khả năng tiếp cận Giao thông:</a:t>
+              <a:t>• Mật độ Không gian sống:</a:t>
             </a:r>
           </a:p>
           <a:p>
             <a:pPr>
               <a:spcBef>
-                <a:spcPts val="400"/>
+                <a:spcPts val="300"/>
               </a:spcBef>
-              <a:defRPr sz="1250">
+              <a:defRPr sz="1300">
                 <a:solidFill>
                   <a:srgbClr val="1E293B"/>
                 </a:solidFill>
@@ -15965,7 +15493,7 @@
               </a:defRPr>
             </a:pPr>
             <a:r>
-              <a:t>Độ rộng ngõ vào (ô tô đỗ cửa, tránh nhau, xe máy), quyết định thanh khoản.</a:t>
+              <a:t>Đo lường diện tích bình quân trên mỗi phòng ngủ, phân định rõ phân khúc bình dân và cao cấp.</a:t>
             </a:r>
           </a:p>
         </p:txBody>
@@ -16152,7 +15680,7 @@
           <a:lstStyle/>
           <a:p>
             <a:pPr algn="ctr">
-              <a:defRPr sz="1050" b="1">
+              <a:defRPr sz="1100" b="1">
                 <a:solidFill>
                   <a:srgbClr val="D97706"/>
                 </a:solidFill>
@@ -16184,7 +15712,7 @@
               <a:spcBef>
                 <a:spcPts val="400"/>
               </a:spcBef>
-              <a:defRPr sz="1100">
+              <a:defRPr sz="1150">
                 <a:solidFill>
                   <a:srgbClr val="E2E8F0"/>
                 </a:solidFill>
@@ -16192,7 +15720,7 @@
               </a:defRPr>
             </a:pPr>
             <a:r>
-              <a:t>21.142 bản ghi sạch</a:t>
+              <a:t>37.402 bản ghi sạch</a:t>
             </a:r>
           </a:p>
         </p:txBody>
@@ -16239,7 +15767,7 @@
           <a:lstStyle/>
           <a:p>
             <a:pPr algn="ctr">
-              <a:defRPr sz="1050" b="1">
+              <a:defRPr sz="1100" b="1">
                 <a:solidFill>
                   <a:srgbClr val="D97706"/>
                 </a:solidFill>
@@ -16271,7 +15799,7 @@
               <a:spcBef>
                 <a:spcPts val="400"/>
               </a:spcBef>
-              <a:defRPr sz="1100">
+              <a:defRPr sz="1150">
                 <a:solidFill>
                   <a:srgbClr val="E2E8F0"/>
                 </a:solidFill>
@@ -16279,7 +15807,7 @@
               </a:defRPr>
             </a:pPr>
             <a:r>
-              <a:t>Imputer + Scaler + OneHot</a:t>
+              <a:t>Điền khuyết &amp; Chuẩn hóa</a:t>
             </a:r>
           </a:p>
         </p:txBody>
@@ -16326,7 +15854,7 @@
           <a:lstStyle/>
           <a:p>
             <a:pPr algn="ctr">
-              <a:defRPr sz="1050" b="1">
+              <a:defRPr sz="1100" b="1">
                 <a:solidFill>
                   <a:srgbClr val="D97706"/>
                 </a:solidFill>
@@ -16334,7 +15862,7 @@
               </a:defRPr>
             </a:pPr>
             <a:r>
-              <a:t>BƯỚC 3: MÔ HÌNH DỰ BÁO</a:t>
+              <a:t>BƯỚC 3: MÔ HÌNH HỒI QUY</a:t>
             </a:r>
           </a:p>
           <a:p>
@@ -16350,7 +15878,7 @@
               </a:defRPr>
             </a:pPr>
             <a:r>
-              <a:t>GBDT / Random Forest</a:t>
+              <a:t>OLS &amp; Điều chuẩn</a:t>
             </a:r>
           </a:p>
           <a:p>
@@ -16358,7 +15886,7 @@
               <a:spcBef>
                 <a:spcPts val="400"/>
               </a:spcBef>
-              <a:defRPr sz="1100">
+              <a:defRPr sz="1150">
                 <a:solidFill>
                   <a:srgbClr val="E2E8F0"/>
                 </a:solidFill>
@@ -16366,7 +15894,7 @@
               </a:defRPr>
             </a:pPr>
             <a:r>
-              <a:t>Huấn luyện trên X_train</a:t>
+              <a:t>Huấn luyện trên Train Set</a:t>
             </a:r>
           </a:p>
         </p:txBody>
@@ -16413,7 +15941,7 @@
           <a:lstStyle/>
           <a:p>
             <a:pPr algn="ctr">
-              <a:defRPr sz="1050" b="1">
+              <a:defRPr sz="1100" b="1">
                 <a:solidFill>
                   <a:srgbClr val="D97706"/>
                 </a:solidFill>
@@ -16437,7 +15965,7 @@
               </a:defRPr>
             </a:pPr>
             <a:r>
-              <a:t>K-Fold Cross-Val</a:t>
+              <a:t>Train / Test Split</a:t>
             </a:r>
           </a:p>
           <a:p>
@@ -16445,7 +15973,7 @@
               <a:spcBef>
                 <a:spcPts val="400"/>
               </a:spcBef>
-              <a:defRPr sz="1100">
+              <a:defRPr sz="1150">
                 <a:solidFill>
                   <a:srgbClr val="E2E8F0"/>
                 </a:solidFill>
@@ -16453,7 +15981,7 @@
               </a:defRPr>
             </a:pPr>
             <a:r>
-              <a:t>5 Folds kiểm thử không rò rỉ</a:t>
+              <a:t>Train 29.921 | Test 7.481</a:t>
             </a:r>
           </a:p>
         </p:txBody>
@@ -16569,7 +16097,7 @@
           <a:lstStyle/>
           <a:p>
             <a:pPr>
-              <a:defRPr sz="1250" b="1">
+              <a:defRPr sz="1350" b="1">
                 <a:solidFill>
                   <a:srgbClr val="FFFFFF"/>
                 </a:solidFill>
@@ -16605,7 +16133,7 @@
           <a:lstStyle/>
           <a:p>
             <a:pPr>
-              <a:defRPr sz="1300" b="1">
+              <a:defRPr sz="1350" b="1">
                 <a:solidFill>
                   <a:srgbClr val="D97706"/>
                 </a:solidFill>
@@ -16613,7 +16141,7 @@
               </a:defRPr>
             </a:pPr>
             <a:r>
-              <a:t>• Nguyên tắc 'Chỉ học trên Train':</a:t>
+              <a:t>• Phân chia Train/Test 80/20 từ đầu:</a:t>
             </a:r>
           </a:p>
           <a:p>
@@ -16621,7 +16149,7 @@
               <a:spcBef>
                 <a:spcPts val="200"/>
               </a:spcBef>
-              <a:defRPr sz="1250">
+              <a:defRPr sz="1300">
                 <a:solidFill>
                   <a:srgbClr val="1E293B"/>
                 </a:solidFill>
@@ -16629,7 +16157,7 @@
               </a:defRPr>
             </a:pPr>
             <a:r>
-              <a:t>Toàn bộ tham số trung bình, trung vị (Imputer) và độ lệch chuẩn (StandardScaler) chỉ được tính trên tập Train.</a:t>
+              <a:t>Dữ liệu được chia thành tập Huấn luyện (29.921 bản ghi) và Kiểm thử (7.481 bản ghi) ngay trước mọi bước xử lý.</a:t>
             </a:r>
           </a:p>
           <a:p>
@@ -16637,7 +16165,7 @@
               <a:spcBef>
                 <a:spcPts val="1200"/>
               </a:spcBef>
-              <a:defRPr sz="1300" b="1">
+              <a:defRPr sz="1350" b="1">
                 <a:solidFill>
                   <a:srgbClr val="D97706"/>
                 </a:solidFill>
@@ -16645,7 +16173,7 @@
               </a:defRPr>
             </a:pPr>
             <a:r>
-              <a:t>• Độc lập kiểm thử hoàn toàn:</a:t>
+              <a:t>• Nguyên tắc 'Chỉ học trên tập Train':</a:t>
             </a:r>
           </a:p>
           <a:p>
@@ -16653,7 +16181,7 @@
               <a:spcBef>
                 <a:spcPts val="200"/>
               </a:spcBef>
-              <a:defRPr sz="1250">
+              <a:defRPr sz="1300">
                 <a:solidFill>
                   <a:srgbClr val="1E293B"/>
                 </a:solidFill>
@@ -16661,7 +16189,7 @@
               </a:defRPr>
             </a:pPr>
             <a:r>
-              <a:t>Tập Test được giữ nguyên vẹn như dữ liệu tương lai chưa từng thấy, chỉ biến đổi bằng `.transform()`.</a:t>
+              <a:t>Mọi giá trị thống kê điền khuyết và độ lệch chuẩn chuẩn hóa chỉ được tính toán trên tập Huấn luyện.</a:t>
             </a:r>
           </a:p>
           <a:p>
@@ -16669,7 +16197,7 @@
               <a:spcBef>
                 <a:spcPts val="1200"/>
               </a:spcBef>
-              <a:defRPr sz="1300" b="1">
+              <a:defRPr sz="1350" b="1">
                 <a:solidFill>
                   <a:srgbClr val="D97706"/>
                 </a:solidFill>
@@ -16677,7 +16205,7 @@
               </a:defRPr>
             </a:pPr>
             <a:r>
-              <a:t>• Độ tin cậy của chỉ số:</a:t>
+              <a:t>• Bảo toàn tính khách quan của tập Test:</a:t>
             </a:r>
           </a:p>
           <a:p>
@@ -16685,7 +16213,7 @@
               <a:spcBef>
                 <a:spcPts val="200"/>
               </a:spcBef>
-              <a:defRPr sz="1250">
+              <a:defRPr sz="1300">
                 <a:solidFill>
                   <a:srgbClr val="1E293B"/>
                 </a:solidFill>
@@ -16693,7 +16221,7 @@
               </a:defRPr>
             </a:pPr>
             <a:r>
-              <a:t>Đảm bảo điểm số R² và sai số MAE phản ánh chính xác năng lực thực chiến, không bị thổi phồng giả tạo.</a:t>
+              <a:t>Tập Kiểm thử hoàn toàn đóng vai trò là dữ liệu mới trong tương lai, chỉ áp dụng phép biến đổi mà không học lại tham số.</a:t>
             </a:r>
           </a:p>
         </p:txBody>
@@ -16809,7 +16337,7 @@
           <a:lstStyle/>
           <a:p>
             <a:pPr>
-              <a:defRPr sz="1250" b="1">
+              <a:defRPr sz="1350" b="1">
                 <a:solidFill>
                   <a:srgbClr val="FFFFFF"/>
                 </a:solidFill>
@@ -16817,7 +16345,7 @@
               </a:defRPr>
             </a:pPr>
             <a:r>
-              <a:t>ĐÓNG GÓI SẢN PHẨM SẴN SÀNG TRIỂN KHAI</a:t>
+              <a:t>ĐÓNG GÓI PIPELINE HỒI QUY &amp; TÍNH TÁI LẬP</a:t>
             </a:r>
           </a:p>
         </p:txBody>
@@ -16845,7 +16373,7 @@
           <a:lstStyle/>
           <a:p>
             <a:pPr>
-              <a:defRPr sz="1300" b="1">
+              <a:defRPr sz="1350" b="1">
                 <a:solidFill>
                   <a:srgbClr val="D97706"/>
                 </a:solidFill>
@@ -16853,7 +16381,7 @@
               </a:defRPr>
             </a:pPr>
             <a:r>
-              <a:t>• Tính nhất quán (Reproducibility):</a:t>
+              <a:t>• Đóng gói thành một tệp duy nhất:</a:t>
             </a:r>
           </a:p>
           <a:p>
@@ -16861,7 +16389,7 @@
               <a:spcBef>
                 <a:spcPts val="200"/>
               </a:spcBef>
-              <a:defRPr sz="1250">
+              <a:defRPr sz="1300">
                 <a:solidFill>
                   <a:srgbClr val="1E293B"/>
                 </a:solidFill>
@@ -16869,7 +16397,7 @@
               </a:defRPr>
             </a:pPr>
             <a:r>
-              <a:t>Pipeline tích hợp đóng gói toàn bộ luồng xử lý và mô hình thành 1 tệp nhị phân duy nhất (`pipeline.pkl`).</a:t>
+              <a:t>Toàn bộ chu trình tiền xử lý và phương trình hồi quy được tích hợp nhất quán trong tệp nhị phân (`house_price_model.pkl`).</a:t>
             </a:r>
           </a:p>
           <a:p>
@@ -16877,7 +16405,7 @@
               <a:spcBef>
                 <a:spcPts val="1200"/>
               </a:spcBef>
-              <a:defRPr sz="1300" b="1">
+              <a:defRPr sz="1350" b="1">
                 <a:solidFill>
                   <a:srgbClr val="D97706"/>
                 </a:solidFill>
@@ -16885,7 +16413,7 @@
               </a:defRPr>
             </a:pPr>
             <a:r>
-              <a:t>• Khả năng mở rộng (Scalability):</a:t>
+              <a:t>• Suy diễn thời gian thực (Real-time):</a:t>
             </a:r>
           </a:p>
           <a:p>
@@ -16893,7 +16421,7 @@
               <a:spcBef>
                 <a:spcPts val="200"/>
               </a:spcBef>
-              <a:defRPr sz="1250">
+              <a:defRPr sz="1300">
                 <a:solidFill>
                   <a:srgbClr val="1E293B"/>
                 </a:solidFill>
@@ -16901,7 +16429,7 @@
               </a:defRPr>
             </a:pPr>
             <a:r>
-              <a:t>Dễ dàng thay thế mô hình lõi từ GBDT sang LightGBM hoặc XGBoost mà không làm gãy luồng xử lý.</a:t>
+              <a:t>Cho phép đưa trực tiếp thông tin một căn nhà thô vào hệ thống và nhận ngay kết quả định giá tự động.</a:t>
             </a:r>
           </a:p>
           <a:p>
@@ -16909,7 +16437,7 @@
               <a:spcBef>
                 <a:spcPts val="1200"/>
               </a:spcBef>
-              <a:defRPr sz="1300" b="1">
+              <a:defRPr sz="1350" b="1">
                 <a:solidFill>
                   <a:srgbClr val="D97706"/>
                 </a:solidFill>
@@ -16917,7 +16445,7 @@
               </a:defRPr>
             </a:pPr>
             <a:r>
-              <a:t>• Sẵn sàng cho Suy Diễn (Inference Pipeline):</a:t>
+              <a:t>• Dễ dàng bảo trì và mở rộng:</a:t>
             </a:r>
           </a:p>
           <a:p>
@@ -16925,7 +16453,7 @@
               <a:spcBef>
                 <a:spcPts val="200"/>
               </a:spcBef>
-              <a:defRPr sz="1250">
+              <a:defRPr sz="1300">
                 <a:solidFill>
                   <a:srgbClr val="1E293B"/>
                 </a:solidFill>
@@ -16933,7 +16461,7 @@
               </a:defRPr>
             </a:pPr>
             <a:r>
-              <a:t>Hàm pipeline.predict() nhận trực tiếp dữ liệu thô, tự động tiền xử lý và dự báo giá trong 0.05 giây.</a:t>
+              <a:t>Sẵn sàng cập nhật dữ liệu định kỳ hoặc mở rộng phạm vi định giá sang các tỉnh thành khác mà không gãy luồng xử lý.</a:t>
             </a:r>
           </a:p>
         </p:txBody>
@@ -17132,7 +16660,7 @@
         <p:spPr>
           <a:xfrm>
             <a:off x="731520" y="1234440"/>
-            <a:ext cx="5184648" cy="603504"/>
+            <a:ext cx="5184648" cy="438912"/>
           </a:xfrm>
           <a:prstGeom prst="rect">
             <a:avLst/>
@@ -17175,7 +16703,7 @@
         <p:spPr>
           <a:xfrm>
             <a:off x="896112" y="1271016"/>
-            <a:ext cx="4855464" cy="530352"/>
+            <a:ext cx="4855464" cy="365760"/>
           </a:xfrm>
           <a:prstGeom prst="rect">
             <a:avLst/>
@@ -17189,7 +16717,7 @@
           <a:lstStyle/>
           <a:p>
             <a:pPr>
-              <a:defRPr sz="1250" b="1">
+              <a:defRPr sz="1350" b="1">
                 <a:solidFill>
                   <a:srgbClr val="FFFFFF"/>
                 </a:solidFill>
@@ -17197,7 +16725,7 @@
               </a:defRPr>
             </a:pPr>
             <a:r>
-              <a:t>HỌ 1: ĐỊNH DANH &amp; LOẠI HÌNH BĐS</a:t>
+              <a:t>HỌ 1: LOẠI HÌNH &amp; QUY MÔ MẪU</a:t>
             </a:r>
           </a:p>
         </p:txBody>
@@ -17210,8 +16738,8 @@
         </p:nvSpPr>
         <p:spPr>
           <a:xfrm>
-            <a:off x="914400" y="1929384"/>
-            <a:ext cx="4818888" cy="1636776"/>
+            <a:off x="914400" y="1764792"/>
+            <a:ext cx="4818888" cy="1801368"/>
           </a:xfrm>
           <a:prstGeom prst="rect">
             <a:avLst/>
@@ -17225,7 +16753,7 @@
           <a:lstStyle/>
           <a:p>
             <a:pPr>
-              <a:defRPr sz="1250" b="1">
+              <a:defRPr sz="1300" b="1">
                 <a:solidFill>
                   <a:srgbClr val="D97706"/>
                 </a:solidFill>
@@ -17233,16 +16761,16 @@
               </a:defRPr>
             </a:pPr>
             <a:r>
-              <a:t>• Quy mô mẫu: </a:t>
-            </a:r>
-            <a:r>
-              <a:rPr sz="1200" b="0">
+              <a:t>• Quy mô phân tích: </a:t>
+            </a:r>
+            <a:r>
+              <a:rPr sz="1300" b="0">
                 <a:solidFill>
                   <a:srgbClr val="1E293B"/>
                 </a:solidFill>
                 <a:latin typeface="Arial"/>
               </a:rPr>
-              <a:t>21.142 bản ghi sạch đại diện toàn diện thị trường Hà Nội.</a:t>
+              <a:t>37.402 bản ghi sạch sau phễu lọc 18 tháng, đại diện 12 quận/huyện trọng điểm.</a:t>
             </a:r>
           </a:p>
           <a:p>
@@ -17250,7 +16778,7 @@
               <a:spcBef>
                 <a:spcPts val="800"/>
               </a:spcBef>
-              <a:defRPr sz="1250" b="1">
+              <a:defRPr sz="1300" b="1">
                 <a:solidFill>
                   <a:srgbClr val="D97706"/>
                 </a:solidFill>
@@ -17258,10 +16786,10 @@
               </a:defRPr>
             </a:pPr>
             <a:r>
-              <a:t>• Cơ cấu loại hình: </a:t>
-            </a:r>
-            <a:r>
-              <a:rPr sz="1200" b="0">
+              <a:t>• Cơ cấu loại hình BĐS: </a:t>
+            </a:r>
+            <a:r>
+              <a:rPr sz="1300" b="0">
                 <a:solidFill>
                   <a:srgbClr val="1E293B"/>
                 </a:solidFill>
@@ -17275,7 +16803,7 @@
               <a:spcBef>
                 <a:spcPts val="800"/>
               </a:spcBef>
-              <a:defRPr sz="1250" b="1">
+              <a:defRPr sz="1300" b="1">
                 <a:solidFill>
                   <a:srgbClr val="D97706"/>
                 </a:solidFill>
@@ -17283,16 +16811,16 @@
               </a:defRPr>
             </a:pPr>
             <a:r>
-              <a:t>• Ý nghĩa phân tích: </a:t>
-            </a:r>
-            <a:r>
-              <a:rPr sz="1200" b="0">
+              <a:t>• Ý nghĩa thực tiễn: </a:t>
+            </a:r>
+            <a:r>
+              <a:rPr sz="1300" b="0">
                 <a:solidFill>
                   <a:srgbClr val="1E293B"/>
                 </a:solidFill>
                 <a:latin typeface="Arial"/>
               </a:rPr>
-              <a:t>Cần phân tầng mô hình theo loại hình để đạt độ chính xác tối ưu.</a:t>
+              <a:t>Phân chia rõ theo loại hình để mô hình định giá phản ánh đúng bản chất từng phân khúc.</a:t>
             </a:r>
           </a:p>
         </p:txBody>
@@ -17408,7 +16936,7 @@
           <a:lstStyle/>
           <a:p>
             <a:pPr>
-              <a:defRPr sz="1250" b="1">
+              <a:defRPr sz="1350" b="1">
                 <a:solidFill>
                   <a:srgbClr val="FFFFFF"/>
                 </a:solidFill>
@@ -17416,7 +16944,7 @@
               </a:defRPr>
             </a:pPr>
             <a:r>
-              <a:t>HỌ 2: KHÔNG GIAN ĐỊA LÝ (30 QUẬN/HUYỆN)</a:t>
+              <a:t>HỌ 2: PHÂN BỐ KHÔNG GIAN ĐỊA LÝ</a:t>
             </a:r>
           </a:p>
         </p:txBody>
@@ -17444,7 +16972,7 @@
           <a:lstStyle/>
           <a:p>
             <a:pPr>
-              <a:defRPr sz="1250" b="1">
+              <a:defRPr sz="1300" b="1">
                 <a:solidFill>
                   <a:srgbClr val="D97706"/>
                 </a:solidFill>
@@ -17452,16 +16980,16 @@
               </a:defRPr>
             </a:pPr>
             <a:r>
-              <a:t>• Mật độ tập trung: </a:t>
-            </a:r>
-            <a:r>
-              <a:rPr sz="1200" b="0">
+              <a:t>• Mật độ giao dịch: </a:t>
+            </a:r>
+            <a:r>
+              <a:rPr sz="1300" b="0">
                 <a:solidFill>
                   <a:srgbClr val="1E293B"/>
                 </a:solidFill>
                 <a:latin typeface="Arial"/>
               </a:rPr>
-              <a:t>54% giao dịch tập trung tại Cầu Giấy, Đống Đa, Nam Từ Liêm, Hà Đông.</a:t>
+              <a:t>Hơn một nửa số lượng tin tập trung tại 4 quận: Cầu Giấy, Đống Đa, Nam Từ Liêm, Hà Đông.</a:t>
             </a:r>
           </a:p>
           <a:p>
@@ -17469,7 +16997,7 @@
               <a:spcBef>
                 <a:spcPts val="800"/>
               </a:spcBef>
-              <a:defRPr sz="1250" b="1">
+              <a:defRPr sz="1300" b="1">
                 <a:solidFill>
                   <a:srgbClr val="D97706"/>
                 </a:solidFill>
@@ -17477,16 +17005,16 @@
               </a:defRPr>
             </a:pPr>
             <a:r>
-              <a:t>• Bán kính đô thị: </a:t>
-            </a:r>
-            <a:r>
-              <a:rPr sz="1200" b="0">
+              <a:t>• Bán kính nghiên cứu: </a:t>
+            </a:r>
+            <a:r>
+              <a:rPr sz="1300" b="0">
                 <a:solidFill>
                   <a:srgbClr val="1E293B"/>
                 </a:solidFill>
                 <a:latin typeface="Arial"/>
               </a:rPr>
-              <a:t>Từ 0km (Hoàn Kiếm) đến 35km (Ba Vì, Sóc Sơn).</a:t>
+              <a:t>Trải dài từ trung tâm Hoàn Kiếm ra các quận mở rộng và huyện ven đô.</a:t>
             </a:r>
           </a:p>
           <a:p>
@@ -17494,7 +17022,7 @@
               <a:spcBef>
                 <a:spcPts val="800"/>
               </a:spcBef>
-              <a:defRPr sz="1250" b="1">
+              <a:defRPr sz="1300" b="1">
                 <a:solidFill>
                   <a:srgbClr val="D97706"/>
                 </a:solidFill>
@@ -17502,16 +17030,16 @@
               </a:defRPr>
             </a:pPr>
             <a:r>
-              <a:t>• Ý nghĩa phân tích: </a:t>
-            </a:r>
-            <a:r>
-              <a:rPr sz="1200" b="0">
+              <a:t>• Ý nghĩa thực tiễn: </a:t>
+            </a:r>
+            <a:r>
+              <a:rPr sz="1300" b="0">
                 <a:solidFill>
                   <a:srgbClr val="1E293B"/>
                 </a:solidFill>
                 <a:latin typeface="Arial"/>
               </a:rPr>
-              <a:t>Vị trí địa lý giải thích tới 28% độ biến thiên giá trị tài sản.</a:t>
+              <a:t>Vị trí địa lý là yếu tố chi phối mạnh mẽ nhất đến sự chênh lệch đơn giá nhà đất.</a:t>
             </a:r>
           </a:p>
         </p:txBody>
@@ -17570,7 +17098,7 @@
         <p:spPr>
           <a:xfrm>
             <a:off x="731520" y="3977640"/>
-            <a:ext cx="5184648" cy="603504"/>
+            <a:ext cx="5184648" cy="438912"/>
           </a:xfrm>
           <a:prstGeom prst="rect">
             <a:avLst/>
@@ -17613,7 +17141,7 @@
         <p:spPr>
           <a:xfrm>
             <a:off x="896112" y="4014216"/>
-            <a:ext cx="4855464" cy="530352"/>
+            <a:ext cx="4855464" cy="365760"/>
           </a:xfrm>
           <a:prstGeom prst="rect">
             <a:avLst/>
@@ -17627,7 +17155,7 @@
           <a:lstStyle/>
           <a:p>
             <a:pPr>
-              <a:defRPr sz="1250" b="1">
+              <a:defRPr sz="1350" b="1">
                 <a:solidFill>
                   <a:srgbClr val="FFFFFF"/>
                 </a:solidFill>
@@ -17635,7 +17163,7 @@
               </a:defRPr>
             </a:pPr>
             <a:r>
-              <a:t>HỌ 3: QUY MÔ HÌNH HỌC (DIỆN TÍCH &amp; MẶT TIỀN)</a:t>
+              <a:t>HỌ 3: HÌNH HỌC THỬA ĐẤT</a:t>
             </a:r>
           </a:p>
         </p:txBody>
@@ -17648,8 +17176,8 @@
         </p:nvSpPr>
         <p:spPr>
           <a:xfrm>
-            <a:off x="914400" y="4672584"/>
-            <a:ext cx="4818888" cy="1636776"/>
+            <a:off x="914400" y="4507992"/>
+            <a:ext cx="4818888" cy="1801368"/>
           </a:xfrm>
           <a:prstGeom prst="rect">
             <a:avLst/>
@@ -17663,7 +17191,7 @@
           <a:lstStyle/>
           <a:p>
             <a:pPr>
-              <a:defRPr sz="1250" b="1">
+              <a:defRPr sz="1300" b="1">
                 <a:solidFill>
                   <a:srgbClr val="D97706"/>
                 </a:solidFill>
@@ -17674,13 +17202,13 @@
               <a:t>• Diện tích đất: </a:t>
             </a:r>
             <a:r>
-              <a:rPr sz="1200" b="0">
+              <a:rPr sz="1300" b="0">
                 <a:solidFill>
                   <a:srgbClr val="1E293B"/>
                 </a:solidFill>
                 <a:latin typeface="Arial"/>
               </a:rPr>
-              <a:t>Trung vị 52 m² (IQR: 38 - 85 m²), trung bình 64.2 m².</a:t>
+              <a:t>Dao động phổ biến từ 38 đến 85 m² (mức trung vị thực tế đạt 52 m²).</a:t>
             </a:r>
           </a:p>
           <a:p>
@@ -17688,7 +17216,7 @@
               <a:spcBef>
                 <a:spcPts val="800"/>
               </a:spcBef>
-              <a:defRPr sz="1250" b="1">
+              <a:defRPr sz="1300" b="1">
                 <a:solidFill>
                   <a:srgbClr val="D97706"/>
                 </a:solidFill>
@@ -17699,13 +17227,13 @@
               <a:t>• Chiều rộng mặt tiền: </a:t>
             </a:r>
             <a:r>
-              <a:rPr sz="1200" b="0">
+              <a:rPr sz="1300" b="0">
                 <a:solidFill>
                   <a:srgbClr val="1E293B"/>
                 </a:solidFill>
                 <a:latin typeface="Arial"/>
               </a:rPr>
-              <a:t>Trung vị 4.2m, dao động phổ biến từ 3.2m đến 5.5m.</a:t>
+              <a:t>Tập trung nhiều ở khoảng 3.2m đến 5.5m (mức trung vị đạt 4.2m).</a:t>
             </a:r>
           </a:p>
           <a:p>
@@ -17713,7 +17241,7 @@
               <a:spcBef>
                 <a:spcPts val="800"/>
               </a:spcBef>
-              <a:defRPr sz="1250" b="1">
+              <a:defRPr sz="1300" b="1">
                 <a:solidFill>
                   <a:srgbClr val="D97706"/>
                 </a:solidFill>
@@ -17721,16 +17249,16 @@
               </a:defRPr>
             </a:pPr>
             <a:r>
-              <a:t>• Ý nghĩa phân tích: </a:t>
-            </a:r>
-            <a:r>
-              <a:rPr sz="1200" b="0">
+              <a:t>• Ý nghĩa thực tiễn: </a:t>
+            </a:r>
+            <a:r>
+              <a:rPr sz="1300" b="0">
                 <a:solidFill>
                   <a:srgbClr val="1E293B"/>
                 </a:solidFill>
                 <a:latin typeface="Arial"/>
               </a:rPr>
-              <a:t>Diện tích tương quan mạnh nhất với tổng giá trị (r = 0.72).</a:t>
+              <a:t>Quy mô diện tích và độ rộng mặt tiền là hai yếu tố cốt lõi quyết định tổng giá trị nhà.</a:t>
             </a:r>
           </a:p>
         </p:txBody>
@@ -17846,7 +17374,7 @@
           <a:lstStyle/>
           <a:p>
             <a:pPr>
-              <a:defRPr sz="1250" b="1">
+              <a:defRPr sz="1350" b="1">
                 <a:solidFill>
                   <a:srgbClr val="FFFFFF"/>
                 </a:solidFill>
@@ -17882,7 +17410,7 @@
           <a:lstStyle/>
           <a:p>
             <a:pPr>
-              <a:defRPr sz="1250" b="1">
+              <a:defRPr sz="1300" b="1">
                 <a:solidFill>
                   <a:srgbClr val="D97706"/>
                 </a:solidFill>
@@ -17893,13 +17421,13 @@
               <a:t>• Tổng giá trị tài sản: </a:t>
             </a:r>
             <a:r>
-              <a:rPr sz="1200" b="0">
+              <a:rPr sz="1300" b="0">
                 <a:solidFill>
                   <a:srgbClr val="1E293B"/>
                 </a:solidFill>
                 <a:latin typeface="Arial"/>
               </a:rPr>
-              <a:t>Trung vị 4.8 tỷ VNĐ (Dao động từ 1.2 tỷ đến 35 tỷ sau lọc).</a:t>
+              <a:t>Mức trung vị đạt 4.8 tỷ VNĐ (dao động phổ biến từ 1.2 tỷ đến 35 tỷ VNĐ).</a:t>
             </a:r>
           </a:p>
           <a:p>
@@ -17907,7 +17435,7 @@
               <a:spcBef>
                 <a:spcPts val="800"/>
               </a:spcBef>
-              <a:defRPr sz="1250" b="1">
+              <a:defRPr sz="1300" b="1">
                 <a:solidFill>
                   <a:srgbClr val="D97706"/>
                 </a:solidFill>
@@ -17918,13 +17446,13 @@
               <a:t>• Đơn giá m²: </a:t>
             </a:r>
             <a:r>
-              <a:rPr sz="1200" b="0">
+              <a:rPr sz="1300" b="0">
                 <a:solidFill>
                   <a:srgbClr val="1E293B"/>
                 </a:solidFill>
                 <a:latin typeface="Arial"/>
               </a:rPr>
-              <a:t>Trung vị 92.5 triệu/m², phân phối lệch phải (Skewness = 3.84).</a:t>
+              <a:t>Mức trung vị đạt 92.5 triệu/m²; đại đa số tài sản tập trung ở phân khúc 60 - 120 triệu/m².</a:t>
             </a:r>
           </a:p>
           <a:p>
@@ -17932,7 +17460,7 @@
               <a:spcBef>
                 <a:spcPts val="800"/>
               </a:spcBef>
-              <a:defRPr sz="1250" b="1">
+              <a:defRPr sz="1300" b="1">
                 <a:solidFill>
                   <a:srgbClr val="D97706"/>
                 </a:solidFill>
@@ -17940,16 +17468,16 @@
               </a:defRPr>
             </a:pPr>
             <a:r>
-              <a:t>• Ý nghĩa phân tích: </a:t>
-            </a:r>
-            <a:r>
-              <a:rPr sz="1200" b="0">
+              <a:t>• Ý nghĩa thực tiễn: </a:t>
+            </a:r>
+            <a:r>
+              <a:rPr sz="1300" b="0">
                 <a:solidFill>
                   <a:srgbClr val="1E293B"/>
                 </a:solidFill>
                 <a:latin typeface="Arial"/>
               </a:rPr>
-              <a:t>Cần log-transform để đưa phân phối về chuẩn hóa Gauss.</a:t>
+              <a:t>Thị trường có xu hướng lệch về phân khúc phổ thông, đòi hỏi chuyển đổi thang đo phù hợp.</a:t>
             </a:r>
           </a:p>
         </p:txBody>
@@ -18089,7 +17617,7 @@
               </a:defRPr>
             </a:pPr>
             <a:r>
-              <a:t>Biểu Đồ 1: Ma Trận Tương Quan Tuyến Tính Giữa Các Đặc Trưng</a:t>
+              <a:t>Biểu Đồ 1: Mức Độ Tương Quan Giữa Các Đặc Trưng Nhà Đất</a:t>
             </a:r>
           </a:p>
         </p:txBody>
@@ -18274,7 +17802,7 @@
           <a:lstStyle/>
           <a:p>
             <a:pPr>
-              <a:defRPr sz="1250" b="1">
+              <a:defRPr sz="1400" b="1">
                 <a:solidFill>
                   <a:srgbClr val="FFFFFF"/>
                 </a:solidFill>
@@ -18282,7 +17810,7 @@
               </a:defRPr>
             </a:pPr>
             <a:r>
-              <a:t>TƯƠNG QUAN TUYẾN TÍNH (BĐ 01)</a:t>
+              <a:t>TƯƠNG QUAN ĐẶC TRƯNG (BĐ 01)</a:t>
             </a:r>
           </a:p>
         </p:txBody>
@@ -18310,7 +17838,7 @@
           <a:lstStyle/>
           <a:p>
             <a:pPr>
-              <a:defRPr sz="1350" b="1">
+              <a:defRPr sz="1400" b="1">
                 <a:solidFill>
                   <a:srgbClr val="D97706"/>
                 </a:solidFill>
@@ -18326,7 +17854,7 @@
               <a:spcBef>
                 <a:spcPts val="300"/>
               </a:spcBef>
-              <a:defRPr sz="1250">
+              <a:defRPr sz="1300">
                 <a:solidFill>
                   <a:srgbClr val="1E293B"/>
                 </a:solidFill>
@@ -18334,15 +17862,15 @@
               </a:defRPr>
             </a:pPr>
             <a:r>
-              <a:t>Đo lường mức độ liên kết tuyến tính (hệ số Pearson r) giữa các biến định lượng: Diện tích, Số phòng ngủ, Số tầng, Mặt tiền và Giá.</a:t>
+              <a:t>Đo lường mức độ liên hệ tuyến tính giữa các đặc tính nhà đất (Diện tích, Mặt tiền, Số tầng, Số phòng) với Đơn giá và Tổng giá bán.</a:t>
             </a:r>
           </a:p>
           <a:p>
             <a:pPr>
               <a:spcBef>
-                <a:spcPts val="1000"/>
+                <a:spcPts val="1200"/>
               </a:spcBef>
-              <a:defRPr sz="1350" b="1">
+              <a:defRPr sz="1400" b="1">
                 <a:solidFill>
                   <a:srgbClr val="D97706"/>
                 </a:solidFill>
@@ -18350,7 +17878,7 @@
               </a:defRPr>
             </a:pPr>
             <a:r>
-              <a:t>Phát Hiện Trọng Tâm (Key Insight):</a:t>
+              <a:t>Phát Hiện Cốt Lõi:</a:t>
             </a:r>
           </a:p>
           <a:p>
@@ -18358,7 +17886,7 @@
               <a:spcBef>
                 <a:spcPts val="300"/>
               </a:spcBef>
-              <a:defRPr sz="1250">
+              <a:defRPr sz="1300">
                 <a:solidFill>
                   <a:srgbClr val="1E293B"/>
                 </a:solidFill>
@@ -18366,15 +17894,15 @@
               </a:defRPr>
             </a:pPr>
             <a:r>
-              <a:t>Diện tích (area) có tương quan dương mạnh nhất với Tổng giá trị tài sản (r = 0.72), khẳng định quy mô diện tích là nhân tố gốc chi phối giá.</a:t>
+              <a:t>Diện tích đất và tổng diện tích sàn là hai yếu tố có mối liên kết thuận chiều mạnh mẽ nhất với tổng giá trị của một căn nhà.</a:t>
             </a:r>
           </a:p>
           <a:p>
             <a:pPr>
               <a:spcBef>
-                <a:spcPts val="1000"/>
+                <a:spcPts val="1200"/>
               </a:spcBef>
-              <a:defRPr sz="1350" b="1">
+              <a:defRPr sz="1400" b="1">
                 <a:solidFill>
                   <a:srgbClr val="D97706"/>
                 </a:solidFill>
@@ -18382,7 +17910,7 @@
               </a:defRPr>
             </a:pPr>
             <a:r>
-              <a:t>Cảnh Báo Đa Cộng Tuyến (Multicollinearity):</a:t>
+              <a:t>Kiểm Soát Tương Quan Trùng Lặp:</a:t>
             </a:r>
           </a:p>
           <a:p>
@@ -18390,7 +17918,7 @@
               <a:spcBef>
                 <a:spcPts val="300"/>
               </a:spcBef>
-              <a:defRPr sz="1250">
+              <a:defRPr sz="1300">
                 <a:solidFill>
                   <a:srgbClr val="1E293B"/>
                 </a:solidFill>
@@ -18398,15 +17926,15 @@
               </a:defRPr>
             </a:pPr>
             <a:r>
-              <a:t>Số phòng ngủ và Diện tích có mức tương quan r = 0.68 -&gt; Cần kiểm soát chỉ số VIF để tránh mô hình tuyến tính bị thổi phồng phương sai.</a:t>
+              <a:t>Diện tích sàn và diện tích đất có mức độ gắn kết rất cao với nhau -&gt; Cần kỹ thuật điều chuẩn mô hình để tránh hiện tượng nhiễu thông tin.</a:t>
             </a:r>
           </a:p>
           <a:p>
             <a:pPr>
               <a:spcBef>
-                <a:spcPts val="1000"/>
+                <a:spcPts val="1200"/>
               </a:spcBef>
-              <a:defRPr sz="1350" b="1">
+              <a:defRPr sz="1400" b="1">
                 <a:solidFill>
                   <a:srgbClr val="D97706"/>
                 </a:solidFill>
@@ -18414,7 +17942,7 @@
               </a:defRPr>
             </a:pPr>
             <a:r>
-              <a:t>Ý Nghĩa Ứng Dụng Thực Tiễn:</a:t>
+              <a:t>Ứng Dụng Trong Mô Hình Hóa:</a:t>
             </a:r>
           </a:p>
           <a:p>
@@ -18422,7 +17950,7 @@
               <a:spcBef>
                 <a:spcPts val="300"/>
               </a:spcBef>
-              <a:defRPr sz="1250">
+              <a:defRPr sz="1300">
                 <a:solidFill>
                   <a:srgbClr val="1E293B"/>
                 </a:solidFill>
@@ -18430,7 +17958,7 @@
               </a:defRPr>
             </a:pPr>
             <a:r>
-              <a:t>Loại bỏ các biến dư thừa có tương quan nội bộ cao, giữ lại các đặc trưng độc lập mạnh nhất cho thuật toán Machine Learning.</a:t>
+              <a:t>Lựa chọn tập hợp các đặc trưng độc lập, có giá trị đóng góp thông tin thực chất nhất cho các phương trình hồi quy.</a:t>
             </a:r>
           </a:p>
         </p:txBody>
@@ -18570,7 +18098,7 @@
               </a:defRPr>
             </a:pPr>
             <a:r>
-              <a:t>Biểu Đồ 2: Phân Phối Giá BĐS &amp; Đột Phá Sau Biến Đổi Logarit</a:t>
+              <a:t>Biểu Đồ 2: Phân Phối Giá BĐS &amp; Hiệu Quả Sau Biến Đổi Logarit</a:t>
             </a:r>
           </a:p>
         </p:txBody>
@@ -18755,7 +18283,7 @@
           <a:lstStyle/>
           <a:p>
             <a:pPr>
-              <a:defRPr sz="1250" b="1">
+              <a:defRPr sz="1350" b="1">
                 <a:solidFill>
                   <a:srgbClr val="FFFFFF"/>
                 </a:solidFill>
@@ -18763,7 +18291,7 @@
               </a:defRPr>
             </a:pPr>
             <a:r>
-              <a:t>1. PHÂN PHỐI GỐC (LỆCH PHẢI)</a:t>
+              <a:t>1. PHÂN PHỐI GIÁ THỰC TẾ</a:t>
             </a:r>
           </a:p>
         </p:txBody>
@@ -18794,7 +18322,7 @@
               <a:spcBef>
                 <a:spcPts val="400"/>
               </a:spcBef>
-              <a:defRPr sz="1300">
+              <a:defRPr sz="1350">
                 <a:solidFill>
                   <a:srgbClr val="1E293B"/>
                 </a:solidFill>
@@ -18802,7 +18330,7 @@
               </a:defRPr>
             </a:pPr>
             <a:r>
-              <a:t>Độ lệch Skewness ban đầu = 3.84 cực kỳ cao. Đa số BĐS tập trung ở mức 2 - 6 tỷ nhưng đuôi kéo dài tới 35 tỷ, gây nhiễu sai số lớn.</a:t>
+              <a:t>Đơn giá tập trung chủ yếu ở phân khúc vừa túi tiền (60 - 120 triệu/m²), trong khi một số ít nhà phố mặt tiền đắt đỏ kéo dài phân phối sang phía giá cao.</a:t>
             </a:r>
           </a:p>
         </p:txBody>
@@ -18918,7 +18446,7 @@
           <a:lstStyle/>
           <a:p>
             <a:pPr>
-              <a:defRPr sz="1250" b="1">
+              <a:defRPr sz="1350" b="1">
                 <a:solidFill>
                   <a:srgbClr val="FFFFFF"/>
                 </a:solidFill>
@@ -18926,7 +18454,7 @@
               </a:defRPr>
             </a:pPr>
             <a:r>
-              <a:t>2. GIẢI PHÁP LOG-TRANSFORM</a:t>
+              <a:t>2. HIỆU QUẢ CHUYỂN ĐỔI LOGARIT</a:t>
             </a:r>
           </a:p>
         </p:txBody>
@@ -18957,7 +18485,7 @@
               <a:spcBef>
                 <a:spcPts val="400"/>
               </a:spcBef>
-              <a:defRPr sz="1300">
+              <a:defRPr sz="1350">
                 <a:solidFill>
                   <a:srgbClr val="1E293B"/>
                 </a:solidFill>
@@ -18965,7 +18493,7 @@
               </a:defRPr>
             </a:pPr>
             <a:r>
-              <a:t>Biến đổi logarit đưa Skewness về 0.18, nén biên độ dao động và tạo ra đường cong phân phối chuẩn đối xứng lý tưởng (chuông Gauss).</a:t>
+              <a:t>Phép biến đổi đưa dữ liệu về dạng đối xứng hình chuông chuẩn mực, triệt tiêu độ lệch và tạo điều kiện tối ưu cho mô hình hồi quy tuyến tính.</a:t>
             </a:r>
           </a:p>
         </p:txBody>
@@ -19081,7 +18609,7 @@
           <a:lstStyle/>
           <a:p>
             <a:pPr>
-              <a:defRPr sz="1250" b="1">
+              <a:defRPr sz="1350" b="1">
                 <a:solidFill>
                   <a:srgbClr val="FFFFFF"/>
                 </a:solidFill>
@@ -19120,7 +18648,7 @@
               <a:spcBef>
                 <a:spcPts val="400"/>
               </a:spcBef>
-              <a:defRPr sz="1300">
+              <a:defRPr sz="1350">
                 <a:solidFill>
                   <a:srgbClr val="1E293B"/>
                 </a:solidFill>
@@ -19128,7 +18656,7 @@
               </a:defRPr>
             </a:pPr>
             <a:r>
-              <a:t>Giúp các mô hình nhạy cảm với ngoại lệ (Linear, Ridge) đạt độ hội tụ ổn định, giảm hiện tượng phương sai dư sai thay đổi (Heteroscedasticity).</a:t>
+              <a:t>Giảm bớt sự chi phối quá mức của những căn nhà siêu đắt, giúp mô hình dự báo chính xác và ổn định hơn trên toàn dải giá trị.</a:t>
             </a:r>
           </a:p>
         </p:txBody>
@@ -19268,7 +18796,7 @@
               </a:defRPr>
             </a:pPr>
             <a:r>
-              <a:t>Biểu Đồ 3: Tương Quan Tán Xạ Giữa Diện Tích &amp; Giá Trị BĐS</a:t>
+              <a:t>Biểu Đồ 3: Tương Quan Phân Tán Đa Chiều Giữa Diện Tích, Mặt Tiền &amp; Giá</a:t>
             </a:r>
           </a:p>
         </p:txBody>
@@ -19453,7 +18981,7 @@
           <a:lstStyle/>
           <a:p>
             <a:pPr>
-              <a:defRPr sz="1250" b="1">
+              <a:defRPr sz="1350" b="1">
                 <a:solidFill>
                   <a:srgbClr val="FFFFFF"/>
                 </a:solidFill>
@@ -19461,7 +18989,7 @@
               </a:defRPr>
             </a:pPr>
             <a:r>
-              <a:t>1. QUAN HỆ ĐỒNG BIẾN RÕ NÉT</a:t>
+              <a:t>1. QUY CHUẨN PHÂN LÔ THỰC TẾ</a:t>
             </a:r>
           </a:p>
         </p:txBody>
@@ -19492,7 +19020,7 @@
               <a:spcBef>
                 <a:spcPts val="400"/>
               </a:spcBef>
-              <a:defRPr sz="1300">
+              <a:defRPr sz="1350">
                 <a:solidFill>
                   <a:srgbClr val="1E293B"/>
                 </a:solidFill>
@@ -19500,7 +19028,7 @@
               </a:defRPr>
             </a:pPr>
             <a:r>
-              <a:t>Đường hồi quy thực nghiệm có độ dốc dương rõ ràng: Diện tích càng lớn thì tổng giá trị tài sản càng tăng theo quy luật tuyến tính chủ đạo.</a:t>
+              <a:t>Bề rộng mặt tiền tập trung rất rõ nét theo các kích thước quy chuẩn đô thị phổ biến: 3m, 3.5m, 4m, 4.5m, 5m, 6m.</a:t>
             </a:r>
           </a:p>
         </p:txBody>
@@ -19616,7 +19144,7 @@
           <a:lstStyle/>
           <a:p>
             <a:pPr>
-              <a:defRPr sz="1250" b="1">
+              <a:defRPr sz="1350" b="1">
                 <a:solidFill>
                   <a:srgbClr val="FFFFFF"/>
                 </a:solidFill>
@@ -19624,7 +19152,7 @@
               </a:defRPr>
             </a:pPr>
             <a:r>
-              <a:t>2. TÍNH PHI TUYẾN &amp; ĐỘ PHÂN TÁN</a:t>
+              <a:t>2. BƯỚC NHẢY THƯƠNG MẠI</a:t>
             </a:r>
           </a:p>
         </p:txBody>
@@ -19655,7 +19183,7 @@
               <a:spcBef>
                 <a:spcPts val="400"/>
               </a:spcBef>
-              <a:defRPr sz="1300">
+              <a:defRPr sz="1350">
                 <a:solidFill>
                   <a:srgbClr val="1E293B"/>
                 </a:solidFill>
@@ -19663,7 +19191,7 @@
               </a:defRPr>
             </a:pPr>
             <a:r>
-              <a:t>Tại cùng diện tích 50m², giá nhà dao động mạnh từ 3 tỷ (ngoại thành) đến 15 tỷ (trung tâm), phản ánh trọng số cực lớn của vị trí địa lý.</a:t>
+              <a:t>Mặt tiền từ 5m trở lên tạo bước nhảy vọt về đơn giá nhờ khả năng kinh doanh buôn bán thuận lợi hoặc cho phép ô tô đỗ cửa / vào nhà.</a:t>
             </a:r>
           </a:p>
         </p:txBody>
@@ -19779,7 +19307,7 @@
           <a:lstStyle/>
           <a:p>
             <a:pPr>
-              <a:defRPr sz="1250" b="1">
+              <a:defRPr sz="1350" b="1">
                 <a:solidFill>
                   <a:srgbClr val="FFFFFF"/>
                 </a:solidFill>
@@ -19787,7 +19315,7 @@
               </a:defRPr>
             </a:pPr>
             <a:r>
-              <a:t>3. KHUYẾN NGHỊ MÔ HÌNH HÓA</a:t>
+              <a:t>3. Ý NGHĨA KINH TẾ ĐỊNH GIÁ</a:t>
             </a:r>
           </a:p>
         </p:txBody>
@@ -19818,7 +19346,7 @@
               <a:spcBef>
                 <a:spcPts val="400"/>
               </a:spcBef>
-              <a:defRPr sz="1300">
+              <a:defRPr sz="1350">
                 <a:solidFill>
                   <a:srgbClr val="1E293B"/>
                 </a:solidFill>
@@ -19826,7 +19354,7 @@
               </a:defRPr>
             </a:pPr>
             <a:r>
-              <a:t>Thuật toán tuyến tính đơn thuần không thể bao quát toàn bộ độ phân tán này; bắt buộc phải dùng Gradient Boosting để bắt tương tác phi tuyến.</a:t>
+              <a:t>Bề rộng mặt tiền là yếu tố quyết định thanh khoản và thặng dư thương mại của bất động sản, vượt trội so với diện tích đất thô.</a:t>
             </a:r>
           </a:p>
         </p:txBody>
